--- a/Bharosa_pitch.pptx
+++ b/Bharosa_pitch.pptx
@@ -10,6 +10,7 @@
     <p:sldId id="258" r:id="rId9"/>
     <p:sldId id="259" r:id="rId10"/>
     <p:sldId id="260" r:id="rId11"/>
+    <p:sldId id="261" r:id="rId12"/>
   </p:sldIdLst>
   <p:sldSz cx="12191695" cy="6858000" type="screen4x3"/>
   <p:notesSz cx="6858000" cy="9144000"/>
@@ -3671,7 +3672,7 @@
                 </a:solidFill>
                 <a:latin typeface="Calibri"/>
               </a:rPr>
-              <a:t>1/5</a:t>
+              <a:t>1/6</a:t>
             </a:r>
           </a:p>
         </p:txBody>
@@ -4375,7 +4376,7 @@
                 </a:solidFill>
                 <a:latin typeface="Calibri"/>
               </a:rPr>
-              <a:t>2/5</a:t>
+              <a:t>2/6</a:t>
             </a:r>
           </a:p>
         </p:txBody>
@@ -4514,21 +4515,56 @@
                 </a:solidFill>
                 <a:latin typeface="Calibri"/>
               </a:rPr>
-              <a:t>How Databricks does the heavy lifting</a:t>
-            </a:r>
-          </a:p>
-        </p:txBody>
-      </p:sp>
-      <p:sp>
-        <p:nvSpPr>
-          <p:cNvPr id="5" name="Rectangle 4"/>
+              <a:t>Stack architecture</a:t>
+            </a:r>
+          </a:p>
+        </p:txBody>
+      </p:sp>
+      <p:sp>
+        <p:nvSpPr>
+          <p:cNvPr id="5" name="TextBox 4"/>
+          <p:cNvSpPr txBox="1"/>
+          <p:nvPr/>
+        </p:nvSpPr>
+        <p:spPr>
+          <a:xfrm>
+            <a:off x="457200" y="713232"/>
+            <a:ext cx="10972800" cy="274320"/>
+          </a:xfrm>
+          <a:prstGeom prst="rect">
+            <a:avLst/>
+          </a:prstGeom>
+          <a:noFill/>
+        </p:spPr>
+        <p:txBody>
+          <a:bodyPr wrap="square" lIns="0" rIns="0" tIns="0" bIns="0">
+            <a:spAutoFit/>
+          </a:bodyPr>
+          <a:lstStyle/>
+          <a:p>
+            <a:pPr algn="l"/>
+            <a:r>
+              <a:rPr sz="1100" b="0">
+                <a:solidFill>
+                  <a:srgbClr val="556677"/>
+                </a:solidFill>
+                <a:latin typeface="Calibri"/>
+              </a:rPr>
+              <a:t>Patient phone → Databricks Apps → Model Serving + Vector Search + Unity Catalog · last-mile voice via Sarvam + Bolna</a:t>
+            </a:r>
+          </a:p>
+        </p:txBody>
+      </p:sp>
+      <p:sp>
+        <p:nvSpPr>
+          <p:cNvPr id="6" name="Rectangle 5"/>
           <p:cNvSpPr/>
           <p:nvPr/>
         </p:nvSpPr>
         <p:spPr>
           <a:xfrm>
-            <a:off x="548640" y="914400"/>
-            <a:ext cx="2194560" cy="822960"/>
+            <a:off x="457200" y="1188720"/>
+            <a:ext cx="2377440" cy="1005840"/>
           </a:xfrm>
           <a:prstGeom prst="rect">
             <a:avLst/>
@@ -4564,29 +4600,29 @@
       </p:sp>
       <p:sp>
         <p:nvSpPr>
-          <p:cNvPr id="6" name="TextBox 5"/>
-          <p:cNvSpPr txBox="1"/>
-          <p:nvPr/>
-        </p:nvSpPr>
-        <p:spPr>
-          <a:xfrm>
-            <a:off x="548640" y="960120"/>
-            <a:ext cx="2194560" cy="365760"/>
-          </a:xfrm>
-          <a:prstGeom prst="rect">
-            <a:avLst/>
-          </a:prstGeom>
-          <a:noFill/>
-        </p:spPr>
-        <p:txBody>
-          <a:bodyPr wrap="square" lIns="0" rIns="0" tIns="0" bIns="0">
-            <a:spAutoFit/>
-          </a:bodyPr>
-          <a:lstStyle/>
-          <a:p>
-            <a:pPr algn="ctr"/>
-            <a:r>
-              <a:rPr sz="1200" b="1">
+          <p:cNvPr id="7" name="TextBox 6"/>
+          <p:cNvSpPr txBox="1"/>
+          <p:nvPr/>
+        </p:nvSpPr>
+        <p:spPr>
+          <a:xfrm>
+            <a:off x="621792" y="1280160"/>
+            <a:ext cx="2048256" cy="365760"/>
+          </a:xfrm>
+          <a:prstGeom prst="rect">
+            <a:avLst/>
+          </a:prstGeom>
+          <a:noFill/>
+        </p:spPr>
+        <p:txBody>
+          <a:bodyPr wrap="square" lIns="0" rIns="0" tIns="0" bIns="0">
+            <a:spAutoFit/>
+          </a:bodyPr>
+          <a:lstStyle/>
+          <a:p>
+            <a:pPr algn="l"/>
+            <a:r>
+              <a:rPr sz="1300" b="1">
                 <a:solidFill>
                   <a:srgbClr val="1A1A1A"/>
                 </a:solidFill>
@@ -4599,27 +4635,27 @@
       </p:sp>
       <p:sp>
         <p:nvSpPr>
-          <p:cNvPr id="7" name="TextBox 6"/>
-          <p:cNvSpPr txBox="1"/>
-          <p:nvPr/>
-        </p:nvSpPr>
-        <p:spPr>
-          <a:xfrm>
-            <a:off x="548640" y="1325880"/>
-            <a:ext cx="2194560" cy="365760"/>
-          </a:xfrm>
-          <a:prstGeom prst="rect">
-            <a:avLst/>
-          </a:prstGeom>
-          <a:noFill/>
-        </p:spPr>
-        <p:txBody>
-          <a:bodyPr wrap="square" lIns="0" rIns="0" tIns="0" bIns="0">
-            <a:spAutoFit/>
-          </a:bodyPr>
-          <a:lstStyle/>
-          <a:p>
-            <a:pPr algn="ctr"/>
+          <p:cNvPr id="8" name="TextBox 7"/>
+          <p:cNvSpPr txBox="1"/>
+          <p:nvPr/>
+        </p:nvSpPr>
+        <p:spPr>
+          <a:xfrm>
+            <a:off x="621792" y="1691640"/>
+            <a:ext cx="2048256" cy="411480"/>
+          </a:xfrm>
+          <a:prstGeom prst="rect">
+            <a:avLst/>
+          </a:prstGeom>
+          <a:noFill/>
+        </p:spPr>
+        <p:txBody>
+          <a:bodyPr wrap="square" lIns="0" rIns="0" tIns="0" bIns="0">
+            <a:spAutoFit/>
+          </a:bodyPr>
+          <a:lstStyle/>
+          <a:p>
+            <a:pPr algn="l"/>
             <a:r>
               <a:rPr sz="1000" b="0">
                 <a:solidFill>
@@ -4627,21 +4663,33 @@
                 </a:solidFill>
                 <a:latin typeface="Calibri"/>
               </a:rPr>
-              <a:t>PWA · vanilla JS · Hindi/EN/ML</a:t>
-            </a:r>
-          </a:p>
-        </p:txBody>
-      </p:sp>
-      <p:sp>
-        <p:nvSpPr>
-          <p:cNvPr id="8" name="Rectangle 7"/>
+              <a:t>PWA · vanilla JS</a:t>
+            </a:r>
+          </a:p>
+          <a:p>
+            <a:pPr algn="l"/>
+            <a:r>
+              <a:rPr sz="1000" b="0">
+                <a:solidFill>
+                  <a:srgbClr val="556677"/>
+                </a:solidFill>
+                <a:latin typeface="Calibri"/>
+              </a:rPr>
+              <a:t>Hindi · English · Malayalam</a:t>
+            </a:r>
+          </a:p>
+        </p:txBody>
+      </p:sp>
+      <p:sp>
+        <p:nvSpPr>
+          <p:cNvPr id="9" name="Rectangle 8"/>
           <p:cNvSpPr/>
           <p:nvPr/>
         </p:nvSpPr>
         <p:spPr>
           <a:xfrm>
-            <a:off x="3108960" y="914400"/>
-            <a:ext cx="2743200" cy="822960"/>
+            <a:off x="4297680" y="1188720"/>
+            <a:ext cx="3657600" cy="1005840"/>
           </a:xfrm>
           <a:prstGeom prst="rect">
             <a:avLst/>
@@ -4677,27 +4725,27 @@
       </p:sp>
       <p:sp>
         <p:nvSpPr>
-          <p:cNvPr id="9" name="TextBox 8"/>
-          <p:cNvSpPr txBox="1"/>
-          <p:nvPr/>
-        </p:nvSpPr>
-        <p:spPr>
-          <a:xfrm>
-            <a:off x="3108960" y="960120"/>
-            <a:ext cx="2743200" cy="365760"/>
-          </a:xfrm>
-          <a:prstGeom prst="rect">
-            <a:avLst/>
-          </a:prstGeom>
-          <a:noFill/>
-        </p:spPr>
-        <p:txBody>
-          <a:bodyPr wrap="square" lIns="0" rIns="0" tIns="0" bIns="0">
-            <a:spAutoFit/>
-          </a:bodyPr>
-          <a:lstStyle/>
-          <a:p>
-            <a:pPr algn="ctr"/>
+          <p:cNvPr id="10" name="TextBox 9"/>
+          <p:cNvSpPr txBox="1"/>
+          <p:nvPr/>
+        </p:nvSpPr>
+        <p:spPr>
+          <a:xfrm>
+            <a:off x="4462272" y="1280160"/>
+            <a:ext cx="3328416" cy="365760"/>
+          </a:xfrm>
+          <a:prstGeom prst="rect">
+            <a:avLst/>
+          </a:prstGeom>
+          <a:noFill/>
+        </p:spPr>
+        <p:txBody>
+          <a:bodyPr wrap="square" lIns="0" rIns="0" tIns="0" bIns="0">
+            <a:spAutoFit/>
+          </a:bodyPr>
+          <a:lstStyle/>
+          <a:p>
+            <a:pPr algn="l"/>
             <a:r>
               <a:rPr sz="1300" b="1">
                 <a:solidFill>
@@ -4712,27 +4760,27 @@
       </p:sp>
       <p:sp>
         <p:nvSpPr>
-          <p:cNvPr id="10" name="TextBox 9"/>
-          <p:cNvSpPr txBox="1"/>
-          <p:nvPr/>
-        </p:nvSpPr>
-        <p:spPr>
-          <a:xfrm>
-            <a:off x="3108960" y="1325880"/>
-            <a:ext cx="2743200" cy="365760"/>
-          </a:xfrm>
-          <a:prstGeom prst="rect">
-            <a:avLst/>
-          </a:prstGeom>
-          <a:noFill/>
-        </p:spPr>
-        <p:txBody>
-          <a:bodyPr wrap="square" lIns="0" rIns="0" tIns="0" bIns="0">
-            <a:spAutoFit/>
-          </a:bodyPr>
-          <a:lstStyle/>
-          <a:p>
-            <a:pPr algn="ctr"/>
+          <p:cNvPr id="11" name="TextBox 10"/>
+          <p:cNvSpPr txBox="1"/>
+          <p:nvPr/>
+        </p:nvSpPr>
+        <p:spPr>
+          <a:xfrm>
+            <a:off x="4462272" y="1691640"/>
+            <a:ext cx="3328416" cy="411480"/>
+          </a:xfrm>
+          <a:prstGeom prst="rect">
+            <a:avLst/>
+          </a:prstGeom>
+          <a:noFill/>
+        </p:spPr>
+        <p:txBody>
+          <a:bodyPr wrap="square" lIns="0" rIns="0" tIns="0" bIns="0">
+            <a:spAutoFit/>
+          </a:bodyPr>
+          <a:lstStyle/>
+          <a:p>
+            <a:pPr algn="l"/>
             <a:r>
               <a:rPr sz="1000" b="0">
                 <a:solidFill>
@@ -4740,134 +4788,33 @@
                 </a:solidFill>
                 <a:latin typeface="Calibri"/>
               </a:rPr>
-              <a:t>FastAPI · M2M OAuth · Secrets</a:t>
-            </a:r>
-          </a:p>
-        </p:txBody>
-      </p:sp>
-      <p:sp>
-        <p:nvSpPr>
-          <p:cNvPr id="11" name="Rectangle 10"/>
+              <a:t>FastAPI · M2M OAuth</a:t>
+            </a:r>
+          </a:p>
+          <a:p>
+            <a:pPr algn="l"/>
+            <a:r>
+              <a:rPr sz="1000" b="0">
+                <a:solidFill>
+                  <a:srgbClr val="FFFFFF"/>
+                </a:solidFill>
+                <a:latin typeface="Calibri"/>
+              </a:rPr>
+              <a:t>app/main.py + routers</a:t>
+            </a:r>
+          </a:p>
+        </p:txBody>
+      </p:sp>
+      <p:sp>
+        <p:nvSpPr>
+          <p:cNvPr id="12" name="Rectangle 11"/>
           <p:cNvSpPr/>
           <p:nvPr/>
         </p:nvSpPr>
         <p:spPr>
           <a:xfrm>
-            <a:off x="6217920" y="914400"/>
-            <a:ext cx="2377440" cy="822960"/>
-          </a:xfrm>
-          <a:prstGeom prst="rect">
-            <a:avLst/>
-          </a:prstGeom>
-          <a:solidFill>
-            <a:srgbClr val="1565C0"/>
-          </a:solidFill>
-          <a:ln>
-            <a:noFill/>
-          </a:ln>
-        </p:spPr>
-        <p:style>
-          <a:lnRef idx="1">
-            <a:schemeClr val="accent1"/>
-          </a:lnRef>
-          <a:fillRef idx="3">
-            <a:schemeClr val="accent1"/>
-          </a:fillRef>
-          <a:effectRef idx="2">
-            <a:schemeClr val="accent1"/>
-          </a:effectRef>
-          <a:fontRef idx="minor">
-            <a:schemeClr val="lt1"/>
-          </a:fontRef>
-        </p:style>
-        <p:txBody>
-          <a:bodyPr rtlCol="0" anchor="ctr"/>
-          <a:lstStyle/>
-          <a:p>
-            <a:pPr algn="ctr"/>
-          </a:p>
-        </p:txBody>
-      </p:sp>
-      <p:sp>
-        <p:nvSpPr>
-          <p:cNvPr id="12" name="TextBox 11"/>
-          <p:cNvSpPr txBox="1"/>
-          <p:nvPr/>
-        </p:nvSpPr>
-        <p:spPr>
-          <a:xfrm>
-            <a:off x="6217920" y="960120"/>
-            <a:ext cx="2377440" cy="365760"/>
-          </a:xfrm>
-          <a:prstGeom prst="rect">
-            <a:avLst/>
-          </a:prstGeom>
-          <a:noFill/>
-        </p:spPr>
-        <p:txBody>
-          <a:bodyPr wrap="square" lIns="0" rIns="0" tIns="0" bIns="0">
-            <a:spAutoFit/>
-          </a:bodyPr>
-          <a:lstStyle/>
-          <a:p>
-            <a:pPr algn="ctr"/>
-            <a:r>
-              <a:rPr sz="1300" b="1">
-                <a:solidFill>
-                  <a:srgbClr val="FFFFFF"/>
-                </a:solidFill>
-                <a:latin typeface="Calibri"/>
-              </a:rPr>
-              <a:t>Asset Bundles</a:t>
-            </a:r>
-          </a:p>
-        </p:txBody>
-      </p:sp>
-      <p:sp>
-        <p:nvSpPr>
-          <p:cNvPr id="13" name="TextBox 12"/>
-          <p:cNvSpPr txBox="1"/>
-          <p:nvPr/>
-        </p:nvSpPr>
-        <p:spPr>
-          <a:xfrm>
-            <a:off x="6217920" y="1325880"/>
-            <a:ext cx="2377440" cy="365760"/>
-          </a:xfrm>
-          <a:prstGeom prst="rect">
-            <a:avLst/>
-          </a:prstGeom>
-          <a:noFill/>
-        </p:spPr>
-        <p:txBody>
-          <a:bodyPr wrap="square" lIns="0" rIns="0" tIns="0" bIns="0">
-            <a:spAutoFit/>
-          </a:bodyPr>
-          <a:lstStyle/>
-          <a:p>
-            <a:pPr algn="ctr"/>
-            <a:r>
-              <a:rPr sz="1000" b="0">
-                <a:solidFill>
-                  <a:srgbClr val="FFFFFF"/>
-                </a:solidFill>
-                <a:latin typeface="Calibri"/>
-              </a:rPr>
-              <a:t>one-command deploy</a:t>
-            </a:r>
-          </a:p>
-        </p:txBody>
-      </p:sp>
-      <p:sp>
-        <p:nvSpPr>
-          <p:cNvPr id="14" name="Rectangle 13"/>
-          <p:cNvSpPr/>
-          <p:nvPr/>
-        </p:nvSpPr>
-        <p:spPr>
-          <a:xfrm>
-            <a:off x="8961120" y="914400"/>
-            <a:ext cx="2743200" cy="822960"/>
+            <a:off x="9418320" y="1188720"/>
+            <a:ext cx="2377440" cy="1005840"/>
           </a:xfrm>
           <a:prstGeom prst="rect">
             <a:avLst/>
@@ -4903,62 +4850,62 @@
       </p:sp>
       <p:sp>
         <p:nvSpPr>
-          <p:cNvPr id="15" name="TextBox 14"/>
-          <p:cNvSpPr txBox="1"/>
-          <p:nvPr/>
-        </p:nvSpPr>
-        <p:spPr>
-          <a:xfrm>
-            <a:off x="8961120" y="960120"/>
-            <a:ext cx="2743200" cy="365760"/>
-          </a:xfrm>
-          <a:prstGeom prst="rect">
-            <a:avLst/>
-          </a:prstGeom>
-          <a:noFill/>
-        </p:spPr>
-        <p:txBody>
-          <a:bodyPr wrap="square" lIns="0" rIns="0" tIns="0" bIns="0">
-            <a:spAutoFit/>
-          </a:bodyPr>
-          <a:lstStyle/>
-          <a:p>
-            <a:pPr algn="ctr"/>
-            <a:r>
-              <a:rPr sz="1200" b="1">
+          <p:cNvPr id="13" name="TextBox 12"/>
+          <p:cNvSpPr txBox="1"/>
+          <p:nvPr/>
+        </p:nvSpPr>
+        <p:spPr>
+          <a:xfrm>
+            <a:off x="9582912" y="1280160"/>
+            <a:ext cx="2048256" cy="365760"/>
+          </a:xfrm>
+          <a:prstGeom prst="rect">
+            <a:avLst/>
+          </a:prstGeom>
+          <a:noFill/>
+        </p:spPr>
+        <p:txBody>
+          <a:bodyPr wrap="square" lIns="0" rIns="0" tIns="0" bIns="0">
+            <a:spAutoFit/>
+          </a:bodyPr>
+          <a:lstStyle/>
+          <a:p>
+            <a:pPr algn="l"/>
+            <a:r>
+              <a:rPr sz="1300" b="1">
                 <a:solidFill>
                   <a:srgbClr val="1A1A1A"/>
                 </a:solidFill>
                 <a:latin typeface="Calibri"/>
               </a:rPr>
-              <a:t>🔊 Sarvam · 📞 Bolna</a:t>
-            </a:r>
-          </a:p>
-        </p:txBody>
-      </p:sp>
-      <p:sp>
-        <p:nvSpPr>
-          <p:cNvPr id="16" name="TextBox 15"/>
-          <p:cNvSpPr txBox="1"/>
-          <p:nvPr/>
-        </p:nvSpPr>
-        <p:spPr>
-          <a:xfrm>
-            <a:off x="8961120" y="1325880"/>
-            <a:ext cx="2743200" cy="365760"/>
-          </a:xfrm>
-          <a:prstGeom prst="rect">
-            <a:avLst/>
-          </a:prstGeom>
-          <a:noFill/>
-        </p:spPr>
-        <p:txBody>
-          <a:bodyPr wrap="square" lIns="0" rIns="0" tIns="0" bIns="0">
-            <a:spAutoFit/>
-          </a:bodyPr>
-          <a:lstStyle/>
-          <a:p>
-            <a:pPr algn="ctr"/>
+              <a:t>📞 Bolna · 🔊 Sarvam</a:t>
+            </a:r>
+          </a:p>
+        </p:txBody>
+      </p:sp>
+      <p:sp>
+        <p:nvSpPr>
+          <p:cNvPr id="14" name="TextBox 13"/>
+          <p:cNvSpPr txBox="1"/>
+          <p:nvPr/>
+        </p:nvSpPr>
+        <p:spPr>
+          <a:xfrm>
+            <a:off x="9582912" y="1691640"/>
+            <a:ext cx="2048256" cy="411480"/>
+          </a:xfrm>
+          <a:prstGeom prst="rect">
+            <a:avLst/>
+          </a:prstGeom>
+          <a:noFill/>
+        </p:spPr>
+        <p:txBody>
+          <a:bodyPr wrap="square" lIns="0" rIns="0" tIns="0" bIns="0">
+            <a:spAutoFit/>
+          </a:bodyPr>
+          <a:lstStyle/>
+          <a:p>
+            <a:pPr algn="l"/>
             <a:r>
               <a:rPr sz="1000" b="0">
                 <a:solidFill>
@@ -4966,56 +4913,313 @@
                 </a:solidFill>
                 <a:latin typeface="Calibri"/>
               </a:rPr>
-              <a:t>TTS / ASR · Indic voice agent</a:t>
-            </a:r>
-          </a:p>
-        </p:txBody>
-      </p:sp>
-      <p:sp>
-        <p:nvSpPr>
-          <p:cNvPr id="17" name="TextBox 16"/>
-          <p:cNvSpPr txBox="1"/>
-          <p:nvPr/>
-        </p:nvSpPr>
-        <p:spPr>
-          <a:xfrm>
-            <a:off x="548640" y="1965960"/>
-            <a:ext cx="10972800" cy="365760"/>
-          </a:xfrm>
-          <a:prstGeom prst="rect">
-            <a:avLst/>
-          </a:prstGeom>
-          <a:noFill/>
-        </p:spPr>
-        <p:txBody>
-          <a:bodyPr wrap="square" lIns="0" rIns="0" tIns="0" bIns="0">
-            <a:spAutoFit/>
-          </a:bodyPr>
-          <a:lstStyle/>
-          <a:p>
-            <a:pPr algn="l"/>
-            <a:r>
-              <a:rPr sz="1300" b="1">
-                <a:solidFill>
-                  <a:srgbClr val="0B2A4A"/>
-                </a:solidFill>
-                <a:latin typeface="Calibri"/>
-              </a:rPr>
-              <a:t>Mosaic AI Model Serving — three endpoints, three jobs:</a:t>
-            </a:r>
-          </a:p>
-        </p:txBody>
-      </p:sp>
-      <p:sp>
-        <p:nvSpPr>
-          <p:cNvPr id="18" name="Rectangle 17"/>
+              <a:t>Indic voice agent</a:t>
+            </a:r>
+          </a:p>
+          <a:p>
+            <a:pPr algn="l"/>
+            <a:r>
+              <a:rPr sz="1000" b="0">
+                <a:solidFill>
+                  <a:srgbClr val="556677"/>
+                </a:solidFill>
+                <a:latin typeface="Calibri"/>
+              </a:rPr>
+              <a:t>Bulbul v2 TTS · Saarika ASR</a:t>
+            </a:r>
+          </a:p>
+        </p:txBody>
+      </p:sp>
+      <p:cxnSp>
+        <p:nvCxnSpPr>
+          <p:cNvPr id="15" name="Connector 14"/>
+          <p:cNvCxnSpPr/>
+          <p:nvPr/>
+        </p:nvCxnSpPr>
+        <p:spPr>
+          <a:xfrm>
+            <a:off x="2834640" y="1691640"/>
+            <a:ext cx="1463040" cy="0"/>
+          </a:xfrm>
+          <a:prstGeom prst="line">
+            <a:avLst/>
+          </a:prstGeom>
+          <a:ln w="19050">
+            <a:solidFill>
+              <a:srgbClr val="0B2A4A"/>
+            </a:solidFill>
+          </a:ln>
+        </p:spPr>
+        <p:style>
+          <a:lnRef idx="2">
+            <a:schemeClr val="accent1"/>
+          </a:lnRef>
+          <a:fillRef idx="0">
+            <a:schemeClr val="accent1"/>
+          </a:fillRef>
+          <a:effectRef idx="1">
+            <a:schemeClr val="accent1"/>
+          </a:effectRef>
+          <a:fontRef idx="minor">
+            <a:schemeClr val="tx1"/>
+          </a:fontRef>
+        </p:style>
+      </p:cxnSp>
+      <p:cxnSp>
+        <p:nvCxnSpPr>
+          <p:cNvPr id="16" name="Connector 15"/>
+          <p:cNvCxnSpPr/>
+          <p:nvPr/>
+        </p:nvCxnSpPr>
+        <p:spPr>
+          <a:xfrm flipH="1">
+            <a:off x="2834640" y="1874519"/>
+            <a:ext cx="1463040" cy="0"/>
+          </a:xfrm>
+          <a:prstGeom prst="line">
+            <a:avLst/>
+          </a:prstGeom>
+          <a:ln w="19050">
+            <a:solidFill>
+              <a:srgbClr val="0B2A4A"/>
+            </a:solidFill>
+          </a:ln>
+        </p:spPr>
+        <p:style>
+          <a:lnRef idx="2">
+            <a:schemeClr val="accent1"/>
+          </a:lnRef>
+          <a:fillRef idx="0">
+            <a:schemeClr val="accent1"/>
+          </a:fillRef>
+          <a:effectRef idx="1">
+            <a:schemeClr val="accent1"/>
+          </a:effectRef>
+          <a:fontRef idx="minor">
+            <a:schemeClr val="tx1"/>
+          </a:fontRef>
+        </p:style>
+      </p:cxnSp>
+      <p:cxnSp>
+        <p:nvCxnSpPr>
+          <p:cNvPr id="17" name="Connector 16"/>
+          <p:cNvCxnSpPr/>
+          <p:nvPr/>
+        </p:nvCxnSpPr>
+        <p:spPr>
+          <a:xfrm>
+            <a:off x="7955279" y="1691640"/>
+            <a:ext cx="1463041" cy="0"/>
+          </a:xfrm>
+          <a:prstGeom prst="line">
+            <a:avLst/>
+          </a:prstGeom>
+          <a:ln w="19050">
+            <a:solidFill>
+              <a:srgbClr val="0B2A4A"/>
+            </a:solidFill>
+          </a:ln>
+        </p:spPr>
+        <p:style>
+          <a:lnRef idx="2">
+            <a:schemeClr val="accent1"/>
+          </a:lnRef>
+          <a:fillRef idx="0">
+            <a:schemeClr val="accent1"/>
+          </a:fillRef>
+          <a:effectRef idx="1">
+            <a:schemeClr val="accent1"/>
+          </a:effectRef>
+          <a:fontRef idx="minor">
+            <a:schemeClr val="tx1"/>
+          </a:fontRef>
+        </p:style>
+      </p:cxnSp>
+      <p:cxnSp>
+        <p:nvCxnSpPr>
+          <p:cNvPr id="18" name="Connector 17"/>
+          <p:cNvCxnSpPr/>
+          <p:nvPr/>
+        </p:nvCxnSpPr>
+        <p:spPr>
+          <a:xfrm flipH="1">
+            <a:off x="7955279" y="1874519"/>
+            <a:ext cx="1463041" cy="0"/>
+          </a:xfrm>
+          <a:prstGeom prst="line">
+            <a:avLst/>
+          </a:prstGeom>
+          <a:ln w="19050">
+            <a:solidFill>
+              <a:srgbClr val="0B2A4A"/>
+            </a:solidFill>
+          </a:ln>
+        </p:spPr>
+        <p:style>
+          <a:lnRef idx="2">
+            <a:schemeClr val="accent1"/>
+          </a:lnRef>
+          <a:fillRef idx="0">
+            <a:schemeClr val="accent1"/>
+          </a:fillRef>
+          <a:effectRef idx="1">
+            <a:schemeClr val="accent1"/>
+          </a:effectRef>
+          <a:fontRef idx="minor">
+            <a:schemeClr val="tx1"/>
+          </a:fontRef>
+        </p:style>
+      </p:cxnSp>
+      <p:sp>
+        <p:nvSpPr>
+          <p:cNvPr id="19" name="TextBox 18"/>
+          <p:cNvSpPr txBox="1"/>
+          <p:nvPr/>
+        </p:nvSpPr>
+        <p:spPr>
+          <a:xfrm>
+            <a:off x="2880360" y="1417320"/>
+            <a:ext cx="1371600" cy="228600"/>
+          </a:xfrm>
+          <a:prstGeom prst="rect">
+            <a:avLst/>
+          </a:prstGeom>
+          <a:noFill/>
+        </p:spPr>
+        <p:txBody>
+          <a:bodyPr wrap="square" lIns="0" rIns="0" tIns="0" bIns="0">
+            <a:spAutoFit/>
+          </a:bodyPr>
+          <a:lstStyle/>
+          <a:p>
+            <a:pPr algn="l"/>
+            <a:r>
+              <a:rPr sz="900" b="0">
+                <a:solidFill>
+                  <a:srgbClr val="556677"/>
+                </a:solidFill>
+                <a:latin typeface="Calibri"/>
+              </a:rPr>
+              <a:t>prescription jpg</a:t>
+            </a:r>
+          </a:p>
+        </p:txBody>
+      </p:sp>
+      <p:sp>
+        <p:nvSpPr>
+          <p:cNvPr id="20" name="TextBox 19"/>
+          <p:cNvSpPr txBox="1"/>
+          <p:nvPr/>
+        </p:nvSpPr>
+        <p:spPr>
+          <a:xfrm>
+            <a:off x="2880360" y="1920240"/>
+            <a:ext cx="1371600" cy="228600"/>
+          </a:xfrm>
+          <a:prstGeom prst="rect">
+            <a:avLst/>
+          </a:prstGeom>
+          <a:noFill/>
+        </p:spPr>
+        <p:txBody>
+          <a:bodyPr wrap="square" lIns="0" rIns="0" tIns="0" bIns="0">
+            <a:spAutoFit/>
+          </a:bodyPr>
+          <a:lstStyle/>
+          <a:p>
+            <a:pPr algn="l"/>
+            <a:r>
+              <a:rPr sz="900" b="0">
+                <a:solidFill>
+                  <a:srgbClr val="556677"/>
+                </a:solidFill>
+                <a:latin typeface="Calibri"/>
+              </a:rPr>
+              <a:t>bilingual audio + JSON</a:t>
+            </a:r>
+          </a:p>
+        </p:txBody>
+      </p:sp>
+      <p:sp>
+        <p:nvSpPr>
+          <p:cNvPr id="21" name="TextBox 20"/>
+          <p:cNvSpPr txBox="1"/>
+          <p:nvPr/>
+        </p:nvSpPr>
+        <p:spPr>
+          <a:xfrm>
+            <a:off x="8001000" y="1417320"/>
+            <a:ext cx="1371600" cy="228600"/>
+          </a:xfrm>
+          <a:prstGeom prst="rect">
+            <a:avLst/>
+          </a:prstGeom>
+          <a:noFill/>
+        </p:spPr>
+        <p:txBody>
+          <a:bodyPr wrap="square" lIns="0" rIns="0" tIns="0" bIns="0">
+            <a:spAutoFit/>
+          </a:bodyPr>
+          <a:lstStyle/>
+          <a:p>
+            <a:pPr algn="l"/>
+            <a:r>
+              <a:rPr sz="900" b="0">
+                <a:solidFill>
+                  <a:srgbClr val="556677"/>
+                </a:solidFill>
+                <a:latin typeface="Calibri"/>
+              </a:rPr>
+              <a:t>user_data</a:t>
+            </a:r>
+          </a:p>
+        </p:txBody>
+      </p:sp>
+      <p:sp>
+        <p:nvSpPr>
+          <p:cNvPr id="22" name="TextBox 21"/>
+          <p:cNvSpPr txBox="1"/>
+          <p:nvPr/>
+        </p:nvSpPr>
+        <p:spPr>
+          <a:xfrm>
+            <a:off x="8001000" y="1920240"/>
+            <a:ext cx="1371600" cy="228600"/>
+          </a:xfrm>
+          <a:prstGeom prst="rect">
+            <a:avLst/>
+          </a:prstGeom>
+          <a:noFill/>
+        </p:spPr>
+        <p:txBody>
+          <a:bodyPr wrap="square" lIns="0" rIns="0" tIns="0" bIns="0">
+            <a:spAutoFit/>
+          </a:bodyPr>
+          <a:lstStyle/>
+          <a:p>
+            <a:pPr algn="l"/>
+            <a:r>
+              <a:rPr sz="900" b="0">
+                <a:solidFill>
+                  <a:srgbClr val="556677"/>
+                </a:solidFill>
+                <a:latin typeface="Calibri"/>
+              </a:rPr>
+              <a:t>call · transcript</a:t>
+            </a:r>
+          </a:p>
+        </p:txBody>
+      </p:sp>
+      <p:sp>
+        <p:nvSpPr>
+          <p:cNvPr id="23" name="Rectangle 22"/>
           <p:cNvSpPr/>
           <p:nvPr/>
         </p:nvSpPr>
         <p:spPr>
           <a:xfrm>
-            <a:off x="548640" y="2423160"/>
-            <a:ext cx="3703320" cy="914400"/>
+            <a:off x="457200" y="2651760"/>
+            <a:ext cx="3657600" cy="2011680"/>
           </a:xfrm>
           <a:prstGeom prst="rect">
             <a:avLst/>
@@ -5051,84 +5255,108 @@
       </p:sp>
       <p:sp>
         <p:nvSpPr>
-          <p:cNvPr id="19" name="TextBox 18"/>
-          <p:cNvSpPr txBox="1"/>
-          <p:nvPr/>
-        </p:nvSpPr>
-        <p:spPr>
-          <a:xfrm>
-            <a:off x="685800" y="2514600"/>
-            <a:ext cx="3474720" cy="365760"/>
-          </a:xfrm>
-          <a:prstGeom prst="rect">
-            <a:avLst/>
-          </a:prstGeom>
-          <a:noFill/>
-        </p:spPr>
-        <p:txBody>
-          <a:bodyPr wrap="square" lIns="0" rIns="0" tIns="0" bIns="0">
-            <a:spAutoFit/>
-          </a:bodyPr>
-          <a:lstStyle/>
-          <a:p>
-            <a:pPr algn="l"/>
-            <a:r>
-              <a:rPr sz="1200" b="1">
+          <p:cNvPr id="24" name="TextBox 23"/>
+          <p:cNvSpPr txBox="1"/>
+          <p:nvPr/>
+        </p:nvSpPr>
+        <p:spPr>
+          <a:xfrm>
+            <a:off x="621792" y="2743200"/>
+            <a:ext cx="3328416" cy="365760"/>
+          </a:xfrm>
+          <a:prstGeom prst="rect">
+            <a:avLst/>
+          </a:prstGeom>
+          <a:noFill/>
+        </p:spPr>
+        <p:txBody>
+          <a:bodyPr wrap="square" lIns="0" rIns="0" tIns="0" bIns="0">
+            <a:spAutoFit/>
+          </a:bodyPr>
+          <a:lstStyle/>
+          <a:p>
+            <a:pPr algn="l"/>
+            <a:r>
+              <a:rPr sz="1300" b="1">
                 <a:solidFill>
                   <a:srgbClr val="FFFFFF"/>
                 </a:solidFill>
                 <a:latin typeface="Calibri"/>
               </a:rPr>
-              <a:t>Llama-4-Maverick (vision)</a:t>
-            </a:r>
-          </a:p>
-        </p:txBody>
-      </p:sp>
-      <p:sp>
-        <p:nvSpPr>
-          <p:cNvPr id="20" name="TextBox 19"/>
-          <p:cNvSpPr txBox="1"/>
-          <p:nvPr/>
-        </p:nvSpPr>
-        <p:spPr>
-          <a:xfrm>
-            <a:off x="685800" y="2926080"/>
-            <a:ext cx="3474720" cy="365760"/>
-          </a:xfrm>
-          <a:prstGeom prst="rect">
-            <a:avLst/>
-          </a:prstGeom>
-          <a:noFill/>
-        </p:spPr>
-        <p:txBody>
-          <a:bodyPr wrap="square" lIns="0" rIns="0" tIns="0" bIns="0">
-            <a:spAutoFit/>
-          </a:bodyPr>
-          <a:lstStyle/>
-          <a:p>
-            <a:pPr algn="l"/>
-            <a:r>
-              <a:rPr sz="1100" b="0">
+              <a:t>Mosaic AI Model Serving</a:t>
+            </a:r>
+          </a:p>
+        </p:txBody>
+      </p:sp>
+      <p:sp>
+        <p:nvSpPr>
+          <p:cNvPr id="25" name="TextBox 24"/>
+          <p:cNvSpPr txBox="1"/>
+          <p:nvPr/>
+        </p:nvSpPr>
+        <p:spPr>
+          <a:xfrm>
+            <a:off x="621792" y="3154680"/>
+            <a:ext cx="3328416" cy="1417320"/>
+          </a:xfrm>
+          <a:prstGeom prst="rect">
+            <a:avLst/>
+          </a:prstGeom>
+          <a:noFill/>
+        </p:spPr>
+        <p:txBody>
+          <a:bodyPr wrap="square" lIns="0" rIns="0" tIns="0" bIns="0">
+            <a:spAutoFit/>
+          </a:bodyPr>
+          <a:lstStyle/>
+          <a:p>
+            <a:pPr algn="l"/>
+            <a:r>
+              <a:rPr sz="1000" b="0">
                 <a:solidFill>
                   <a:srgbClr val="EF6C00"/>
                 </a:solidFill>
                 <a:latin typeface="Calibri"/>
               </a:rPr>
-              <a:t>prescription OCR</a:t>
-            </a:r>
-          </a:p>
-        </p:txBody>
-      </p:sp>
-      <p:sp>
-        <p:nvSpPr>
-          <p:cNvPr id="21" name="Rectangle 20"/>
+              <a:t>• llama-4-maverick — vision OCR</a:t>
+            </a:r>
+          </a:p>
+          <a:p>
+            <a:pPr algn="l"/>
+            <a:r>
+              <a:rPr sz="1000" b="0">
+                <a:solidFill>
+                  <a:srgbClr val="EF6C00"/>
+                </a:solidFill>
+                <a:latin typeface="Calibri"/>
+              </a:rPr>
+              <a:t>• llama-3-3-70b-instruct — reasoning</a:t>
+            </a:r>
+          </a:p>
+          <a:p>
+            <a:pPr algn="l"/>
+            <a:r>
+              <a:rPr sz="1000" b="0">
+                <a:solidFill>
+                  <a:srgbClr val="EF6C00"/>
+                </a:solidFill>
+                <a:latin typeface="Calibri"/>
+              </a:rPr>
+              <a:t>• gte-large-en — embeddings</a:t>
+            </a:r>
+          </a:p>
+        </p:txBody>
+      </p:sp>
+      <p:sp>
+        <p:nvSpPr>
+          <p:cNvPr id="26" name="Rectangle 25"/>
           <p:cNvSpPr/>
           <p:nvPr/>
         </p:nvSpPr>
         <p:spPr>
           <a:xfrm>
-            <a:off x="4343400" y="2423160"/>
-            <a:ext cx="3703320" cy="914400"/>
+            <a:off x="4297680" y="2651760"/>
+            <a:ext cx="3657600" cy="2011680"/>
           </a:xfrm>
           <a:prstGeom prst="rect">
             <a:avLst/>
@@ -5164,84 +5392,108 @@
       </p:sp>
       <p:sp>
         <p:nvSpPr>
-          <p:cNvPr id="22" name="TextBox 21"/>
-          <p:cNvSpPr txBox="1"/>
-          <p:nvPr/>
-        </p:nvSpPr>
-        <p:spPr>
-          <a:xfrm>
-            <a:off x="4480560" y="2514600"/>
-            <a:ext cx="3474720" cy="365760"/>
-          </a:xfrm>
-          <a:prstGeom prst="rect">
-            <a:avLst/>
-          </a:prstGeom>
-          <a:noFill/>
-        </p:spPr>
-        <p:txBody>
-          <a:bodyPr wrap="square" lIns="0" rIns="0" tIns="0" bIns="0">
-            <a:spAutoFit/>
-          </a:bodyPr>
-          <a:lstStyle/>
-          <a:p>
-            <a:pPr algn="l"/>
-            <a:r>
-              <a:rPr sz="1200" b="1">
+          <p:cNvPr id="27" name="TextBox 26"/>
+          <p:cNvSpPr txBox="1"/>
+          <p:nvPr/>
+        </p:nvSpPr>
+        <p:spPr>
+          <a:xfrm>
+            <a:off x="4462272" y="2743200"/>
+            <a:ext cx="3328416" cy="365760"/>
+          </a:xfrm>
+          <a:prstGeom prst="rect">
+            <a:avLst/>
+          </a:prstGeom>
+          <a:noFill/>
+        </p:spPr>
+        <p:txBody>
+          <a:bodyPr wrap="square" lIns="0" rIns="0" tIns="0" bIns="0">
+            <a:spAutoFit/>
+          </a:bodyPr>
+          <a:lstStyle/>
+          <a:p>
+            <a:pPr algn="l"/>
+            <a:r>
+              <a:rPr sz="1300" b="1">
                 <a:solidFill>
                   <a:srgbClr val="FFFFFF"/>
                 </a:solidFill>
                 <a:latin typeface="Calibri"/>
               </a:rPr>
-              <a:t>Llama-3-3-70B-Instruct</a:t>
-            </a:r>
-          </a:p>
-        </p:txBody>
-      </p:sp>
-      <p:sp>
-        <p:nvSpPr>
-          <p:cNvPr id="23" name="TextBox 22"/>
-          <p:cNvSpPr txBox="1"/>
-          <p:nvPr/>
-        </p:nvSpPr>
-        <p:spPr>
-          <a:xfrm>
-            <a:off x="4480560" y="2926080"/>
-            <a:ext cx="3474720" cy="365760"/>
-          </a:xfrm>
-          <a:prstGeom prst="rect">
-            <a:avLst/>
-          </a:prstGeom>
-          <a:noFill/>
-        </p:spPr>
-        <p:txBody>
-          <a:bodyPr wrap="square" lIns="0" rIns="0" tIns="0" bIns="0">
-            <a:spAutoFit/>
-          </a:bodyPr>
-          <a:lstStyle/>
-          <a:p>
-            <a:pPr algn="l"/>
-            <a:r>
-              <a:rPr sz="1100" b="0">
+              <a:t>Mosaic AI Vector Search</a:t>
+            </a:r>
+          </a:p>
+        </p:txBody>
+      </p:sp>
+      <p:sp>
+        <p:nvSpPr>
+          <p:cNvPr id="28" name="TextBox 27"/>
+          <p:cNvSpPr txBox="1"/>
+          <p:nvPr/>
+        </p:nvSpPr>
+        <p:spPr>
+          <a:xfrm>
+            <a:off x="4462272" y="3154680"/>
+            <a:ext cx="3328416" cy="1417320"/>
+          </a:xfrm>
+          <a:prstGeom prst="rect">
+            <a:avLst/>
+          </a:prstGeom>
+          <a:noFill/>
+        </p:spPr>
+        <p:txBody>
+          <a:bodyPr wrap="square" lIns="0" rIns="0" tIns="0" bIns="0">
+            <a:spAutoFit/>
+          </a:bodyPr>
+          <a:lstStyle/>
+          <a:p>
+            <a:pPr algn="l"/>
+            <a:r>
+              <a:rPr sz="1000" b="0">
                 <a:solidFill>
                   <a:srgbClr val="EF6C00"/>
                 </a:solidFill>
                 <a:latin typeface="Calibri"/>
               </a:rPr>
-              <a:t>reasoning · conflict checks · explainer</a:t>
-            </a:r>
-          </a:p>
-        </p:txBody>
-      </p:sp>
-      <p:sp>
-        <p:nvSpPr>
-          <p:cNvPr id="24" name="Rectangle 23"/>
+              <a:t>• endpoint  hack_cdsco_endpoint</a:t>
+            </a:r>
+          </a:p>
+          <a:p>
+            <a:pPr algn="l"/>
+            <a:r>
+              <a:rPr sz="1000" b="0">
+                <a:solidFill>
+                  <a:srgbClr val="EF6C00"/>
+                </a:solidFill>
+                <a:latin typeface="Calibri"/>
+              </a:rPr>
+              <a:t>• Delta-sync  cdsco_approved_idx</a:t>
+            </a:r>
+          </a:p>
+          <a:p>
+            <a:pPr algn="l"/>
+            <a:r>
+              <a:rPr sz="1000" b="0">
+                <a:solidFill>
+                  <a:srgbClr val="EF6C00"/>
+                </a:solidFill>
+                <a:latin typeface="Calibri"/>
+              </a:rPr>
+              <a:t>• CDC enabled · grounded RAG</a:t>
+            </a:r>
+          </a:p>
+        </p:txBody>
+      </p:sp>
+      <p:sp>
+        <p:nvSpPr>
+          <p:cNvPr id="29" name="Rectangle 28"/>
           <p:cNvSpPr/>
           <p:nvPr/>
         </p:nvSpPr>
         <p:spPr>
           <a:xfrm>
-            <a:off x="8138160" y="2423160"/>
-            <a:ext cx="3703320" cy="914400"/>
+            <a:off x="8138160" y="2651760"/>
+            <a:ext cx="3657600" cy="2011680"/>
           </a:xfrm>
           <a:prstGeom prst="rect">
             <a:avLst/>
@@ -5277,125 +5529,325 @@
       </p:sp>
       <p:sp>
         <p:nvSpPr>
-          <p:cNvPr id="25" name="TextBox 24"/>
-          <p:cNvSpPr txBox="1"/>
-          <p:nvPr/>
-        </p:nvSpPr>
-        <p:spPr>
-          <a:xfrm>
-            <a:off x="8275320" y="2514600"/>
-            <a:ext cx="3474720" cy="365760"/>
-          </a:xfrm>
-          <a:prstGeom prst="rect">
-            <a:avLst/>
-          </a:prstGeom>
-          <a:noFill/>
-        </p:spPr>
-        <p:txBody>
-          <a:bodyPr wrap="square" lIns="0" rIns="0" tIns="0" bIns="0">
-            <a:spAutoFit/>
-          </a:bodyPr>
-          <a:lstStyle/>
-          <a:p>
-            <a:pPr algn="l"/>
-            <a:r>
-              <a:rPr sz="1200" b="1">
+          <p:cNvPr id="30" name="TextBox 29"/>
+          <p:cNvSpPr txBox="1"/>
+          <p:nvPr/>
+        </p:nvSpPr>
+        <p:spPr>
+          <a:xfrm>
+            <a:off x="8302752" y="2743200"/>
+            <a:ext cx="3328416" cy="365760"/>
+          </a:xfrm>
+          <a:prstGeom prst="rect">
+            <a:avLst/>
+          </a:prstGeom>
+          <a:noFill/>
+        </p:spPr>
+        <p:txBody>
+          <a:bodyPr wrap="square" lIns="0" rIns="0" tIns="0" bIns="0">
+            <a:spAutoFit/>
+          </a:bodyPr>
+          <a:lstStyle/>
+          <a:p>
+            <a:pPr algn="l"/>
+            <a:r>
+              <a:rPr sz="1300" b="1">
                 <a:solidFill>
                   <a:srgbClr val="FFFFFF"/>
                 </a:solidFill>
                 <a:latin typeface="Calibri"/>
               </a:rPr>
-              <a:t>GTE-Large-EN</a:t>
-            </a:r>
-          </a:p>
-        </p:txBody>
-      </p:sp>
-      <p:sp>
-        <p:nvSpPr>
-          <p:cNvPr id="26" name="TextBox 25"/>
-          <p:cNvSpPr txBox="1"/>
-          <p:nvPr/>
-        </p:nvSpPr>
-        <p:spPr>
-          <a:xfrm>
-            <a:off x="8275320" y="2926080"/>
-            <a:ext cx="3474720" cy="365760"/>
-          </a:xfrm>
-          <a:prstGeom prst="rect">
-            <a:avLst/>
-          </a:prstGeom>
-          <a:noFill/>
-        </p:spPr>
-        <p:txBody>
-          <a:bodyPr wrap="square" lIns="0" rIns="0" tIns="0" bIns="0">
-            <a:spAutoFit/>
-          </a:bodyPr>
-          <a:lstStyle/>
-          <a:p>
-            <a:pPr algn="l"/>
-            <a:r>
-              <a:rPr sz="1100" b="0">
+              <a:t>Unity Catalog · Delta Lake</a:t>
+            </a:r>
+          </a:p>
+        </p:txBody>
+      </p:sp>
+      <p:sp>
+        <p:nvSpPr>
+          <p:cNvPr id="31" name="TextBox 30"/>
+          <p:cNvSpPr txBox="1"/>
+          <p:nvPr/>
+        </p:nvSpPr>
+        <p:spPr>
+          <a:xfrm>
+            <a:off x="8302752" y="3154680"/>
+            <a:ext cx="3328416" cy="1417320"/>
+          </a:xfrm>
+          <a:prstGeom prst="rect">
+            <a:avLst/>
+          </a:prstGeom>
+          <a:noFill/>
+        </p:spPr>
+        <p:txBody>
+          <a:bodyPr wrap="square" lIns="0" rIns="0" tIns="0" bIns="0">
+            <a:spAutoFit/>
+          </a:bodyPr>
+          <a:lstStyle/>
+          <a:p>
+            <a:pPr algn="l"/>
+            <a:r>
+              <a:rPr sz="1000" b="0">
                 <a:solidFill>
                   <a:srgbClr val="EF6C00"/>
                 </a:solidFill>
                 <a:latin typeface="Calibri"/>
               </a:rPr>
-              <a:t>embeddings for Vector Search</a:t>
-            </a:r>
-          </a:p>
-        </p:txBody>
-      </p:sp>
-      <p:sp>
-        <p:nvSpPr>
-          <p:cNvPr id="27" name="TextBox 26"/>
-          <p:cNvSpPr txBox="1"/>
-          <p:nvPr/>
-        </p:nvSpPr>
-        <p:spPr>
-          <a:xfrm>
-            <a:off x="548640" y="3611880"/>
-            <a:ext cx="10972800" cy="365760"/>
-          </a:xfrm>
-          <a:prstGeom prst="rect">
-            <a:avLst/>
-          </a:prstGeom>
-          <a:noFill/>
-        </p:spPr>
-        <p:txBody>
-          <a:bodyPr wrap="square" lIns="0" rIns="0" tIns="0" bIns="0">
-            <a:spAutoFit/>
-          </a:bodyPr>
-          <a:lstStyle/>
-          <a:p>
-            <a:pPr algn="l"/>
-            <a:r>
-              <a:rPr sz="1300" b="1">
-                <a:solidFill>
-                  <a:srgbClr val="0B2A4A"/>
-                </a:solidFill>
-                <a:latin typeface="Calibri"/>
-              </a:rPr>
-              <a:t>Unity Catalog · 13 Delta tables · 1 Vector Search index · 1 audit log:</a:t>
-            </a:r>
-          </a:p>
-        </p:txBody>
-      </p:sp>
-      <p:sp>
-        <p:nvSpPr>
-          <p:cNvPr id="28" name="Rectangle 27"/>
+              <a:t>• cdsco_approved / banned / nsq_alerts / fdc</a:t>
+            </a:r>
+          </a:p>
+          <a:p>
+            <a:pPr algn="l"/>
+            <a:r>
+              <a:rPr sz="1000" b="0">
+                <a:solidFill>
+                  <a:srgbClr val="EF6C00"/>
+                </a:solidFill>
+                <a:latin typeface="Calibri"/>
+              </a:rPr>
+              <a:t>• nlem_2022 (650) · pmbjp_catalog (2,438)</a:t>
+            </a:r>
+          </a:p>
+          <a:p>
+            <a:pPr algn="l"/>
+            <a:r>
+              <a:rPr sz="1000" b="0">
+                <a:solidFill>
+                  <a:srgbClr val="EF6C00"/>
+                </a:solidFill>
+                <a:latin typeface="Calibri"/>
+              </a:rPr>
+              <a:t>• drug_aliases (43) · drug_food (35)</a:t>
+            </a:r>
+          </a:p>
+          <a:p>
+            <a:pPr algn="l"/>
+            <a:r>
+              <a:rPr sz="1000" b="0">
+                <a:solidFill>
+                  <a:srgbClr val="EF6C00"/>
+                </a:solidFill>
+                <a:latin typeface="Calibri"/>
+              </a:rPr>
+              <a:t>• patient_sessions · drug_timetable</a:t>
+            </a:r>
+          </a:p>
+          <a:p>
+            <a:pPr algn="l"/>
+            <a:r>
+              <a:rPr sz="1000" b="0">
+                <a:solidFill>
+                  <a:srgbClr val="EF6C00"/>
+                </a:solidFill>
+                <a:latin typeface="Calibri"/>
+              </a:rPr>
+              <a:t>• side_effect_log · sos_events</a:t>
+            </a:r>
+          </a:p>
+          <a:p>
+            <a:pPr algn="l"/>
+            <a:r>
+              <a:rPr sz="1000" b="0">
+                <a:solidFill>
+                  <a:srgbClr val="EF6C00"/>
+                </a:solidFill>
+                <a:latin typeface="Calibri"/>
+              </a:rPr>
+              <a:t>• inference_log  ← MLflow-style audit</a:t>
+            </a:r>
+          </a:p>
+        </p:txBody>
+      </p:sp>
+      <p:cxnSp>
+        <p:nvCxnSpPr>
+          <p:cNvPr id="32" name="Connector 31"/>
+          <p:cNvCxnSpPr/>
+          <p:nvPr/>
+        </p:nvCxnSpPr>
+        <p:spPr>
+          <a:xfrm flipH="1">
+            <a:off x="2286000" y="2194560"/>
+            <a:ext cx="3840480" cy="457200"/>
+          </a:xfrm>
+          <a:prstGeom prst="line">
+            <a:avLst/>
+          </a:prstGeom>
+          <a:ln w="19050">
+            <a:solidFill>
+              <a:srgbClr val="0B2A4A"/>
+            </a:solidFill>
+          </a:ln>
+        </p:spPr>
+        <p:style>
+          <a:lnRef idx="2">
+            <a:schemeClr val="accent1"/>
+          </a:lnRef>
+          <a:fillRef idx="0">
+            <a:schemeClr val="accent1"/>
+          </a:fillRef>
+          <a:effectRef idx="1">
+            <a:schemeClr val="accent1"/>
+          </a:effectRef>
+          <a:fontRef idx="minor">
+            <a:schemeClr val="tx1"/>
+          </a:fontRef>
+        </p:style>
+      </p:cxnSp>
+      <p:cxnSp>
+        <p:nvCxnSpPr>
+          <p:cNvPr id="33" name="Connector 32"/>
+          <p:cNvCxnSpPr/>
+          <p:nvPr/>
+        </p:nvCxnSpPr>
+        <p:spPr>
+          <a:xfrm>
+            <a:off x="6126480" y="2194560"/>
+            <a:ext cx="0" cy="457200"/>
+          </a:xfrm>
+          <a:prstGeom prst="line">
+            <a:avLst/>
+          </a:prstGeom>
+          <a:ln w="19050">
+            <a:solidFill>
+              <a:srgbClr val="0B2A4A"/>
+            </a:solidFill>
+          </a:ln>
+        </p:spPr>
+        <p:style>
+          <a:lnRef idx="2">
+            <a:schemeClr val="accent1"/>
+          </a:lnRef>
+          <a:fillRef idx="0">
+            <a:schemeClr val="accent1"/>
+          </a:fillRef>
+          <a:effectRef idx="1">
+            <a:schemeClr val="accent1"/>
+          </a:effectRef>
+          <a:fontRef idx="minor">
+            <a:schemeClr val="tx1"/>
+          </a:fontRef>
+        </p:style>
+      </p:cxnSp>
+      <p:cxnSp>
+        <p:nvCxnSpPr>
+          <p:cNvPr id="34" name="Connector 33"/>
+          <p:cNvCxnSpPr/>
+          <p:nvPr/>
+        </p:nvCxnSpPr>
+        <p:spPr>
+          <a:xfrm>
+            <a:off x="6126480" y="2194560"/>
+            <a:ext cx="3840480" cy="457200"/>
+          </a:xfrm>
+          <a:prstGeom prst="line">
+            <a:avLst/>
+          </a:prstGeom>
+          <a:ln w="19050">
+            <a:solidFill>
+              <a:srgbClr val="0B2A4A"/>
+            </a:solidFill>
+          </a:ln>
+        </p:spPr>
+        <p:style>
+          <a:lnRef idx="2">
+            <a:schemeClr val="accent1"/>
+          </a:lnRef>
+          <a:fillRef idx="0">
+            <a:schemeClr val="accent1"/>
+          </a:fillRef>
+          <a:effectRef idx="1">
+            <a:schemeClr val="accent1"/>
+          </a:effectRef>
+          <a:fontRef idx="minor">
+            <a:schemeClr val="tx1"/>
+          </a:fontRef>
+        </p:style>
+      </p:cxnSp>
+      <p:cxnSp>
+        <p:nvCxnSpPr>
+          <p:cNvPr id="35" name="Connector 34"/>
+          <p:cNvCxnSpPr/>
+          <p:nvPr/>
+        </p:nvCxnSpPr>
+        <p:spPr>
+          <a:xfrm>
+            <a:off x="7955279" y="3566160"/>
+            <a:ext cx="182881" cy="0"/>
+          </a:xfrm>
+          <a:prstGeom prst="line">
+            <a:avLst/>
+          </a:prstGeom>
+          <a:ln w="19050">
+            <a:solidFill>
+              <a:srgbClr val="0B2A4A"/>
+            </a:solidFill>
+          </a:ln>
+        </p:spPr>
+        <p:style>
+          <a:lnRef idx="2">
+            <a:schemeClr val="accent1"/>
+          </a:lnRef>
+          <a:fillRef idx="0">
+            <a:schemeClr val="accent1"/>
+          </a:fillRef>
+          <a:effectRef idx="1">
+            <a:schemeClr val="accent1"/>
+          </a:effectRef>
+          <a:fontRef idx="minor">
+            <a:schemeClr val="tx1"/>
+          </a:fontRef>
+        </p:style>
+      </p:cxnSp>
+      <p:sp>
+        <p:nvSpPr>
+          <p:cNvPr id="36" name="TextBox 35"/>
+          <p:cNvSpPr txBox="1"/>
+          <p:nvPr/>
+        </p:nvSpPr>
+        <p:spPr>
+          <a:xfrm>
+            <a:off x="8001000" y="3246120"/>
+            <a:ext cx="365760" cy="228600"/>
+          </a:xfrm>
+          <a:prstGeom prst="rect">
+            <a:avLst/>
+          </a:prstGeom>
+          <a:noFill/>
+        </p:spPr>
+        <p:txBody>
+          <a:bodyPr wrap="square" lIns="0" rIns="0" tIns="0" bIns="0">
+            <a:spAutoFit/>
+          </a:bodyPr>
+          <a:lstStyle/>
+          <a:p>
+            <a:pPr algn="l"/>
+            <a:r>
+              <a:rPr sz="800" b="0">
+                <a:solidFill>
+                  <a:srgbClr val="EF6C00"/>
+                </a:solidFill>
+                <a:latin typeface="Calibri"/>
+              </a:rPr>
+              <a:t>↔ retrieval</a:t>
+            </a:r>
+          </a:p>
+        </p:txBody>
+      </p:sp>
+      <p:sp>
+        <p:nvSpPr>
+          <p:cNvPr id="37" name="Rectangle 36"/>
           <p:cNvSpPr/>
           <p:nvPr/>
         </p:nvSpPr>
         <p:spPr>
           <a:xfrm>
-            <a:off x="548640" y="4069080"/>
-            <a:ext cx="3200400" cy="1920240"/>
+            <a:off x="457200" y="4937760"/>
+            <a:ext cx="5577840" cy="1188720"/>
           </a:xfrm>
           <a:prstGeom prst="rect">
             <a:avLst/>
           </a:prstGeom>
           <a:solidFill>
-            <a:srgbClr val="0B2A4A"/>
+            <a:srgbClr val="EF6C00"/>
           </a:solidFill>
           <a:ln>
             <a:noFill/>
@@ -5425,49 +5877,49 @@
       </p:sp>
       <p:sp>
         <p:nvSpPr>
-          <p:cNvPr id="29" name="TextBox 28"/>
-          <p:cNvSpPr txBox="1"/>
-          <p:nvPr/>
-        </p:nvSpPr>
-        <p:spPr>
-          <a:xfrm>
-            <a:off x="731520" y="4160520"/>
-            <a:ext cx="2834640" cy="365760"/>
-          </a:xfrm>
-          <a:prstGeom prst="rect">
-            <a:avLst/>
-          </a:prstGeom>
-          <a:noFill/>
-        </p:spPr>
-        <p:txBody>
-          <a:bodyPr wrap="square" lIns="0" rIns="0" tIns="0" bIns="0">
-            <a:spAutoFit/>
-          </a:bodyPr>
-          <a:lstStyle/>
-          <a:p>
-            <a:pPr algn="l"/>
-            <a:r>
-              <a:rPr sz="1200" b="1">
+          <p:cNvPr id="38" name="TextBox 37"/>
+          <p:cNvSpPr txBox="1"/>
+          <p:nvPr/>
+        </p:nvSpPr>
+        <p:spPr>
+          <a:xfrm>
+            <a:off x="621792" y="5029200"/>
+            <a:ext cx="5248656" cy="365760"/>
+          </a:xfrm>
+          <a:prstGeom prst="rect">
+            <a:avLst/>
+          </a:prstGeom>
+          <a:noFill/>
+        </p:spPr>
+        <p:txBody>
+          <a:bodyPr wrap="square" lIns="0" rIns="0" tIns="0" bIns="0">
+            <a:spAutoFit/>
+          </a:bodyPr>
+          <a:lstStyle/>
+          <a:p>
+            <a:pPr algn="l"/>
+            <a:r>
+              <a:rPr sz="1300" b="1">
                 <a:solidFill>
                   <a:srgbClr val="FFFFFF"/>
                 </a:solidFill>
                 <a:latin typeface="Calibri"/>
               </a:rPr>
-              <a:t>Reference (7 tables)</a:t>
-            </a:r>
-          </a:p>
-        </p:txBody>
-      </p:sp>
-      <p:sp>
-        <p:nvSpPr>
-          <p:cNvPr id="30" name="TextBox 29"/>
-          <p:cNvSpPr txBox="1"/>
-          <p:nvPr/>
-        </p:nvSpPr>
-        <p:spPr>
-          <a:xfrm>
-            <a:off x="731520" y="4572000"/>
-            <a:ext cx="2834640" cy="1371600"/>
+              <a:t>Deploy · Databricks Asset Bundles</a:t>
+            </a:r>
+          </a:p>
+        </p:txBody>
+      </p:sp>
+      <p:sp>
+        <p:nvSpPr>
+          <p:cNvPr id="39" name="TextBox 38"/>
+          <p:cNvSpPr txBox="1"/>
+          <p:nvPr/>
+        </p:nvSpPr>
+        <p:spPr>
+          <a:xfrm>
+            <a:off x="621792" y="5440680"/>
+            <a:ext cx="5248656" cy="594360"/>
           </a:xfrm>
           <a:prstGeom prst="rect">
             <a:avLst/>
@@ -5488,27 +5940,27 @@
                 </a:solidFill>
                 <a:latin typeface="Calibri"/>
               </a:rPr>
-              <a:t>CDSCO approved (51) · banned (21) · NSQ alerts (20) · FDC (20) · NLEM 2022 (650) · PMBJP (2,438) · drug-aliases (43)</a:t>
-            </a:r>
-          </a:p>
-        </p:txBody>
-      </p:sp>
-      <p:sp>
-        <p:nvSpPr>
-          <p:cNvPr id="31" name="Rectangle 30"/>
+              <a:t>databricks bundle deploy   →   ingest job + Vector Search + App + secrets in one shot</a:t>
+            </a:r>
+          </a:p>
+        </p:txBody>
+      </p:sp>
+      <p:sp>
+        <p:nvSpPr>
+          <p:cNvPr id="40" name="Rectangle 39"/>
           <p:cNvSpPr/>
           <p:nvPr/>
         </p:nvSpPr>
         <p:spPr>
           <a:xfrm>
-            <a:off x="3931920" y="4069080"/>
-            <a:ext cx="3200400" cy="1920240"/>
+            <a:off x="6217920" y="4937760"/>
+            <a:ext cx="5577840" cy="1188720"/>
           </a:xfrm>
           <a:prstGeom prst="rect">
             <a:avLst/>
           </a:prstGeom>
           <a:solidFill>
-            <a:srgbClr val="1565C0"/>
+            <a:srgbClr val="2E7D32"/>
           </a:solidFill>
           <a:ln>
             <a:noFill/>
@@ -5538,49 +5990,49 @@
       </p:sp>
       <p:sp>
         <p:nvSpPr>
-          <p:cNvPr id="32" name="TextBox 31"/>
-          <p:cNvSpPr txBox="1"/>
-          <p:nvPr/>
-        </p:nvSpPr>
-        <p:spPr>
-          <a:xfrm>
-            <a:off x="4114800" y="4160520"/>
-            <a:ext cx="2834640" cy="365760"/>
-          </a:xfrm>
-          <a:prstGeom prst="rect">
-            <a:avLst/>
-          </a:prstGeom>
-          <a:noFill/>
-        </p:spPr>
-        <p:txBody>
-          <a:bodyPr wrap="square" lIns="0" rIns="0" tIns="0" bIns="0">
-            <a:spAutoFit/>
-          </a:bodyPr>
-          <a:lstStyle/>
-          <a:p>
-            <a:pPr algn="l"/>
-            <a:r>
-              <a:rPr sz="1200" b="1">
+          <p:cNvPr id="41" name="TextBox 40"/>
+          <p:cNvSpPr txBox="1"/>
+          <p:nvPr/>
+        </p:nvSpPr>
+        <p:spPr>
+          <a:xfrm>
+            <a:off x="6382512" y="5029200"/>
+            <a:ext cx="5248656" cy="365760"/>
+          </a:xfrm>
+          <a:prstGeom prst="rect">
+            <a:avLst/>
+          </a:prstGeom>
+          <a:noFill/>
+        </p:spPr>
+        <p:txBody>
+          <a:bodyPr wrap="square" lIns="0" rIns="0" tIns="0" bIns="0">
+            <a:spAutoFit/>
+          </a:bodyPr>
+          <a:lstStyle/>
+          <a:p>
+            <a:pPr algn="l"/>
+            <a:r>
+              <a:rPr sz="1300" b="1">
                 <a:solidFill>
                   <a:srgbClr val="FFFFFF"/>
                 </a:solidFill>
                 <a:latin typeface="Calibri"/>
               </a:rPr>
-              <a:t>Vector Search</a:t>
-            </a:r>
-          </a:p>
-        </p:txBody>
-      </p:sp>
-      <p:sp>
-        <p:nvSpPr>
-          <p:cNvPr id="33" name="TextBox 32"/>
-          <p:cNvSpPr txBox="1"/>
-          <p:nvPr/>
-        </p:nvSpPr>
-        <p:spPr>
-          <a:xfrm>
-            <a:off x="4114800" y="4572000"/>
-            <a:ext cx="2834640" cy="1371600"/>
+              <a:t>Audit · inference_log Delta table</a:t>
+            </a:r>
+          </a:p>
+        </p:txBody>
+      </p:sp>
+      <p:sp>
+        <p:nvSpPr>
+          <p:cNvPr id="42" name="TextBox 41"/>
+          <p:cNvSpPr txBox="1"/>
+          <p:nvPr/>
+        </p:nvSpPr>
+        <p:spPr>
+          <a:xfrm>
+            <a:off x="6382512" y="5440680"/>
+            <a:ext cx="5248656" cy="594360"/>
           </a:xfrm>
           <a:prstGeom prst="rect">
             <a:avLst/>
@@ -5601,127 +6053,14 @@
                 </a:solidFill>
                 <a:latin typeface="Calibri"/>
               </a:rPr>
-              <a:t>hack_cdsco_endpoint · Delta-sync index over CDSCO + NSQ · CDC enabled · embedded with gte-large-en · grounded RAG</a:t>
-            </a:r>
-          </a:p>
-        </p:txBody>
-      </p:sp>
-      <p:sp>
-        <p:nvSpPr>
-          <p:cNvPr id="34" name="Rectangle 33"/>
-          <p:cNvSpPr/>
-          <p:nvPr/>
-        </p:nvSpPr>
-        <p:spPr>
-          <a:xfrm>
-            <a:off x="7315200" y="4069080"/>
-            <a:ext cx="4343400" cy="1920240"/>
-          </a:xfrm>
-          <a:prstGeom prst="rect">
-            <a:avLst/>
-          </a:prstGeom>
-          <a:solidFill>
-            <a:srgbClr val="C62828"/>
-          </a:solidFill>
-          <a:ln>
-            <a:noFill/>
-          </a:ln>
-        </p:spPr>
-        <p:style>
-          <a:lnRef idx="1">
-            <a:schemeClr val="accent1"/>
-          </a:lnRef>
-          <a:fillRef idx="3">
-            <a:schemeClr val="accent1"/>
-          </a:fillRef>
-          <a:effectRef idx="2">
-            <a:schemeClr val="accent1"/>
-          </a:effectRef>
-          <a:fontRef idx="minor">
-            <a:schemeClr val="lt1"/>
-          </a:fontRef>
-        </p:style>
-        <p:txBody>
-          <a:bodyPr rtlCol="0" anchor="ctr"/>
-          <a:lstStyle/>
-          <a:p>
-            <a:pPr algn="ctr"/>
-          </a:p>
-        </p:txBody>
-      </p:sp>
-      <p:sp>
-        <p:nvSpPr>
-          <p:cNvPr id="35" name="TextBox 34"/>
-          <p:cNvSpPr txBox="1"/>
-          <p:nvPr/>
-        </p:nvSpPr>
-        <p:spPr>
-          <a:xfrm>
-            <a:off x="7498080" y="4160520"/>
-            <a:ext cx="3977640" cy="365760"/>
-          </a:xfrm>
-          <a:prstGeom prst="rect">
-            <a:avLst/>
-          </a:prstGeom>
-          <a:noFill/>
-        </p:spPr>
-        <p:txBody>
-          <a:bodyPr wrap="square" lIns="0" rIns="0" tIns="0" bIns="0">
-            <a:spAutoFit/>
-          </a:bodyPr>
-          <a:lstStyle/>
-          <a:p>
-            <a:pPr algn="l"/>
-            <a:r>
-              <a:rPr sz="1200" b="1">
-                <a:solidFill>
-                  <a:srgbClr val="FFFFFF"/>
-                </a:solidFill>
-                <a:latin typeface="Calibri"/>
-              </a:rPr>
-              <a:t>Operational + Audit (6 tables)</a:t>
-            </a:r>
-          </a:p>
-        </p:txBody>
-      </p:sp>
-      <p:sp>
-        <p:nvSpPr>
-          <p:cNvPr id="36" name="TextBox 35"/>
-          <p:cNvSpPr txBox="1"/>
-          <p:nvPr/>
-        </p:nvSpPr>
-        <p:spPr>
-          <a:xfrm>
-            <a:off x="7498080" y="4572000"/>
-            <a:ext cx="3977640" cy="1371600"/>
-          </a:xfrm>
-          <a:prstGeom prst="rect">
-            <a:avLst/>
-          </a:prstGeom>
-          <a:noFill/>
-        </p:spPr>
-        <p:txBody>
-          <a:bodyPr wrap="square" lIns="0" rIns="0" tIns="0" bIns="0">
-            <a:spAutoFit/>
-          </a:bodyPr>
-          <a:lstStyle/>
-          <a:p>
-            <a:pPr algn="l"/>
-            <a:r>
-              <a:rPr sz="1000" b="0">
-                <a:solidFill>
-                  <a:srgbClr val="FFFFFF"/>
-                </a:solidFill>
-                <a:latin typeface="Calibri"/>
-              </a:rPr>
-              <a:t>patient_sessions · drug_timetable · side_effect_log · sos_events · bolna_call_outcomes · inference_log (every LLM call: prompt, model, latency, tokens, citations)</a:t>
-            </a:r>
-          </a:p>
-        </p:txBody>
-      </p:sp>
-      <p:sp>
-        <p:nvSpPr>
-          <p:cNvPr id="37" name="TextBox 36"/>
+              <a:t>every LLM call: prompt · model · latency · tokens · citation set · session_id</a:t>
+            </a:r>
+          </a:p>
+        </p:txBody>
+      </p:sp>
+      <p:sp>
+        <p:nvSpPr>
+          <p:cNvPr id="43" name="TextBox 42"/>
           <p:cNvSpPr txBox="1"/>
           <p:nvPr/>
         </p:nvSpPr>
@@ -5756,7 +6095,7 @@
       </p:sp>
       <p:sp>
         <p:nvSpPr>
-          <p:cNvPr id="38" name="TextBox 37"/>
+          <p:cNvPr id="44" name="TextBox 43"/>
           <p:cNvSpPr txBox="1"/>
           <p:nvPr/>
         </p:nvSpPr>
@@ -5784,7 +6123,7 @@
                 </a:solidFill>
                 <a:latin typeface="Calibri"/>
               </a:rPr>
-              <a:t>3/5</a:t>
+              <a:t>3/6</a:t>
             </a:r>
           </a:p>
         </p:txBody>
@@ -5923,581 +6262,508 @@
                 </a:solidFill>
                 <a:latin typeface="Calibri"/>
               </a:rPr>
-              <a:t>Accuracy &amp; safety — verifiable, not vibes</a:t>
-            </a:r>
-          </a:p>
-        </p:txBody>
-      </p:sp>
-      <p:sp>
-        <p:nvSpPr>
-          <p:cNvPr id="5" name="TextBox 4"/>
-          <p:cNvSpPr txBox="1"/>
+              <a:t>How Databricks does the heavy lifting</a:t>
+            </a:r>
+          </a:p>
+        </p:txBody>
+      </p:sp>
+      <p:sp>
+        <p:nvSpPr>
+          <p:cNvPr id="5" name="Rectangle 4"/>
+          <p:cNvSpPr/>
           <p:nvPr/>
         </p:nvSpPr>
         <p:spPr>
           <a:xfrm>
             <a:off x="548640" y="914400"/>
-            <a:ext cx="5943600" cy="365760"/>
-          </a:xfrm>
-          <a:prstGeom prst="rect">
-            <a:avLst/>
-          </a:prstGeom>
-          <a:noFill/>
-        </p:spPr>
-        <p:txBody>
-          <a:bodyPr wrap="square" lIns="0" rIns="0" tIns="0" bIns="0">
-            <a:spAutoFit/>
-          </a:bodyPr>
-          <a:lstStyle/>
-          <a:p>
-            <a:pPr algn="l"/>
-            <a:r>
-              <a:rPr sz="1500" b="1">
+            <a:ext cx="2194560" cy="822960"/>
+          </a:xfrm>
+          <a:prstGeom prst="rect">
+            <a:avLst/>
+          </a:prstGeom>
+          <a:solidFill>
+            <a:srgbClr val="ECEFF4"/>
+          </a:solidFill>
+          <a:ln>
+            <a:noFill/>
+          </a:ln>
+        </p:spPr>
+        <p:style>
+          <a:lnRef idx="1">
+            <a:schemeClr val="accent1"/>
+          </a:lnRef>
+          <a:fillRef idx="3">
+            <a:schemeClr val="accent1"/>
+          </a:fillRef>
+          <a:effectRef idx="2">
+            <a:schemeClr val="accent1"/>
+          </a:effectRef>
+          <a:fontRef idx="minor">
+            <a:schemeClr val="lt1"/>
+          </a:fontRef>
+        </p:style>
+        <p:txBody>
+          <a:bodyPr rtlCol="0" anchor="ctr"/>
+          <a:lstStyle/>
+          <a:p>
+            <a:pPr algn="ctr"/>
+          </a:p>
+        </p:txBody>
+      </p:sp>
+      <p:sp>
+        <p:nvSpPr>
+          <p:cNvPr id="6" name="TextBox 5"/>
+          <p:cNvSpPr txBox="1"/>
+          <p:nvPr/>
+        </p:nvSpPr>
+        <p:spPr>
+          <a:xfrm>
+            <a:off x="548640" y="960120"/>
+            <a:ext cx="2194560" cy="365760"/>
+          </a:xfrm>
+          <a:prstGeom prst="rect">
+            <a:avLst/>
+          </a:prstGeom>
+          <a:noFill/>
+        </p:spPr>
+        <p:txBody>
+          <a:bodyPr wrap="square" lIns="0" rIns="0" tIns="0" bIns="0">
+            <a:spAutoFit/>
+          </a:bodyPr>
+          <a:lstStyle/>
+          <a:p>
+            <a:pPr algn="ctr"/>
+            <a:r>
+              <a:rPr sz="1200" b="1">
+                <a:solidFill>
+                  <a:srgbClr val="1A1A1A"/>
+                </a:solidFill>
+                <a:latin typeface="Calibri"/>
+              </a:rPr>
+              <a:t>📱 Patient phone</a:t>
+            </a:r>
+          </a:p>
+        </p:txBody>
+      </p:sp>
+      <p:sp>
+        <p:nvSpPr>
+          <p:cNvPr id="7" name="TextBox 6"/>
+          <p:cNvSpPr txBox="1"/>
+          <p:nvPr/>
+        </p:nvSpPr>
+        <p:spPr>
+          <a:xfrm>
+            <a:off x="548640" y="1325880"/>
+            <a:ext cx="2194560" cy="365760"/>
+          </a:xfrm>
+          <a:prstGeom prst="rect">
+            <a:avLst/>
+          </a:prstGeom>
+          <a:noFill/>
+        </p:spPr>
+        <p:txBody>
+          <a:bodyPr wrap="square" lIns="0" rIns="0" tIns="0" bIns="0">
+            <a:spAutoFit/>
+          </a:bodyPr>
+          <a:lstStyle/>
+          <a:p>
+            <a:pPr algn="ctr"/>
+            <a:r>
+              <a:rPr sz="1000" b="0">
+                <a:solidFill>
+                  <a:srgbClr val="556677"/>
+                </a:solidFill>
+                <a:latin typeface="Calibri"/>
+              </a:rPr>
+              <a:t>PWA · vanilla JS · Hindi/EN/ML</a:t>
+            </a:r>
+          </a:p>
+        </p:txBody>
+      </p:sp>
+      <p:sp>
+        <p:nvSpPr>
+          <p:cNvPr id="8" name="Rectangle 7"/>
+          <p:cNvSpPr/>
+          <p:nvPr/>
+        </p:nvSpPr>
+        <p:spPr>
+          <a:xfrm>
+            <a:off x="3108960" y="914400"/>
+            <a:ext cx="2743200" cy="822960"/>
+          </a:xfrm>
+          <a:prstGeom prst="rect">
+            <a:avLst/>
+          </a:prstGeom>
+          <a:solidFill>
+            <a:srgbClr val="1565C0"/>
+          </a:solidFill>
+          <a:ln>
+            <a:noFill/>
+          </a:ln>
+        </p:spPr>
+        <p:style>
+          <a:lnRef idx="1">
+            <a:schemeClr val="accent1"/>
+          </a:lnRef>
+          <a:fillRef idx="3">
+            <a:schemeClr val="accent1"/>
+          </a:fillRef>
+          <a:effectRef idx="2">
+            <a:schemeClr val="accent1"/>
+          </a:effectRef>
+          <a:fontRef idx="minor">
+            <a:schemeClr val="lt1"/>
+          </a:fontRef>
+        </p:style>
+        <p:txBody>
+          <a:bodyPr rtlCol="0" anchor="ctr"/>
+          <a:lstStyle/>
+          <a:p>
+            <a:pPr algn="ctr"/>
+          </a:p>
+        </p:txBody>
+      </p:sp>
+      <p:sp>
+        <p:nvSpPr>
+          <p:cNvPr id="9" name="TextBox 8"/>
+          <p:cNvSpPr txBox="1"/>
+          <p:nvPr/>
+        </p:nvSpPr>
+        <p:spPr>
+          <a:xfrm>
+            <a:off x="3108960" y="960120"/>
+            <a:ext cx="2743200" cy="365760"/>
+          </a:xfrm>
+          <a:prstGeom prst="rect">
+            <a:avLst/>
+          </a:prstGeom>
+          <a:noFill/>
+        </p:spPr>
+        <p:txBody>
+          <a:bodyPr wrap="square" lIns="0" rIns="0" tIns="0" bIns="0">
+            <a:spAutoFit/>
+          </a:bodyPr>
+          <a:lstStyle/>
+          <a:p>
+            <a:pPr algn="ctr"/>
+            <a:r>
+              <a:rPr sz="1300" b="1">
+                <a:solidFill>
+                  <a:srgbClr val="FFFFFF"/>
+                </a:solidFill>
+                <a:latin typeface="Calibri"/>
+              </a:rPr>
+              <a:t>Databricks Apps</a:t>
+            </a:r>
+          </a:p>
+        </p:txBody>
+      </p:sp>
+      <p:sp>
+        <p:nvSpPr>
+          <p:cNvPr id="10" name="TextBox 9"/>
+          <p:cNvSpPr txBox="1"/>
+          <p:nvPr/>
+        </p:nvSpPr>
+        <p:spPr>
+          <a:xfrm>
+            <a:off x="3108960" y="1325880"/>
+            <a:ext cx="2743200" cy="365760"/>
+          </a:xfrm>
+          <a:prstGeom prst="rect">
+            <a:avLst/>
+          </a:prstGeom>
+          <a:noFill/>
+        </p:spPr>
+        <p:txBody>
+          <a:bodyPr wrap="square" lIns="0" rIns="0" tIns="0" bIns="0">
+            <a:spAutoFit/>
+          </a:bodyPr>
+          <a:lstStyle/>
+          <a:p>
+            <a:pPr algn="ctr"/>
+            <a:r>
+              <a:rPr sz="1000" b="0">
+                <a:solidFill>
+                  <a:srgbClr val="FFFFFF"/>
+                </a:solidFill>
+                <a:latin typeface="Calibri"/>
+              </a:rPr>
+              <a:t>FastAPI · M2M OAuth · Secrets</a:t>
+            </a:r>
+          </a:p>
+        </p:txBody>
+      </p:sp>
+      <p:sp>
+        <p:nvSpPr>
+          <p:cNvPr id="11" name="Rectangle 10"/>
+          <p:cNvSpPr/>
+          <p:nvPr/>
+        </p:nvSpPr>
+        <p:spPr>
+          <a:xfrm>
+            <a:off x="6217920" y="914400"/>
+            <a:ext cx="2377440" cy="822960"/>
+          </a:xfrm>
+          <a:prstGeom prst="rect">
+            <a:avLst/>
+          </a:prstGeom>
+          <a:solidFill>
+            <a:srgbClr val="1565C0"/>
+          </a:solidFill>
+          <a:ln>
+            <a:noFill/>
+          </a:ln>
+        </p:spPr>
+        <p:style>
+          <a:lnRef idx="1">
+            <a:schemeClr val="accent1"/>
+          </a:lnRef>
+          <a:fillRef idx="3">
+            <a:schemeClr val="accent1"/>
+          </a:fillRef>
+          <a:effectRef idx="2">
+            <a:schemeClr val="accent1"/>
+          </a:effectRef>
+          <a:fontRef idx="minor">
+            <a:schemeClr val="lt1"/>
+          </a:fontRef>
+        </p:style>
+        <p:txBody>
+          <a:bodyPr rtlCol="0" anchor="ctr"/>
+          <a:lstStyle/>
+          <a:p>
+            <a:pPr algn="ctr"/>
+          </a:p>
+        </p:txBody>
+      </p:sp>
+      <p:sp>
+        <p:nvSpPr>
+          <p:cNvPr id="12" name="TextBox 11"/>
+          <p:cNvSpPr txBox="1"/>
+          <p:nvPr/>
+        </p:nvSpPr>
+        <p:spPr>
+          <a:xfrm>
+            <a:off x="6217920" y="960120"/>
+            <a:ext cx="2377440" cy="365760"/>
+          </a:xfrm>
+          <a:prstGeom prst="rect">
+            <a:avLst/>
+          </a:prstGeom>
+          <a:noFill/>
+        </p:spPr>
+        <p:txBody>
+          <a:bodyPr wrap="square" lIns="0" rIns="0" tIns="0" bIns="0">
+            <a:spAutoFit/>
+          </a:bodyPr>
+          <a:lstStyle/>
+          <a:p>
+            <a:pPr algn="ctr"/>
+            <a:r>
+              <a:rPr sz="1300" b="1">
+                <a:solidFill>
+                  <a:srgbClr val="FFFFFF"/>
+                </a:solidFill>
+                <a:latin typeface="Calibri"/>
+              </a:rPr>
+              <a:t>Asset Bundles</a:t>
+            </a:r>
+          </a:p>
+        </p:txBody>
+      </p:sp>
+      <p:sp>
+        <p:nvSpPr>
+          <p:cNvPr id="13" name="TextBox 12"/>
+          <p:cNvSpPr txBox="1"/>
+          <p:nvPr/>
+        </p:nvSpPr>
+        <p:spPr>
+          <a:xfrm>
+            <a:off x="6217920" y="1325880"/>
+            <a:ext cx="2377440" cy="365760"/>
+          </a:xfrm>
+          <a:prstGeom prst="rect">
+            <a:avLst/>
+          </a:prstGeom>
+          <a:noFill/>
+        </p:spPr>
+        <p:txBody>
+          <a:bodyPr wrap="square" lIns="0" rIns="0" tIns="0" bIns="0">
+            <a:spAutoFit/>
+          </a:bodyPr>
+          <a:lstStyle/>
+          <a:p>
+            <a:pPr algn="ctr"/>
+            <a:r>
+              <a:rPr sz="1000" b="0">
+                <a:solidFill>
+                  <a:srgbClr val="FFFFFF"/>
+                </a:solidFill>
+                <a:latin typeface="Calibri"/>
+              </a:rPr>
+              <a:t>one-command deploy</a:t>
+            </a:r>
+          </a:p>
+        </p:txBody>
+      </p:sp>
+      <p:sp>
+        <p:nvSpPr>
+          <p:cNvPr id="14" name="Rectangle 13"/>
+          <p:cNvSpPr/>
+          <p:nvPr/>
+        </p:nvSpPr>
+        <p:spPr>
+          <a:xfrm>
+            <a:off x="8961120" y="914400"/>
+            <a:ext cx="2743200" cy="822960"/>
+          </a:xfrm>
+          <a:prstGeom prst="rect">
+            <a:avLst/>
+          </a:prstGeom>
+          <a:solidFill>
+            <a:srgbClr val="ECEFF4"/>
+          </a:solidFill>
+          <a:ln>
+            <a:noFill/>
+          </a:ln>
+        </p:spPr>
+        <p:style>
+          <a:lnRef idx="1">
+            <a:schemeClr val="accent1"/>
+          </a:lnRef>
+          <a:fillRef idx="3">
+            <a:schemeClr val="accent1"/>
+          </a:fillRef>
+          <a:effectRef idx="2">
+            <a:schemeClr val="accent1"/>
+          </a:effectRef>
+          <a:fontRef idx="minor">
+            <a:schemeClr val="lt1"/>
+          </a:fontRef>
+        </p:style>
+        <p:txBody>
+          <a:bodyPr rtlCol="0" anchor="ctr"/>
+          <a:lstStyle/>
+          <a:p>
+            <a:pPr algn="ctr"/>
+          </a:p>
+        </p:txBody>
+      </p:sp>
+      <p:sp>
+        <p:nvSpPr>
+          <p:cNvPr id="15" name="TextBox 14"/>
+          <p:cNvSpPr txBox="1"/>
+          <p:nvPr/>
+        </p:nvSpPr>
+        <p:spPr>
+          <a:xfrm>
+            <a:off x="8961120" y="960120"/>
+            <a:ext cx="2743200" cy="365760"/>
+          </a:xfrm>
+          <a:prstGeom prst="rect">
+            <a:avLst/>
+          </a:prstGeom>
+          <a:noFill/>
+        </p:spPr>
+        <p:txBody>
+          <a:bodyPr wrap="square" lIns="0" rIns="0" tIns="0" bIns="0">
+            <a:spAutoFit/>
+          </a:bodyPr>
+          <a:lstStyle/>
+          <a:p>
+            <a:pPr algn="ctr"/>
+            <a:r>
+              <a:rPr sz="1200" b="1">
+                <a:solidFill>
+                  <a:srgbClr val="1A1A1A"/>
+                </a:solidFill>
+                <a:latin typeface="Calibri"/>
+              </a:rPr>
+              <a:t>🔊 Sarvam · 📞 Bolna</a:t>
+            </a:r>
+          </a:p>
+        </p:txBody>
+      </p:sp>
+      <p:sp>
+        <p:nvSpPr>
+          <p:cNvPr id="16" name="TextBox 15"/>
+          <p:cNvSpPr txBox="1"/>
+          <p:nvPr/>
+        </p:nvSpPr>
+        <p:spPr>
+          <a:xfrm>
+            <a:off x="8961120" y="1325880"/>
+            <a:ext cx="2743200" cy="365760"/>
+          </a:xfrm>
+          <a:prstGeom prst="rect">
+            <a:avLst/>
+          </a:prstGeom>
+          <a:noFill/>
+        </p:spPr>
+        <p:txBody>
+          <a:bodyPr wrap="square" lIns="0" rIns="0" tIns="0" bIns="0">
+            <a:spAutoFit/>
+          </a:bodyPr>
+          <a:lstStyle/>
+          <a:p>
+            <a:pPr algn="ctr"/>
+            <a:r>
+              <a:rPr sz="1000" b="0">
+                <a:solidFill>
+                  <a:srgbClr val="556677"/>
+                </a:solidFill>
+                <a:latin typeface="Calibri"/>
+              </a:rPr>
+              <a:t>TTS / ASR · Indic voice agent</a:t>
+            </a:r>
+          </a:p>
+        </p:txBody>
+      </p:sp>
+      <p:sp>
+        <p:nvSpPr>
+          <p:cNvPr id="17" name="TextBox 16"/>
+          <p:cNvSpPr txBox="1"/>
+          <p:nvPr/>
+        </p:nvSpPr>
+        <p:spPr>
+          <a:xfrm>
+            <a:off x="548640" y="1965960"/>
+            <a:ext cx="10972800" cy="365760"/>
+          </a:xfrm>
+          <a:prstGeom prst="rect">
+            <a:avLst/>
+          </a:prstGeom>
+          <a:noFill/>
+        </p:spPr>
+        <p:txBody>
+          <a:bodyPr wrap="square" lIns="0" rIns="0" tIns="0" bIns="0">
+            <a:spAutoFit/>
+          </a:bodyPr>
+          <a:lstStyle/>
+          <a:p>
+            <a:pPr algn="l"/>
+            <a:r>
+              <a:rPr sz="1300" b="1">
                 <a:solidFill>
                   <a:srgbClr val="0B2A4A"/>
                 </a:solidFill>
                 <a:latin typeface="Calibri"/>
               </a:rPr>
-              <a:t>7 hard guards (app/lib/guards.py)</a:t>
-            </a:r>
-          </a:p>
-        </p:txBody>
-      </p:sp>
-      <p:sp>
-        <p:nvSpPr>
-          <p:cNvPr id="6" name="TextBox 5"/>
-          <p:cNvSpPr txBox="1"/>
-          <p:nvPr/>
-        </p:nvSpPr>
-        <p:spPr>
-          <a:xfrm>
-            <a:off x="548640" y="1417320"/>
-            <a:ext cx="2194560" cy="365760"/>
-          </a:xfrm>
-          <a:prstGeom prst="rect">
-            <a:avLst/>
-          </a:prstGeom>
-          <a:noFill/>
-        </p:spPr>
-        <p:txBody>
-          <a:bodyPr wrap="square" lIns="0" rIns="0" tIns="0" bIns="0">
-            <a:spAutoFit/>
-          </a:bodyPr>
-          <a:lstStyle/>
-          <a:p>
-            <a:pPr algn="l"/>
-            <a:r>
-              <a:rPr sz="1100" b="1">
-                <a:solidFill>
-                  <a:srgbClr val="2E7D32"/>
-                </a:solidFill>
-                <a:latin typeface="Calibri"/>
-              </a:rPr>
-              <a:t>✓ Dose invention</a:t>
-            </a:r>
-          </a:p>
-        </p:txBody>
-      </p:sp>
-      <p:sp>
-        <p:nvSpPr>
-          <p:cNvPr id="7" name="TextBox 6"/>
-          <p:cNvSpPr txBox="1"/>
-          <p:nvPr/>
-        </p:nvSpPr>
-        <p:spPr>
-          <a:xfrm>
-            <a:off x="2743200" y="1417320"/>
-            <a:ext cx="3749039" cy="365760"/>
-          </a:xfrm>
-          <a:prstGeom prst="rect">
-            <a:avLst/>
-          </a:prstGeom>
-          <a:noFill/>
-        </p:spPr>
-        <p:txBody>
-          <a:bodyPr wrap="square" lIns="0" rIns="0" tIns="0" bIns="0">
-            <a:spAutoFit/>
-          </a:bodyPr>
-          <a:lstStyle/>
-          <a:p>
-            <a:pPr algn="l"/>
-            <a:r>
-              <a:rPr sz="1000" b="0">
-                <a:solidFill>
-                  <a:srgbClr val="1A1A1A"/>
-                </a:solidFill>
-                <a:latin typeface="Calibri"/>
-              </a:rPr>
-              <a:t>Refused — doses only ever from prescription OCR</a:t>
-            </a:r>
-          </a:p>
-        </p:txBody>
-      </p:sp>
-      <p:sp>
-        <p:nvSpPr>
-          <p:cNvPr id="8" name="TextBox 7"/>
-          <p:cNvSpPr txBox="1"/>
-          <p:nvPr/>
-        </p:nvSpPr>
-        <p:spPr>
-          <a:xfrm>
-            <a:off x="548640" y="1828800"/>
-            <a:ext cx="2194560" cy="365760"/>
-          </a:xfrm>
-          <a:prstGeom prst="rect">
-            <a:avLst/>
-          </a:prstGeom>
-          <a:noFill/>
-        </p:spPr>
-        <p:txBody>
-          <a:bodyPr wrap="square" lIns="0" rIns="0" tIns="0" bIns="0">
-            <a:spAutoFit/>
-          </a:bodyPr>
-          <a:lstStyle/>
-          <a:p>
-            <a:pPr algn="l"/>
-            <a:r>
-              <a:rPr sz="1100" b="1">
-                <a:solidFill>
-                  <a:srgbClr val="2E7D32"/>
-                </a:solidFill>
-                <a:latin typeface="Calibri"/>
-              </a:rPr>
-              <a:t>✓ Banned drug in Rx</a:t>
-            </a:r>
-          </a:p>
-        </p:txBody>
-      </p:sp>
-      <p:sp>
-        <p:nvSpPr>
-          <p:cNvPr id="9" name="TextBox 8"/>
-          <p:cNvSpPr txBox="1"/>
-          <p:nvPr/>
-        </p:nvSpPr>
-        <p:spPr>
-          <a:xfrm>
-            <a:off x="2743200" y="1828800"/>
-            <a:ext cx="3749039" cy="365760"/>
-          </a:xfrm>
-          <a:prstGeom prst="rect">
-            <a:avLst/>
-          </a:prstGeom>
-          <a:noFill/>
-        </p:spPr>
-        <p:txBody>
-          <a:bodyPr wrap="square" lIns="0" rIns="0" tIns="0" bIns="0">
-            <a:spAutoFit/>
-          </a:bodyPr>
-          <a:lstStyle/>
-          <a:p>
-            <a:pPr algn="l"/>
-            <a:r>
-              <a:rPr sz="1000" b="0">
-                <a:solidFill>
-                  <a:srgbClr val="1A1A1A"/>
-                </a:solidFill>
-                <a:latin typeface="Calibri"/>
-              </a:rPr>
-              <a:t>RAG result overridden, banned-drug alert wins</a:t>
-            </a:r>
-          </a:p>
-        </p:txBody>
-      </p:sp>
-      <p:sp>
-        <p:nvSpPr>
-          <p:cNvPr id="10" name="TextBox 9"/>
-          <p:cNvSpPr txBox="1"/>
-          <p:nvPr/>
-        </p:nvSpPr>
-        <p:spPr>
-          <a:xfrm>
-            <a:off x="548640" y="2240280"/>
-            <a:ext cx="2194560" cy="365760"/>
-          </a:xfrm>
-          <a:prstGeom prst="rect">
-            <a:avLst/>
-          </a:prstGeom>
-          <a:noFill/>
-        </p:spPr>
-        <p:txBody>
-          <a:bodyPr wrap="square" lIns="0" rIns="0" tIns="0" bIns="0">
-            <a:spAutoFit/>
-          </a:bodyPr>
-          <a:lstStyle/>
-          <a:p>
-            <a:pPr algn="l"/>
-            <a:r>
-              <a:rPr sz="1100" b="1">
-                <a:solidFill>
-                  <a:srgbClr val="2E7D32"/>
-                </a:solidFill>
-                <a:latin typeface="Calibri"/>
-              </a:rPr>
-              <a:t>✓ Low-confidence RAG</a:t>
-            </a:r>
-          </a:p>
-        </p:txBody>
-      </p:sp>
-      <p:sp>
-        <p:nvSpPr>
-          <p:cNvPr id="11" name="TextBox 10"/>
-          <p:cNvSpPr txBox="1"/>
-          <p:nvPr/>
-        </p:nvSpPr>
-        <p:spPr>
-          <a:xfrm>
-            <a:off x="2743200" y="2240280"/>
-            <a:ext cx="3749039" cy="365760"/>
-          </a:xfrm>
-          <a:prstGeom prst="rect">
-            <a:avLst/>
-          </a:prstGeom>
-          <a:noFill/>
-        </p:spPr>
-        <p:txBody>
-          <a:bodyPr wrap="square" lIns="0" rIns="0" tIns="0" bIns="0">
-            <a:spAutoFit/>
-          </a:bodyPr>
-          <a:lstStyle/>
-          <a:p>
-            <a:pPr algn="l"/>
-            <a:r>
-              <a:rPr sz="1000" b="0">
-                <a:solidFill>
-                  <a:srgbClr val="1A1A1A"/>
-                </a:solidFill>
-                <a:latin typeface="Calibri"/>
-              </a:rPr>
-              <a:t>Threshold gate · says "I don't know" instead of guessing</a:t>
-            </a:r>
-          </a:p>
-        </p:txBody>
-      </p:sp>
-      <p:sp>
-        <p:nvSpPr>
-          <p:cNvPr id="12" name="TextBox 11"/>
-          <p:cNvSpPr txBox="1"/>
-          <p:nvPr/>
-        </p:nvSpPr>
-        <p:spPr>
-          <a:xfrm>
-            <a:off x="548640" y="2651760"/>
-            <a:ext cx="2194560" cy="365760"/>
-          </a:xfrm>
-          <a:prstGeom prst="rect">
-            <a:avLst/>
-          </a:prstGeom>
-          <a:noFill/>
-        </p:spPr>
-        <p:txBody>
-          <a:bodyPr wrap="square" lIns="0" rIns="0" tIns="0" bIns="0">
-            <a:spAutoFit/>
-          </a:bodyPr>
-          <a:lstStyle/>
-          <a:p>
-            <a:pPr algn="l"/>
-            <a:r>
-              <a:rPr sz="1100" b="1">
-                <a:solidFill>
-                  <a:srgbClr val="2E7D32"/>
-                </a:solidFill>
-                <a:latin typeface="Calibri"/>
-              </a:rPr>
-              <a:t>✓ OCR brand typo</a:t>
-            </a:r>
-          </a:p>
-        </p:txBody>
-      </p:sp>
-      <p:sp>
-        <p:nvSpPr>
-          <p:cNvPr id="13" name="TextBox 12"/>
-          <p:cNvSpPr txBox="1"/>
-          <p:nvPr/>
-        </p:nvSpPr>
-        <p:spPr>
-          <a:xfrm>
-            <a:off x="2743200" y="2651760"/>
-            <a:ext cx="3749039" cy="365760"/>
-          </a:xfrm>
-          <a:prstGeom prst="rect">
-            <a:avLst/>
-          </a:prstGeom>
-          <a:noFill/>
-        </p:spPr>
-        <p:txBody>
-          <a:bodyPr wrap="square" lIns="0" rIns="0" tIns="0" bIns="0">
-            <a:spAutoFit/>
-          </a:bodyPr>
-          <a:lstStyle/>
-          <a:p>
-            <a:pPr algn="l"/>
-            <a:r>
-              <a:rPr sz="1000" b="0">
-                <a:solidFill>
-                  <a:srgbClr val="1A1A1A"/>
-                </a:solidFill>
-                <a:latin typeface="Calibri"/>
-              </a:rPr>
-              <a:t>drug_aliases exact → rapidfuzz ≥85 → LLM fallback</a:t>
-            </a:r>
-          </a:p>
-        </p:txBody>
-      </p:sp>
-      <p:sp>
-        <p:nvSpPr>
-          <p:cNvPr id="14" name="TextBox 13"/>
-          <p:cNvSpPr txBox="1"/>
-          <p:nvPr/>
-        </p:nvSpPr>
-        <p:spPr>
-          <a:xfrm>
-            <a:off x="548640" y="3063240"/>
-            <a:ext cx="2194560" cy="365760"/>
-          </a:xfrm>
-          <a:prstGeom prst="rect">
-            <a:avLst/>
-          </a:prstGeom>
-          <a:noFill/>
-        </p:spPr>
-        <p:txBody>
-          <a:bodyPr wrap="square" lIns="0" rIns="0" tIns="0" bIns="0">
-            <a:spAutoFit/>
-          </a:bodyPr>
-          <a:lstStyle/>
-          <a:p>
-            <a:pPr algn="l"/>
-            <a:r>
-              <a:rPr sz="1100" b="1">
-                <a:solidFill>
-                  <a:srgbClr val="2E7D32"/>
-                </a:solidFill>
-                <a:latin typeface="Calibri"/>
-              </a:rPr>
-              <a:t>✓ Prompt injection</a:t>
-            </a:r>
-          </a:p>
-        </p:txBody>
-      </p:sp>
-      <p:sp>
-        <p:nvSpPr>
-          <p:cNvPr id="15" name="TextBox 14"/>
-          <p:cNvSpPr txBox="1"/>
-          <p:nvPr/>
-        </p:nvSpPr>
-        <p:spPr>
-          <a:xfrm>
-            <a:off x="2743200" y="3063240"/>
-            <a:ext cx="3749039" cy="365760"/>
-          </a:xfrm>
-          <a:prstGeom prst="rect">
-            <a:avLst/>
-          </a:prstGeom>
-          <a:noFill/>
-        </p:spPr>
-        <p:txBody>
-          <a:bodyPr wrap="square" lIns="0" rIns="0" tIns="0" bIns="0">
-            <a:spAutoFit/>
-          </a:bodyPr>
-          <a:lstStyle/>
-          <a:p>
-            <a:pPr algn="l"/>
-            <a:r>
-              <a:rPr sz="1000" b="0">
-                <a:solidFill>
-                  <a:srgbClr val="1A1A1A"/>
-                </a:solidFill>
-                <a:latin typeface="Calibri"/>
-              </a:rPr>
-              <a:t>Input sanitiser + output schema + banned phrases</a:t>
-            </a:r>
-          </a:p>
-        </p:txBody>
-      </p:sp>
-      <p:sp>
-        <p:nvSpPr>
-          <p:cNvPr id="16" name="TextBox 15"/>
-          <p:cNvSpPr txBox="1"/>
-          <p:nvPr/>
-        </p:nvSpPr>
-        <p:spPr>
-          <a:xfrm>
-            <a:off x="548640" y="3474720"/>
-            <a:ext cx="2194560" cy="365760"/>
-          </a:xfrm>
-          <a:prstGeom prst="rect">
-            <a:avLst/>
-          </a:prstGeom>
-          <a:noFill/>
-        </p:spPr>
-        <p:txBody>
-          <a:bodyPr wrap="square" lIns="0" rIns="0" tIns="0" bIns="0">
-            <a:spAutoFit/>
-          </a:bodyPr>
-          <a:lstStyle/>
-          <a:p>
-            <a:pPr algn="l"/>
-            <a:r>
-              <a:rPr sz="1100" b="1">
-                <a:solidFill>
-                  <a:srgbClr val="2E7D32"/>
-                </a:solidFill>
-                <a:latin typeface="Calibri"/>
-              </a:rPr>
-              <a:t>✓ PII leakage</a:t>
-            </a:r>
-          </a:p>
-        </p:txBody>
-      </p:sp>
-      <p:sp>
-        <p:nvSpPr>
-          <p:cNvPr id="17" name="TextBox 16"/>
-          <p:cNvSpPr txBox="1"/>
-          <p:nvPr/>
-        </p:nvSpPr>
-        <p:spPr>
-          <a:xfrm>
-            <a:off x="2743200" y="3474720"/>
-            <a:ext cx="3749039" cy="365760"/>
-          </a:xfrm>
-          <a:prstGeom prst="rect">
-            <a:avLst/>
-          </a:prstGeom>
-          <a:noFill/>
-        </p:spPr>
-        <p:txBody>
-          <a:bodyPr wrap="square" lIns="0" rIns="0" tIns="0" bIns="0">
-            <a:spAutoFit/>
-          </a:bodyPr>
-          <a:lstStyle/>
-          <a:p>
-            <a:pPr algn="l"/>
-            <a:r>
-              <a:rPr sz="1000" b="0">
-                <a:solidFill>
-                  <a:srgbClr val="1A1A1A"/>
-                </a:solidFill>
-                <a:latin typeface="Calibri"/>
-              </a:rPr>
-              <a:t>Phone + name hashed before any logging</a:t>
-            </a:r>
-          </a:p>
-        </p:txBody>
-      </p:sp>
-      <p:sp>
-        <p:nvSpPr>
-          <p:cNvPr id="18" name="TextBox 17"/>
-          <p:cNvSpPr txBox="1"/>
-          <p:nvPr/>
-        </p:nvSpPr>
-        <p:spPr>
-          <a:xfrm>
-            <a:off x="548640" y="3886200"/>
-            <a:ext cx="2194560" cy="365760"/>
-          </a:xfrm>
-          <a:prstGeom prst="rect">
-            <a:avLst/>
-          </a:prstGeom>
-          <a:noFill/>
-        </p:spPr>
-        <p:txBody>
-          <a:bodyPr wrap="square" lIns="0" rIns="0" tIns="0" bIns="0">
-            <a:spAutoFit/>
-          </a:bodyPr>
-          <a:lstStyle/>
-          <a:p>
-            <a:pPr algn="l"/>
-            <a:r>
-              <a:rPr sz="1100" b="1">
-                <a:solidFill>
-                  <a:srgbClr val="2E7D32"/>
-                </a:solidFill>
-                <a:latin typeface="Calibri"/>
-              </a:rPr>
-              <a:t>✓ Regulatory drift</a:t>
-            </a:r>
-          </a:p>
-        </p:txBody>
-      </p:sp>
-      <p:sp>
-        <p:nvSpPr>
-          <p:cNvPr id="19" name="TextBox 18"/>
-          <p:cNvSpPr txBox="1"/>
-          <p:nvPr/>
-        </p:nvSpPr>
-        <p:spPr>
-          <a:xfrm>
-            <a:off x="2743200" y="3886200"/>
-            <a:ext cx="3749039" cy="365760"/>
-          </a:xfrm>
-          <a:prstGeom prst="rect">
-            <a:avLst/>
-          </a:prstGeom>
-          <a:noFill/>
-        </p:spPr>
-        <p:txBody>
-          <a:bodyPr wrap="square" lIns="0" rIns="0" tIns="0" bIns="0">
-            <a:spAutoFit/>
-          </a:bodyPr>
-          <a:lstStyle/>
-          <a:p>
-            <a:pPr algn="l"/>
-            <a:r>
-              <a:rPr sz="1000" b="0">
-                <a:solidFill>
-                  <a:srgbClr val="1A1A1A"/>
-                </a:solidFill>
-                <a:latin typeface="Calibri"/>
-              </a:rPr>
-              <a:t>Every CDSCO row carries source_url + last_verified_at</a:t>
-            </a:r>
-          </a:p>
-        </p:txBody>
-      </p:sp>
-      <p:sp>
-        <p:nvSpPr>
-          <p:cNvPr id="20" name="TextBox 19"/>
-          <p:cNvSpPr txBox="1"/>
-          <p:nvPr/>
-        </p:nvSpPr>
-        <p:spPr>
-          <a:xfrm>
-            <a:off x="6858000" y="914400"/>
-            <a:ext cx="5029200" cy="365760"/>
-          </a:xfrm>
-          <a:prstGeom prst="rect">
-            <a:avLst/>
-          </a:prstGeom>
-          <a:noFill/>
-        </p:spPr>
-        <p:txBody>
-          <a:bodyPr wrap="square" lIns="0" rIns="0" tIns="0" bIns="0">
-            <a:spAutoFit/>
-          </a:bodyPr>
-          <a:lstStyle/>
-          <a:p>
-            <a:pPr algn="l"/>
-            <a:r>
-              <a:rPr sz="1500" b="1">
-                <a:solidFill>
-                  <a:srgbClr val="0B2A4A"/>
-                </a:solidFill>
-                <a:latin typeface="Calibri"/>
-              </a:rPr>
-              <a:t>Eval scorecard</a:t>
-            </a:r>
-          </a:p>
-        </p:txBody>
-      </p:sp>
-      <p:sp>
-        <p:nvSpPr>
-          <p:cNvPr id="21" name="Rectangle 20"/>
+              <a:t>Mosaic AI Model Serving — three endpoints, three jobs:</a:t>
+            </a:r>
+          </a:p>
+        </p:txBody>
+      </p:sp>
+      <p:sp>
+        <p:nvSpPr>
+          <p:cNvPr id="18" name="Rectangle 17"/>
           <p:cNvSpPr/>
           <p:nvPr/>
         </p:nvSpPr>
         <p:spPr>
           <a:xfrm>
-            <a:off x="6858000" y="1417320"/>
-            <a:ext cx="5029200" cy="1280160"/>
+            <a:off x="548640" y="2423160"/>
+            <a:ext cx="3703320" cy="914400"/>
           </a:xfrm>
           <a:prstGeom prst="rect">
             <a:avLst/>
@@ -6533,62 +6799,62 @@
       </p:sp>
       <p:sp>
         <p:nvSpPr>
-          <p:cNvPr id="22" name="TextBox 21"/>
-          <p:cNvSpPr txBox="1"/>
-          <p:nvPr/>
-        </p:nvSpPr>
-        <p:spPr>
-          <a:xfrm>
-            <a:off x="6858000" y="1508760"/>
-            <a:ext cx="5029200" cy="548640"/>
-          </a:xfrm>
-          <a:prstGeom prst="rect">
-            <a:avLst/>
-          </a:prstGeom>
-          <a:noFill/>
-        </p:spPr>
-        <p:txBody>
-          <a:bodyPr wrap="square" lIns="0" rIns="0" tIns="0" bIns="0">
-            <a:spAutoFit/>
-          </a:bodyPr>
-          <a:lstStyle/>
-          <a:p>
-            <a:pPr algn="ctr"/>
-            <a:r>
-              <a:rPr sz="4000" b="1">
+          <p:cNvPr id="19" name="TextBox 18"/>
+          <p:cNvSpPr txBox="1"/>
+          <p:nvPr/>
+        </p:nvSpPr>
+        <p:spPr>
+          <a:xfrm>
+            <a:off x="685800" y="2514600"/>
+            <a:ext cx="3474720" cy="365760"/>
+          </a:xfrm>
+          <a:prstGeom prst="rect">
+            <a:avLst/>
+          </a:prstGeom>
+          <a:noFill/>
+        </p:spPr>
+        <p:txBody>
+          <a:bodyPr wrap="square" lIns="0" rIns="0" tIns="0" bIns="0">
+            <a:spAutoFit/>
+          </a:bodyPr>
+          <a:lstStyle/>
+          <a:p>
+            <a:pPr algn="l"/>
+            <a:r>
+              <a:rPr sz="1200" b="1">
                 <a:solidFill>
                   <a:srgbClr val="FFFFFF"/>
                 </a:solidFill>
                 <a:latin typeface="Calibri"/>
               </a:rPr>
-              <a:t>29 / 30</a:t>
-            </a:r>
-          </a:p>
-        </p:txBody>
-      </p:sp>
-      <p:sp>
-        <p:nvSpPr>
-          <p:cNvPr id="23" name="TextBox 22"/>
-          <p:cNvSpPr txBox="1"/>
-          <p:nvPr/>
-        </p:nvSpPr>
-        <p:spPr>
-          <a:xfrm>
-            <a:off x="6858000" y="2194560"/>
-            <a:ext cx="5029200" cy="457200"/>
-          </a:xfrm>
-          <a:prstGeom prst="rect">
-            <a:avLst/>
-          </a:prstGeom>
-          <a:noFill/>
-        </p:spPr>
-        <p:txBody>
-          <a:bodyPr wrap="square" lIns="0" rIns="0" tIns="0" bIns="0">
-            <a:spAutoFit/>
-          </a:bodyPr>
-          <a:lstStyle/>
-          <a:p>
-            <a:pPr algn="ctr"/>
+              <a:t>Llama-4-Maverick (vision)</a:t>
+            </a:r>
+          </a:p>
+        </p:txBody>
+      </p:sp>
+      <p:sp>
+        <p:nvSpPr>
+          <p:cNvPr id="20" name="TextBox 19"/>
+          <p:cNvSpPr txBox="1"/>
+          <p:nvPr/>
+        </p:nvSpPr>
+        <p:spPr>
+          <a:xfrm>
+            <a:off x="685800" y="2926080"/>
+            <a:ext cx="3474720" cy="365760"/>
+          </a:xfrm>
+          <a:prstGeom prst="rect">
+            <a:avLst/>
+          </a:prstGeom>
+          <a:noFill/>
+        </p:spPr>
+        <p:txBody>
+          <a:bodyPr wrap="square" lIns="0" rIns="0" tIns="0" bIns="0">
+            <a:spAutoFit/>
+          </a:bodyPr>
+          <a:lstStyle/>
+          <a:p>
+            <a:pPr algn="l"/>
             <a:r>
               <a:rPr sz="1100" b="0">
                 <a:solidFill>
@@ -6596,237 +6862,27 @@
                 </a:solidFill>
                 <a:latin typeface="Calibri"/>
               </a:rPr>
-              <a:t>UI eval (Playwright, 11 screens × 3 langs)</a:t>
-            </a:r>
-          </a:p>
-        </p:txBody>
-      </p:sp>
-      <p:sp>
-        <p:nvSpPr>
-          <p:cNvPr id="24" name="TextBox 23"/>
-          <p:cNvSpPr txBox="1"/>
-          <p:nvPr/>
-        </p:nvSpPr>
-        <p:spPr>
-          <a:xfrm>
-            <a:off x="6858000" y="2880360"/>
-            <a:ext cx="5029200" cy="365760"/>
-          </a:xfrm>
-          <a:prstGeom prst="rect">
-            <a:avLst/>
-          </a:prstGeom>
-          <a:noFill/>
-        </p:spPr>
-        <p:txBody>
-          <a:bodyPr wrap="square" lIns="0" rIns="0" tIns="0" bIns="0">
-            <a:spAutoFit/>
-          </a:bodyPr>
-          <a:lstStyle/>
-          <a:p>
-            <a:pPr algn="l"/>
-            <a:r>
-              <a:rPr sz="1200" b="1">
-                <a:solidFill>
-                  <a:srgbClr val="0B2A4A"/>
-                </a:solidFill>
-                <a:latin typeface="Calibri"/>
-              </a:rPr>
-              <a:t>16 case-level evals (eval/cases.json)</a:t>
-            </a:r>
-          </a:p>
-        </p:txBody>
-      </p:sp>
-      <p:sp>
-        <p:nvSpPr>
-          <p:cNvPr id="25" name="TextBox 24"/>
-          <p:cNvSpPr txBox="1"/>
-          <p:nvPr/>
-        </p:nvSpPr>
-        <p:spPr>
-          <a:xfrm>
-            <a:off x="6858000" y="3246120"/>
-            <a:ext cx="5029200" cy="292608"/>
-          </a:xfrm>
-          <a:prstGeom prst="rect">
-            <a:avLst/>
-          </a:prstGeom>
-          <a:noFill/>
-        </p:spPr>
-        <p:txBody>
-          <a:bodyPr wrap="square" lIns="0" rIns="0" tIns="0" bIns="0">
-            <a:spAutoFit/>
-          </a:bodyPr>
-          <a:lstStyle/>
-          <a:p>
-            <a:pPr algn="l"/>
-            <a:r>
-              <a:rPr sz="1100" b="0">
-                <a:solidFill>
-                  <a:srgbClr val="1A1A1A"/>
-                </a:solidFill>
-                <a:latin typeface="Calibri"/>
-              </a:rPr>
-              <a:t>  Banned-FDC detection: paracetamol+flupirtine ✓</a:t>
-            </a:r>
-          </a:p>
-        </p:txBody>
-      </p:sp>
-      <p:sp>
-        <p:nvSpPr>
-          <p:cNvPr id="26" name="TextBox 25"/>
-          <p:cNvSpPr txBox="1"/>
-          <p:nvPr/>
-        </p:nvSpPr>
-        <p:spPr>
-          <a:xfrm>
-            <a:off x="6858000" y="3538728"/>
-            <a:ext cx="5029200" cy="292608"/>
-          </a:xfrm>
-          <a:prstGeom prst="rect">
-            <a:avLst/>
-          </a:prstGeom>
-          <a:noFill/>
-        </p:spPr>
-        <p:txBody>
-          <a:bodyPr wrap="square" lIns="0" rIns="0" tIns="0" bIns="0">
-            <a:spAutoFit/>
-          </a:bodyPr>
-          <a:lstStyle/>
-          <a:p>
-            <a:pPr algn="l"/>
-            <a:r>
-              <a:rPr sz="1100" b="0">
-                <a:solidFill>
-                  <a:srgbClr val="1A1A1A"/>
-                </a:solidFill>
-                <a:latin typeface="Calibri"/>
-              </a:rPr>
-              <a:t>  NSQ batch flag: cefixime CXM2509A ✓</a:t>
-            </a:r>
-          </a:p>
-        </p:txBody>
-      </p:sp>
-      <p:sp>
-        <p:nvSpPr>
-          <p:cNvPr id="27" name="TextBox 26"/>
-          <p:cNvSpPr txBox="1"/>
-          <p:nvPr/>
-        </p:nvSpPr>
-        <p:spPr>
-          <a:xfrm>
-            <a:off x="6858000" y="3831336"/>
-            <a:ext cx="5029200" cy="292608"/>
-          </a:xfrm>
-          <a:prstGeom prst="rect">
-            <a:avLst/>
-          </a:prstGeom>
-          <a:noFill/>
-        </p:spPr>
-        <p:txBody>
-          <a:bodyPr wrap="square" lIns="0" rIns="0" tIns="0" bIns="0">
-            <a:spAutoFit/>
-          </a:bodyPr>
-          <a:lstStyle/>
-          <a:p>
-            <a:pPr algn="l"/>
-            <a:r>
-              <a:rPr sz="1100" b="0">
-                <a:solidFill>
-                  <a:srgbClr val="1A1A1A"/>
-                </a:solidFill>
-                <a:latin typeface="Calibri"/>
-              </a:rPr>
-              <a:t>  Drug-food: warfarin + green leafy ✓</a:t>
-            </a:r>
-          </a:p>
-        </p:txBody>
-      </p:sp>
-      <p:sp>
-        <p:nvSpPr>
-          <p:cNvPr id="28" name="TextBox 27"/>
-          <p:cNvSpPr txBox="1"/>
-          <p:nvPr/>
-        </p:nvSpPr>
-        <p:spPr>
-          <a:xfrm>
-            <a:off x="6858000" y="4123944"/>
-            <a:ext cx="5029200" cy="292608"/>
-          </a:xfrm>
-          <a:prstGeom prst="rect">
-            <a:avLst/>
-          </a:prstGeom>
-          <a:noFill/>
-        </p:spPr>
-        <p:txBody>
-          <a:bodyPr wrap="square" lIns="0" rIns="0" tIns="0" bIns="0">
-            <a:spAutoFit/>
-          </a:bodyPr>
-          <a:lstStyle/>
-          <a:p>
-            <a:pPr algn="l"/>
-            <a:r>
-              <a:rPr sz="1100" b="0">
-                <a:solidFill>
-                  <a:srgbClr val="1A1A1A"/>
-                </a:solidFill>
-                <a:latin typeface="Calibri"/>
-              </a:rPr>
-              <a:t>  Hindi explanation grounded to citation ✓</a:t>
-            </a:r>
-          </a:p>
-        </p:txBody>
-      </p:sp>
-      <p:sp>
-        <p:nvSpPr>
-          <p:cNvPr id="29" name="TextBox 28"/>
-          <p:cNvSpPr txBox="1"/>
-          <p:nvPr/>
-        </p:nvSpPr>
-        <p:spPr>
-          <a:xfrm>
-            <a:off x="6858000" y="4416552"/>
-            <a:ext cx="5029200" cy="292608"/>
-          </a:xfrm>
-          <a:prstGeom prst="rect">
-            <a:avLst/>
-          </a:prstGeom>
-          <a:noFill/>
-        </p:spPr>
-        <p:txBody>
-          <a:bodyPr wrap="square" lIns="0" rIns="0" tIns="0" bIns="0">
-            <a:spAutoFit/>
-          </a:bodyPr>
-          <a:lstStyle/>
-          <a:p>
-            <a:pPr algn="l"/>
-            <a:r>
-              <a:rPr sz="1100" b="0">
-                <a:solidFill>
-                  <a:srgbClr val="1A1A1A"/>
-                </a:solidFill>
-                <a:latin typeface="Calibri"/>
-              </a:rPr>
-              <a:t>  Refusal on out-of-scope question ✓</a:t>
-            </a:r>
-          </a:p>
-        </p:txBody>
-      </p:sp>
-      <p:sp>
-        <p:nvSpPr>
-          <p:cNvPr id="30" name="Rectangle 29"/>
+              <a:t>prescription OCR</a:t>
+            </a:r>
+          </a:p>
+        </p:txBody>
+      </p:sp>
+      <p:sp>
+        <p:nvSpPr>
+          <p:cNvPr id="21" name="Rectangle 20"/>
           <p:cNvSpPr/>
           <p:nvPr/>
         </p:nvSpPr>
         <p:spPr>
           <a:xfrm>
-            <a:off x="6858000" y="4937760"/>
-            <a:ext cx="5029200" cy="1280160"/>
+            <a:off x="4343400" y="2423160"/>
+            <a:ext cx="3703320" cy="914400"/>
           </a:xfrm>
           <a:prstGeom prst="rect">
             <a:avLst/>
           </a:prstGeom>
           <a:solidFill>
-            <a:srgbClr val="ECEFF4"/>
+            <a:srgbClr val="0B2A4A"/>
           </a:solidFill>
           <a:ln>
             <a:noFill/>
@@ -6856,14 +6912,14 @@
       </p:sp>
       <p:sp>
         <p:nvSpPr>
-          <p:cNvPr id="31" name="TextBox 30"/>
-          <p:cNvSpPr txBox="1"/>
-          <p:nvPr/>
-        </p:nvSpPr>
-        <p:spPr>
-          <a:xfrm>
-            <a:off x="7040880" y="5029200"/>
-            <a:ext cx="4663440" cy="365760"/>
+          <p:cNvPr id="22" name="TextBox 21"/>
+          <p:cNvSpPr txBox="1"/>
+          <p:nvPr/>
+        </p:nvSpPr>
+        <p:spPr>
+          <a:xfrm>
+            <a:off x="4480560" y="2514600"/>
+            <a:ext cx="3474720" cy="365760"/>
           </a:xfrm>
           <a:prstGeom prst="rect">
             <a:avLst/>
@@ -6880,12 +6936,351 @@
             <a:r>
               <a:rPr sz="1200" b="1">
                 <a:solidFill>
+                  <a:srgbClr val="FFFFFF"/>
+                </a:solidFill>
+                <a:latin typeface="Calibri"/>
+              </a:rPr>
+              <a:t>Llama-3-3-70B-Instruct</a:t>
+            </a:r>
+          </a:p>
+        </p:txBody>
+      </p:sp>
+      <p:sp>
+        <p:nvSpPr>
+          <p:cNvPr id="23" name="TextBox 22"/>
+          <p:cNvSpPr txBox="1"/>
+          <p:nvPr/>
+        </p:nvSpPr>
+        <p:spPr>
+          <a:xfrm>
+            <a:off x="4480560" y="2926080"/>
+            <a:ext cx="3474720" cy="365760"/>
+          </a:xfrm>
+          <a:prstGeom prst="rect">
+            <a:avLst/>
+          </a:prstGeom>
+          <a:noFill/>
+        </p:spPr>
+        <p:txBody>
+          <a:bodyPr wrap="square" lIns="0" rIns="0" tIns="0" bIns="0">
+            <a:spAutoFit/>
+          </a:bodyPr>
+          <a:lstStyle/>
+          <a:p>
+            <a:pPr algn="l"/>
+            <a:r>
+              <a:rPr sz="1100" b="0">
+                <a:solidFill>
+                  <a:srgbClr val="EF6C00"/>
+                </a:solidFill>
+                <a:latin typeface="Calibri"/>
+              </a:rPr>
+              <a:t>reasoning · conflict checks · explainer</a:t>
+            </a:r>
+          </a:p>
+        </p:txBody>
+      </p:sp>
+      <p:sp>
+        <p:nvSpPr>
+          <p:cNvPr id="24" name="Rectangle 23"/>
+          <p:cNvSpPr/>
+          <p:nvPr/>
+        </p:nvSpPr>
+        <p:spPr>
+          <a:xfrm>
+            <a:off x="8138160" y="2423160"/>
+            <a:ext cx="3703320" cy="914400"/>
+          </a:xfrm>
+          <a:prstGeom prst="rect">
+            <a:avLst/>
+          </a:prstGeom>
+          <a:solidFill>
+            <a:srgbClr val="0B2A4A"/>
+          </a:solidFill>
+          <a:ln>
+            <a:noFill/>
+          </a:ln>
+        </p:spPr>
+        <p:style>
+          <a:lnRef idx="1">
+            <a:schemeClr val="accent1"/>
+          </a:lnRef>
+          <a:fillRef idx="3">
+            <a:schemeClr val="accent1"/>
+          </a:fillRef>
+          <a:effectRef idx="2">
+            <a:schemeClr val="accent1"/>
+          </a:effectRef>
+          <a:fontRef idx="minor">
+            <a:schemeClr val="lt1"/>
+          </a:fontRef>
+        </p:style>
+        <p:txBody>
+          <a:bodyPr rtlCol="0" anchor="ctr"/>
+          <a:lstStyle/>
+          <a:p>
+            <a:pPr algn="ctr"/>
+          </a:p>
+        </p:txBody>
+      </p:sp>
+      <p:sp>
+        <p:nvSpPr>
+          <p:cNvPr id="25" name="TextBox 24"/>
+          <p:cNvSpPr txBox="1"/>
+          <p:nvPr/>
+        </p:nvSpPr>
+        <p:spPr>
+          <a:xfrm>
+            <a:off x="8275320" y="2514600"/>
+            <a:ext cx="3474720" cy="365760"/>
+          </a:xfrm>
+          <a:prstGeom prst="rect">
+            <a:avLst/>
+          </a:prstGeom>
+          <a:noFill/>
+        </p:spPr>
+        <p:txBody>
+          <a:bodyPr wrap="square" lIns="0" rIns="0" tIns="0" bIns="0">
+            <a:spAutoFit/>
+          </a:bodyPr>
+          <a:lstStyle/>
+          <a:p>
+            <a:pPr algn="l"/>
+            <a:r>
+              <a:rPr sz="1200" b="1">
+                <a:solidFill>
+                  <a:srgbClr val="FFFFFF"/>
+                </a:solidFill>
+                <a:latin typeface="Calibri"/>
+              </a:rPr>
+              <a:t>GTE-Large-EN</a:t>
+            </a:r>
+          </a:p>
+        </p:txBody>
+      </p:sp>
+      <p:sp>
+        <p:nvSpPr>
+          <p:cNvPr id="26" name="TextBox 25"/>
+          <p:cNvSpPr txBox="1"/>
+          <p:nvPr/>
+        </p:nvSpPr>
+        <p:spPr>
+          <a:xfrm>
+            <a:off x="8275320" y="2926080"/>
+            <a:ext cx="3474720" cy="365760"/>
+          </a:xfrm>
+          <a:prstGeom prst="rect">
+            <a:avLst/>
+          </a:prstGeom>
+          <a:noFill/>
+        </p:spPr>
+        <p:txBody>
+          <a:bodyPr wrap="square" lIns="0" rIns="0" tIns="0" bIns="0">
+            <a:spAutoFit/>
+          </a:bodyPr>
+          <a:lstStyle/>
+          <a:p>
+            <a:pPr algn="l"/>
+            <a:r>
+              <a:rPr sz="1100" b="0">
+                <a:solidFill>
+                  <a:srgbClr val="EF6C00"/>
+                </a:solidFill>
+                <a:latin typeface="Calibri"/>
+              </a:rPr>
+              <a:t>embeddings for Vector Search</a:t>
+            </a:r>
+          </a:p>
+        </p:txBody>
+      </p:sp>
+      <p:sp>
+        <p:nvSpPr>
+          <p:cNvPr id="27" name="TextBox 26"/>
+          <p:cNvSpPr txBox="1"/>
+          <p:nvPr/>
+        </p:nvSpPr>
+        <p:spPr>
+          <a:xfrm>
+            <a:off x="548640" y="3611880"/>
+            <a:ext cx="10972800" cy="365760"/>
+          </a:xfrm>
+          <a:prstGeom prst="rect">
+            <a:avLst/>
+          </a:prstGeom>
+          <a:noFill/>
+        </p:spPr>
+        <p:txBody>
+          <a:bodyPr wrap="square" lIns="0" rIns="0" tIns="0" bIns="0">
+            <a:spAutoFit/>
+          </a:bodyPr>
+          <a:lstStyle/>
+          <a:p>
+            <a:pPr algn="l"/>
+            <a:r>
+              <a:rPr sz="1300" b="1">
+                <a:solidFill>
                   <a:srgbClr val="0B2A4A"/>
                 </a:solidFill>
                 <a:latin typeface="Calibri"/>
               </a:rPr>
-              <a:t>MLflow-style audit log</a:t>
-            </a:r>
+              <a:t>Unity Catalog · 13 Delta tables · 1 Vector Search index · 1 audit log:</a:t>
+            </a:r>
+          </a:p>
+        </p:txBody>
+      </p:sp>
+      <p:sp>
+        <p:nvSpPr>
+          <p:cNvPr id="28" name="Rectangle 27"/>
+          <p:cNvSpPr/>
+          <p:nvPr/>
+        </p:nvSpPr>
+        <p:spPr>
+          <a:xfrm>
+            <a:off x="548640" y="4069080"/>
+            <a:ext cx="3200400" cy="1920240"/>
+          </a:xfrm>
+          <a:prstGeom prst="rect">
+            <a:avLst/>
+          </a:prstGeom>
+          <a:solidFill>
+            <a:srgbClr val="0B2A4A"/>
+          </a:solidFill>
+          <a:ln>
+            <a:noFill/>
+          </a:ln>
+        </p:spPr>
+        <p:style>
+          <a:lnRef idx="1">
+            <a:schemeClr val="accent1"/>
+          </a:lnRef>
+          <a:fillRef idx="3">
+            <a:schemeClr val="accent1"/>
+          </a:fillRef>
+          <a:effectRef idx="2">
+            <a:schemeClr val="accent1"/>
+          </a:effectRef>
+          <a:fontRef idx="minor">
+            <a:schemeClr val="lt1"/>
+          </a:fontRef>
+        </p:style>
+        <p:txBody>
+          <a:bodyPr rtlCol="0" anchor="ctr"/>
+          <a:lstStyle/>
+          <a:p>
+            <a:pPr algn="ctr"/>
+          </a:p>
+        </p:txBody>
+      </p:sp>
+      <p:sp>
+        <p:nvSpPr>
+          <p:cNvPr id="29" name="TextBox 28"/>
+          <p:cNvSpPr txBox="1"/>
+          <p:nvPr/>
+        </p:nvSpPr>
+        <p:spPr>
+          <a:xfrm>
+            <a:off x="731520" y="4160520"/>
+            <a:ext cx="2834640" cy="365760"/>
+          </a:xfrm>
+          <a:prstGeom prst="rect">
+            <a:avLst/>
+          </a:prstGeom>
+          <a:noFill/>
+        </p:spPr>
+        <p:txBody>
+          <a:bodyPr wrap="square" lIns="0" rIns="0" tIns="0" bIns="0">
+            <a:spAutoFit/>
+          </a:bodyPr>
+          <a:lstStyle/>
+          <a:p>
+            <a:pPr algn="l"/>
+            <a:r>
+              <a:rPr sz="1200" b="1">
+                <a:solidFill>
+                  <a:srgbClr val="FFFFFF"/>
+                </a:solidFill>
+                <a:latin typeface="Calibri"/>
+              </a:rPr>
+              <a:t>Reference (7 tables)</a:t>
+            </a:r>
+          </a:p>
+        </p:txBody>
+      </p:sp>
+      <p:sp>
+        <p:nvSpPr>
+          <p:cNvPr id="30" name="TextBox 29"/>
+          <p:cNvSpPr txBox="1"/>
+          <p:nvPr/>
+        </p:nvSpPr>
+        <p:spPr>
+          <a:xfrm>
+            <a:off x="731520" y="4572000"/>
+            <a:ext cx="2834640" cy="1371600"/>
+          </a:xfrm>
+          <a:prstGeom prst="rect">
+            <a:avLst/>
+          </a:prstGeom>
+          <a:noFill/>
+        </p:spPr>
+        <p:txBody>
+          <a:bodyPr wrap="square" lIns="0" rIns="0" tIns="0" bIns="0">
+            <a:spAutoFit/>
+          </a:bodyPr>
+          <a:lstStyle/>
+          <a:p>
+            <a:pPr algn="l"/>
+            <a:r>
+              <a:rPr sz="1000" b="0">
+                <a:solidFill>
+                  <a:srgbClr val="FFFFFF"/>
+                </a:solidFill>
+                <a:latin typeface="Calibri"/>
+              </a:rPr>
+              <a:t>CDSCO approved (51) · banned (21) · NSQ alerts (20) · FDC (20) · NLEM 2022 (650) · PMBJP (2,438) · drug-aliases (43)</a:t>
+            </a:r>
+          </a:p>
+        </p:txBody>
+      </p:sp>
+      <p:sp>
+        <p:nvSpPr>
+          <p:cNvPr id="31" name="Rectangle 30"/>
+          <p:cNvSpPr/>
+          <p:nvPr/>
+        </p:nvSpPr>
+        <p:spPr>
+          <a:xfrm>
+            <a:off x="3931920" y="4069080"/>
+            <a:ext cx="3200400" cy="1920240"/>
+          </a:xfrm>
+          <a:prstGeom prst="rect">
+            <a:avLst/>
+          </a:prstGeom>
+          <a:solidFill>
+            <a:srgbClr val="1565C0"/>
+          </a:solidFill>
+          <a:ln>
+            <a:noFill/>
+          </a:ln>
+        </p:spPr>
+        <p:style>
+          <a:lnRef idx="1">
+            <a:schemeClr val="accent1"/>
+          </a:lnRef>
+          <a:fillRef idx="3">
+            <a:schemeClr val="accent1"/>
+          </a:fillRef>
+          <a:effectRef idx="2">
+            <a:schemeClr val="accent1"/>
+          </a:effectRef>
+          <a:fontRef idx="minor">
+            <a:schemeClr val="lt1"/>
+          </a:fontRef>
+        </p:style>
+        <p:txBody>
+          <a:bodyPr rtlCol="0" anchor="ctr"/>
+          <a:lstStyle/>
+          <a:p>
+            <a:pPr algn="ctr"/>
           </a:p>
         </p:txBody>
       </p:sp>
@@ -6897,8 +7292,43 @@
         </p:nvSpPr>
         <p:spPr>
           <a:xfrm>
-            <a:off x="7040880" y="5349240"/>
-            <a:ext cx="4663440" cy="822960"/>
+            <a:off x="4114800" y="4160520"/>
+            <a:ext cx="2834640" cy="365760"/>
+          </a:xfrm>
+          <a:prstGeom prst="rect">
+            <a:avLst/>
+          </a:prstGeom>
+          <a:noFill/>
+        </p:spPr>
+        <p:txBody>
+          <a:bodyPr wrap="square" lIns="0" rIns="0" tIns="0" bIns="0">
+            <a:spAutoFit/>
+          </a:bodyPr>
+          <a:lstStyle/>
+          <a:p>
+            <a:pPr algn="l"/>
+            <a:r>
+              <a:rPr sz="1200" b="1">
+                <a:solidFill>
+                  <a:srgbClr val="FFFFFF"/>
+                </a:solidFill>
+                <a:latin typeface="Calibri"/>
+              </a:rPr>
+              <a:t>Vector Search</a:t>
+            </a:r>
+          </a:p>
+        </p:txBody>
+      </p:sp>
+      <p:sp>
+        <p:nvSpPr>
+          <p:cNvPr id="33" name="TextBox 32"/>
+          <p:cNvSpPr txBox="1"/>
+          <p:nvPr/>
+        </p:nvSpPr>
+        <p:spPr>
+          <a:xfrm>
+            <a:off x="4114800" y="4572000"/>
+            <a:ext cx="2834640" cy="1371600"/>
           </a:xfrm>
           <a:prstGeom prst="rect">
             <a:avLst/>
@@ -6915,30 +7345,131 @@
             <a:r>
               <a:rPr sz="1000" b="0">
                 <a:solidFill>
-                  <a:srgbClr val="1A1A1A"/>
-                </a:solidFill>
-                <a:latin typeface="Calibri"/>
-              </a:rPr>
-              <a:t>Every LLM call (OCR, reasoning, explainer) appended to inference_log Delta table:</a:t>
-            </a:r>
-          </a:p>
+                  <a:srgbClr val="FFFFFF"/>
+                </a:solidFill>
+                <a:latin typeface="Calibri"/>
+              </a:rPr>
+              <a:t>hack_cdsco_endpoint · Delta-sync index over CDSCO + NSQ · CDC enabled · embedded with gte-large-en · grounded RAG</a:t>
+            </a:r>
+          </a:p>
+        </p:txBody>
+      </p:sp>
+      <p:sp>
+        <p:nvSpPr>
+          <p:cNvPr id="34" name="Rectangle 33"/>
+          <p:cNvSpPr/>
+          <p:nvPr/>
+        </p:nvSpPr>
+        <p:spPr>
+          <a:xfrm>
+            <a:off x="7315200" y="4069080"/>
+            <a:ext cx="4343400" cy="1920240"/>
+          </a:xfrm>
+          <a:prstGeom prst="rect">
+            <a:avLst/>
+          </a:prstGeom>
+          <a:solidFill>
+            <a:srgbClr val="C62828"/>
+          </a:solidFill>
+          <a:ln>
+            <a:noFill/>
+          </a:ln>
+        </p:spPr>
+        <p:style>
+          <a:lnRef idx="1">
+            <a:schemeClr val="accent1"/>
+          </a:lnRef>
+          <a:fillRef idx="3">
+            <a:schemeClr val="accent1"/>
+          </a:fillRef>
+          <a:effectRef idx="2">
+            <a:schemeClr val="accent1"/>
+          </a:effectRef>
+          <a:fontRef idx="minor">
+            <a:schemeClr val="lt1"/>
+          </a:fontRef>
+        </p:style>
+        <p:txBody>
+          <a:bodyPr rtlCol="0" anchor="ctr"/>
+          <a:lstStyle/>
+          <a:p>
+            <a:pPr algn="ctr"/>
+          </a:p>
+        </p:txBody>
+      </p:sp>
+      <p:sp>
+        <p:nvSpPr>
+          <p:cNvPr id="35" name="TextBox 34"/>
+          <p:cNvSpPr txBox="1"/>
+          <p:nvPr/>
+        </p:nvSpPr>
+        <p:spPr>
+          <a:xfrm>
+            <a:off x="7498080" y="4160520"/>
+            <a:ext cx="3977640" cy="365760"/>
+          </a:xfrm>
+          <a:prstGeom prst="rect">
+            <a:avLst/>
+          </a:prstGeom>
+          <a:noFill/>
+        </p:spPr>
+        <p:txBody>
+          <a:bodyPr wrap="square" lIns="0" rIns="0" tIns="0" bIns="0">
+            <a:spAutoFit/>
+          </a:bodyPr>
+          <a:lstStyle/>
+          <a:p>
+            <a:pPr algn="l"/>
+            <a:r>
+              <a:rPr sz="1200" b="1">
+                <a:solidFill>
+                  <a:srgbClr val="FFFFFF"/>
+                </a:solidFill>
+                <a:latin typeface="Calibri"/>
+              </a:rPr>
+              <a:t>Operational + Audit (6 tables)</a:t>
+            </a:r>
+          </a:p>
+        </p:txBody>
+      </p:sp>
+      <p:sp>
+        <p:nvSpPr>
+          <p:cNvPr id="36" name="TextBox 35"/>
+          <p:cNvSpPr txBox="1"/>
+          <p:nvPr/>
+        </p:nvSpPr>
+        <p:spPr>
+          <a:xfrm>
+            <a:off x="7498080" y="4572000"/>
+            <a:ext cx="3977640" cy="1371600"/>
+          </a:xfrm>
+          <a:prstGeom prst="rect">
+            <a:avLst/>
+          </a:prstGeom>
+          <a:noFill/>
+        </p:spPr>
+        <p:txBody>
+          <a:bodyPr wrap="square" lIns="0" rIns="0" tIns="0" bIns="0">
+            <a:spAutoFit/>
+          </a:bodyPr>
+          <a:lstStyle/>
           <a:p>
             <a:pPr algn="l"/>
             <a:r>
               <a:rPr sz="1000" b="0">
                 <a:solidFill>
-                  <a:srgbClr val="1A1A1A"/>
-                </a:solidFill>
-                <a:latin typeface="Calibri"/>
-              </a:rPr>
-              <a:t>prompt · model · latency · tokens · citation set · session_id</a:t>
-            </a:r>
-          </a:p>
-        </p:txBody>
-      </p:sp>
-      <p:sp>
-        <p:nvSpPr>
-          <p:cNvPr id="33" name="TextBox 32"/>
+                  <a:srgbClr val="FFFFFF"/>
+                </a:solidFill>
+                <a:latin typeface="Calibri"/>
+              </a:rPr>
+              <a:t>patient_sessions · drug_timetable · side_effect_log · sos_events · bolna_call_outcomes · inference_log (every LLM call: prompt, model, latency, tokens, citations)</a:t>
+            </a:r>
+          </a:p>
+        </p:txBody>
+      </p:sp>
+      <p:sp>
+        <p:nvSpPr>
+          <p:cNvPr id="37" name="TextBox 36"/>
           <p:cNvSpPr txBox="1"/>
           <p:nvPr/>
         </p:nvSpPr>
@@ -6973,7 +7504,7 @@
       </p:sp>
       <p:sp>
         <p:nvSpPr>
-          <p:cNvPr id="34" name="TextBox 33"/>
+          <p:cNvPr id="38" name="TextBox 37"/>
           <p:cNvSpPr txBox="1"/>
           <p:nvPr/>
         </p:nvSpPr>
@@ -7001,7 +7532,7 @@
                 </a:solidFill>
                 <a:latin typeface="Calibri"/>
               </a:rPr>
-              <a:t>4/5</a:t>
+              <a:t>4/6</a:t>
             </a:r>
           </a:p>
         </p:txBody>
@@ -7140,7 +7671,7 @@
                 </a:solidFill>
                 <a:latin typeface="Calibri"/>
               </a:rPr>
-              <a:t>What you'll see in the demo</a:t>
+              <a:t>Accuracy &amp; safety — verifiable, not vibes</a:t>
             </a:r>
           </a:p>
         </p:txBody>
@@ -7154,28 +7685,28 @@
         <p:spPr>
           <a:xfrm>
             <a:off x="548640" y="914400"/>
-            <a:ext cx="457200" cy="457200"/>
-          </a:xfrm>
-          <a:prstGeom prst="rect">
-            <a:avLst/>
-          </a:prstGeom>
-          <a:noFill/>
-        </p:spPr>
-        <p:txBody>
-          <a:bodyPr wrap="square" lIns="0" rIns="0" tIns="0" bIns="0">
-            <a:spAutoFit/>
-          </a:bodyPr>
-          <a:lstStyle/>
-          <a:p>
-            <a:pPr algn="l"/>
-            <a:r>
-              <a:rPr sz="2200" b="1">
-                <a:solidFill>
-                  <a:srgbClr val="1565C0"/>
-                </a:solidFill>
-                <a:latin typeface="Calibri"/>
-              </a:rPr>
-              <a:t>①</a:t>
+            <a:ext cx="5943600" cy="365760"/>
+          </a:xfrm>
+          <a:prstGeom prst="rect">
+            <a:avLst/>
+          </a:prstGeom>
+          <a:noFill/>
+        </p:spPr>
+        <p:txBody>
+          <a:bodyPr wrap="square" lIns="0" rIns="0" tIns="0" bIns="0">
+            <a:spAutoFit/>
+          </a:bodyPr>
+          <a:lstStyle/>
+          <a:p>
+            <a:pPr algn="l"/>
+            <a:r>
+              <a:rPr sz="1500" b="1">
+                <a:solidFill>
+                  <a:srgbClr val="0B2A4A"/>
+                </a:solidFill>
+                <a:latin typeface="Calibri"/>
+              </a:rPr>
+              <a:t>7 hard guards (app/lib/guards.py)</a:t>
             </a:r>
           </a:p>
         </p:txBody>
@@ -7188,64 +7719,64 @@
         </p:nvSpPr>
         <p:spPr>
           <a:xfrm>
-            <a:off x="1097280" y="960120"/>
-            <a:ext cx="1828800" cy="365760"/>
-          </a:xfrm>
-          <a:prstGeom prst="rect">
-            <a:avLst/>
-          </a:prstGeom>
-          <a:noFill/>
-        </p:spPr>
-        <p:txBody>
-          <a:bodyPr wrap="square" lIns="0" rIns="0" tIns="0" bIns="0">
-            <a:spAutoFit/>
-          </a:bodyPr>
-          <a:lstStyle/>
-          <a:p>
-            <a:pPr algn="l"/>
-            <a:r>
-              <a:rPr sz="1400" b="1">
+            <a:off x="548640" y="1417320"/>
+            <a:ext cx="2194560" cy="365760"/>
+          </a:xfrm>
+          <a:prstGeom prst="rect">
+            <a:avLst/>
+          </a:prstGeom>
+          <a:noFill/>
+        </p:spPr>
+        <p:txBody>
+          <a:bodyPr wrap="square" lIns="0" rIns="0" tIns="0" bIns="0">
+            <a:spAutoFit/>
+          </a:bodyPr>
+          <a:lstStyle/>
+          <a:p>
+            <a:pPr algn="l"/>
+            <a:r>
+              <a:rPr sz="1100" b="1">
+                <a:solidFill>
+                  <a:srgbClr val="2E7D32"/>
+                </a:solidFill>
+                <a:latin typeface="Calibri"/>
+              </a:rPr>
+              <a:t>✓ Dose invention</a:t>
+            </a:r>
+          </a:p>
+        </p:txBody>
+      </p:sp>
+      <p:sp>
+        <p:nvSpPr>
+          <p:cNvPr id="7" name="TextBox 6"/>
+          <p:cNvSpPr txBox="1"/>
+          <p:nvPr/>
+        </p:nvSpPr>
+        <p:spPr>
+          <a:xfrm>
+            <a:off x="2743200" y="1417320"/>
+            <a:ext cx="3749039" cy="365760"/>
+          </a:xfrm>
+          <a:prstGeom prst="rect">
+            <a:avLst/>
+          </a:prstGeom>
+          <a:noFill/>
+        </p:spPr>
+        <p:txBody>
+          <a:bodyPr wrap="square" lIns="0" rIns="0" tIns="0" bIns="0">
+            <a:spAutoFit/>
+          </a:bodyPr>
+          <a:lstStyle/>
+          <a:p>
+            <a:pPr algn="l"/>
+            <a:r>
+              <a:rPr sz="1000" b="0">
                 <a:solidFill>
                   <a:srgbClr val="1A1A1A"/>
                 </a:solidFill>
                 <a:latin typeface="Calibri"/>
               </a:rPr>
-              <a:t>Scan</a:t>
-            </a:r>
-          </a:p>
-        </p:txBody>
-      </p:sp>
-      <p:sp>
-        <p:nvSpPr>
-          <p:cNvPr id="7" name="TextBox 6"/>
-          <p:cNvSpPr txBox="1"/>
-          <p:nvPr/>
-        </p:nvSpPr>
-        <p:spPr>
-          <a:xfrm>
-            <a:off x="2926080" y="987552"/>
-            <a:ext cx="8686800" cy="365760"/>
-          </a:xfrm>
-          <a:prstGeom prst="rect">
-            <a:avLst/>
-          </a:prstGeom>
-          <a:noFill/>
-        </p:spPr>
-        <p:txBody>
-          <a:bodyPr wrap="square" lIns="0" rIns="0" tIns="0" bIns="0">
-            <a:spAutoFit/>
-          </a:bodyPr>
-          <a:lstStyle/>
-          <a:p>
-            <a:pPr algn="l"/>
-            <a:r>
-              <a:rPr sz="1300" b="0">
-                <a:solidFill>
-                  <a:srgbClr val="556677"/>
-                </a:solidFill>
-                <a:latin typeface="Calibri"/>
-              </a:rPr>
-              <a:t>OCR a real prescription via Llama-4 vision</a:t>
+              <a:t>Refused — doses only ever from prescription OCR</a:t>
             </a:r>
           </a:p>
         </p:txBody>
@@ -7258,29 +7789,29 @@
         </p:nvSpPr>
         <p:spPr>
           <a:xfrm>
-            <a:off x="548640" y="1417320"/>
-            <a:ext cx="457200" cy="457200"/>
-          </a:xfrm>
-          <a:prstGeom prst="rect">
-            <a:avLst/>
-          </a:prstGeom>
-          <a:noFill/>
-        </p:spPr>
-        <p:txBody>
-          <a:bodyPr wrap="square" lIns="0" rIns="0" tIns="0" bIns="0">
-            <a:spAutoFit/>
-          </a:bodyPr>
-          <a:lstStyle/>
-          <a:p>
-            <a:pPr algn="l"/>
-            <a:r>
-              <a:rPr sz="2200" b="1">
-                <a:solidFill>
-                  <a:srgbClr val="1565C0"/>
-                </a:solidFill>
-                <a:latin typeface="Calibri"/>
-              </a:rPr>
-              <a:t>②</a:t>
+            <a:off x="548640" y="1828800"/>
+            <a:ext cx="2194560" cy="365760"/>
+          </a:xfrm>
+          <a:prstGeom prst="rect">
+            <a:avLst/>
+          </a:prstGeom>
+          <a:noFill/>
+        </p:spPr>
+        <p:txBody>
+          <a:bodyPr wrap="square" lIns="0" rIns="0" tIns="0" bIns="0">
+            <a:spAutoFit/>
+          </a:bodyPr>
+          <a:lstStyle/>
+          <a:p>
+            <a:pPr algn="l"/>
+            <a:r>
+              <a:rPr sz="1100" b="1">
+                <a:solidFill>
+                  <a:srgbClr val="2E7D32"/>
+                </a:solidFill>
+                <a:latin typeface="Calibri"/>
+              </a:rPr>
+              <a:t>✓ Banned drug in Rx</a:t>
             </a:r>
           </a:p>
         </p:txBody>
@@ -7293,29 +7824,29 @@
         </p:nvSpPr>
         <p:spPr>
           <a:xfrm>
-            <a:off x="1097280" y="1463040"/>
-            <a:ext cx="1828800" cy="365760"/>
-          </a:xfrm>
-          <a:prstGeom prst="rect">
-            <a:avLst/>
-          </a:prstGeom>
-          <a:noFill/>
-        </p:spPr>
-        <p:txBody>
-          <a:bodyPr wrap="square" lIns="0" rIns="0" tIns="0" bIns="0">
-            <a:spAutoFit/>
-          </a:bodyPr>
-          <a:lstStyle/>
-          <a:p>
-            <a:pPr algn="l"/>
-            <a:r>
-              <a:rPr sz="1400" b="1">
+            <a:off x="2743200" y="1828800"/>
+            <a:ext cx="3749039" cy="365760"/>
+          </a:xfrm>
+          <a:prstGeom prst="rect">
+            <a:avLst/>
+          </a:prstGeom>
+          <a:noFill/>
+        </p:spPr>
+        <p:txBody>
+          <a:bodyPr wrap="square" lIns="0" rIns="0" tIns="0" bIns="0">
+            <a:spAutoFit/>
+          </a:bodyPr>
+          <a:lstStyle/>
+          <a:p>
+            <a:pPr algn="l"/>
+            <a:r>
+              <a:rPr sz="1000" b="0">
                 <a:solidFill>
                   <a:srgbClr val="1A1A1A"/>
                 </a:solidFill>
                 <a:latin typeface="Calibri"/>
               </a:rPr>
-              <a:t>Trust</a:t>
+              <a:t>RAG result overridden, banned-drug alert wins</a:t>
             </a:r>
           </a:p>
         </p:txBody>
@@ -7328,29 +7859,29 @@
         </p:nvSpPr>
         <p:spPr>
           <a:xfrm>
-            <a:off x="2926080" y="1490472"/>
-            <a:ext cx="8686800" cy="365760"/>
-          </a:xfrm>
-          <a:prstGeom prst="rect">
-            <a:avLst/>
-          </a:prstGeom>
-          <a:noFill/>
-        </p:spPr>
-        <p:txBody>
-          <a:bodyPr wrap="square" lIns="0" rIns="0" tIns="0" bIns="0">
-            <a:spAutoFit/>
-          </a:bodyPr>
-          <a:lstStyle/>
-          <a:p>
-            <a:pPr algn="l"/>
-            <a:r>
-              <a:rPr sz="1300" b="0">
-                <a:solidFill>
-                  <a:srgbClr val="556677"/>
-                </a:solidFill>
-                <a:latin typeface="Calibri"/>
-              </a:rPr>
-              <a:t>RAG hits CDSCO + NSQ tables; one drug flagged 🚫</a:t>
+            <a:off x="548640" y="2240280"/>
+            <a:ext cx="2194560" cy="365760"/>
+          </a:xfrm>
+          <a:prstGeom prst="rect">
+            <a:avLst/>
+          </a:prstGeom>
+          <a:noFill/>
+        </p:spPr>
+        <p:txBody>
+          <a:bodyPr wrap="square" lIns="0" rIns="0" tIns="0" bIns="0">
+            <a:spAutoFit/>
+          </a:bodyPr>
+          <a:lstStyle/>
+          <a:p>
+            <a:pPr algn="l"/>
+            <a:r>
+              <a:rPr sz="1100" b="1">
+                <a:solidFill>
+                  <a:srgbClr val="2E7D32"/>
+                </a:solidFill>
+                <a:latin typeface="Calibri"/>
+              </a:rPr>
+              <a:t>✓ Low-confidence RAG</a:t>
             </a:r>
           </a:p>
         </p:txBody>
@@ -7363,29 +7894,29 @@
         </p:nvSpPr>
         <p:spPr>
           <a:xfrm>
-            <a:off x="548640" y="1920240"/>
-            <a:ext cx="457200" cy="457200"/>
-          </a:xfrm>
-          <a:prstGeom prst="rect">
-            <a:avLst/>
-          </a:prstGeom>
-          <a:noFill/>
-        </p:spPr>
-        <p:txBody>
-          <a:bodyPr wrap="square" lIns="0" rIns="0" tIns="0" bIns="0">
-            <a:spAutoFit/>
-          </a:bodyPr>
-          <a:lstStyle/>
-          <a:p>
-            <a:pPr algn="l"/>
-            <a:r>
-              <a:rPr sz="2200" b="1">
-                <a:solidFill>
-                  <a:srgbClr val="1565C0"/>
-                </a:solidFill>
-                <a:latin typeface="Calibri"/>
-              </a:rPr>
-              <a:t>③</a:t>
+            <a:off x="2743200" y="2240280"/>
+            <a:ext cx="3749039" cy="365760"/>
+          </a:xfrm>
+          <a:prstGeom prst="rect">
+            <a:avLst/>
+          </a:prstGeom>
+          <a:noFill/>
+        </p:spPr>
+        <p:txBody>
+          <a:bodyPr wrap="square" lIns="0" rIns="0" tIns="0" bIns="0">
+            <a:spAutoFit/>
+          </a:bodyPr>
+          <a:lstStyle/>
+          <a:p>
+            <a:pPr algn="l"/>
+            <a:r>
+              <a:rPr sz="1000" b="0">
+                <a:solidFill>
+                  <a:srgbClr val="1A1A1A"/>
+                </a:solidFill>
+                <a:latin typeface="Calibri"/>
+              </a:rPr>
+              <a:t>Threshold gate · says "I don't know" instead of guessing</a:t>
             </a:r>
           </a:p>
         </p:txBody>
@@ -7398,64 +7929,64 @@
         </p:nvSpPr>
         <p:spPr>
           <a:xfrm>
-            <a:off x="1097280" y="1965960"/>
-            <a:ext cx="1828800" cy="365760"/>
-          </a:xfrm>
-          <a:prstGeom prst="rect">
-            <a:avLst/>
-          </a:prstGeom>
-          <a:noFill/>
-        </p:spPr>
-        <p:txBody>
-          <a:bodyPr wrap="square" lIns="0" rIns="0" tIns="0" bIns="0">
-            <a:spAutoFit/>
-          </a:bodyPr>
-          <a:lstStyle/>
-          <a:p>
-            <a:pPr algn="l"/>
-            <a:r>
-              <a:rPr sz="1400" b="1">
+            <a:off x="548640" y="2651760"/>
+            <a:ext cx="2194560" cy="365760"/>
+          </a:xfrm>
+          <a:prstGeom prst="rect">
+            <a:avLst/>
+          </a:prstGeom>
+          <a:noFill/>
+        </p:spPr>
+        <p:txBody>
+          <a:bodyPr wrap="square" lIns="0" rIns="0" tIns="0" bIns="0">
+            <a:spAutoFit/>
+          </a:bodyPr>
+          <a:lstStyle/>
+          <a:p>
+            <a:pPr algn="l"/>
+            <a:r>
+              <a:rPr sz="1100" b="1">
+                <a:solidFill>
+                  <a:srgbClr val="2E7D32"/>
+                </a:solidFill>
+                <a:latin typeface="Calibri"/>
+              </a:rPr>
+              <a:t>✓ OCR brand typo</a:t>
+            </a:r>
+          </a:p>
+        </p:txBody>
+      </p:sp>
+      <p:sp>
+        <p:nvSpPr>
+          <p:cNvPr id="13" name="TextBox 12"/>
+          <p:cNvSpPr txBox="1"/>
+          <p:nvPr/>
+        </p:nvSpPr>
+        <p:spPr>
+          <a:xfrm>
+            <a:off x="2743200" y="2651760"/>
+            <a:ext cx="3749039" cy="365760"/>
+          </a:xfrm>
+          <a:prstGeom prst="rect">
+            <a:avLst/>
+          </a:prstGeom>
+          <a:noFill/>
+        </p:spPr>
+        <p:txBody>
+          <a:bodyPr wrap="square" lIns="0" rIns="0" tIns="0" bIns="0">
+            <a:spAutoFit/>
+          </a:bodyPr>
+          <a:lstStyle/>
+          <a:p>
+            <a:pPr algn="l"/>
+            <a:r>
+              <a:rPr sz="1000" b="0">
                 <a:solidFill>
                   <a:srgbClr val="1A1A1A"/>
                 </a:solidFill>
                 <a:latin typeface="Calibri"/>
               </a:rPr>
-              <a:t>Save</a:t>
-            </a:r>
-          </a:p>
-        </p:txBody>
-      </p:sp>
-      <p:sp>
-        <p:nvSpPr>
-          <p:cNvPr id="13" name="TextBox 12"/>
-          <p:cNvSpPr txBox="1"/>
-          <p:nvPr/>
-        </p:nvSpPr>
-        <p:spPr>
-          <a:xfrm>
-            <a:off x="2926080" y="1993392"/>
-            <a:ext cx="8686800" cy="365760"/>
-          </a:xfrm>
-          <a:prstGeom prst="rect">
-            <a:avLst/>
-          </a:prstGeom>
-          <a:noFill/>
-        </p:spPr>
-        <p:txBody>
-          <a:bodyPr wrap="square" lIns="0" rIns="0" tIns="0" bIns="0">
-            <a:spAutoFit/>
-          </a:bodyPr>
-          <a:lstStyle/>
-          <a:p>
-            <a:pPr algn="l"/>
-            <a:r>
-              <a:rPr sz="1300" b="0">
-                <a:solidFill>
-                  <a:srgbClr val="556677"/>
-                </a:solidFill>
-                <a:latin typeface="Calibri"/>
-              </a:rPr>
-              <a:t>₹85 → ₹12 Jan Aushadhi alternative surfaces</a:t>
+              <a:t>drug_aliases exact → rapidfuzz ≥85 → LLM fallback</a:t>
             </a:r>
           </a:p>
         </p:txBody>
@@ -7468,29 +7999,29 @@
         </p:nvSpPr>
         <p:spPr>
           <a:xfrm>
-            <a:off x="548640" y="2423160"/>
-            <a:ext cx="457200" cy="457200"/>
-          </a:xfrm>
-          <a:prstGeom prst="rect">
-            <a:avLst/>
-          </a:prstGeom>
-          <a:noFill/>
-        </p:spPr>
-        <p:txBody>
-          <a:bodyPr wrap="square" lIns="0" rIns="0" tIns="0" bIns="0">
-            <a:spAutoFit/>
-          </a:bodyPr>
-          <a:lstStyle/>
-          <a:p>
-            <a:pPr algn="l"/>
-            <a:r>
-              <a:rPr sz="2200" b="1">
-                <a:solidFill>
-                  <a:srgbClr val="1565C0"/>
-                </a:solidFill>
-                <a:latin typeface="Calibri"/>
-              </a:rPr>
-              <a:t>④</a:t>
+            <a:off x="548640" y="3063240"/>
+            <a:ext cx="2194560" cy="365760"/>
+          </a:xfrm>
+          <a:prstGeom prst="rect">
+            <a:avLst/>
+          </a:prstGeom>
+          <a:noFill/>
+        </p:spPr>
+        <p:txBody>
+          <a:bodyPr wrap="square" lIns="0" rIns="0" tIns="0" bIns="0">
+            <a:spAutoFit/>
+          </a:bodyPr>
+          <a:lstStyle/>
+          <a:p>
+            <a:pPr algn="l"/>
+            <a:r>
+              <a:rPr sz="1100" b="1">
+                <a:solidFill>
+                  <a:srgbClr val="2E7D32"/>
+                </a:solidFill>
+                <a:latin typeface="Calibri"/>
+              </a:rPr>
+              <a:t>✓ Prompt injection</a:t>
             </a:r>
           </a:p>
         </p:txBody>
@@ -7503,29 +8034,29 @@
         </p:nvSpPr>
         <p:spPr>
           <a:xfrm>
-            <a:off x="1097280" y="2468880"/>
-            <a:ext cx="1828800" cy="365760"/>
-          </a:xfrm>
-          <a:prstGeom prst="rect">
-            <a:avLst/>
-          </a:prstGeom>
-          <a:noFill/>
-        </p:spPr>
-        <p:txBody>
-          <a:bodyPr wrap="square" lIns="0" rIns="0" tIns="0" bIns="0">
-            <a:spAutoFit/>
-          </a:bodyPr>
-          <a:lstStyle/>
-          <a:p>
-            <a:pPr algn="l"/>
-            <a:r>
-              <a:rPr sz="1400" b="1">
+            <a:off x="2743200" y="3063240"/>
+            <a:ext cx="3749039" cy="365760"/>
+          </a:xfrm>
+          <a:prstGeom prst="rect">
+            <a:avLst/>
+          </a:prstGeom>
+          <a:noFill/>
+        </p:spPr>
+        <p:txBody>
+          <a:bodyPr wrap="square" lIns="0" rIns="0" tIns="0" bIns="0">
+            <a:spAutoFit/>
+          </a:bodyPr>
+          <a:lstStyle/>
+          <a:p>
+            <a:pPr algn="l"/>
+            <a:r>
+              <a:rPr sz="1000" b="0">
                 <a:solidFill>
                   <a:srgbClr val="1A1A1A"/>
                 </a:solidFill>
                 <a:latin typeface="Calibri"/>
               </a:rPr>
-              <a:t>Speak</a:t>
+              <a:t>Input sanitiser + output schema + banned phrases</a:t>
             </a:r>
           </a:p>
         </p:txBody>
@@ -7538,29 +8069,29 @@
         </p:nvSpPr>
         <p:spPr>
           <a:xfrm>
-            <a:off x="2926080" y="2496312"/>
-            <a:ext cx="8686800" cy="365760"/>
-          </a:xfrm>
-          <a:prstGeom prst="rect">
-            <a:avLst/>
-          </a:prstGeom>
-          <a:noFill/>
-        </p:spPr>
-        <p:txBody>
-          <a:bodyPr wrap="square" lIns="0" rIns="0" tIns="0" bIns="0">
-            <a:spAutoFit/>
-          </a:bodyPr>
-          <a:lstStyle/>
-          <a:p>
-            <a:pPr algn="l"/>
-            <a:r>
-              <a:rPr sz="1300" b="0">
-                <a:solidFill>
-                  <a:srgbClr val="556677"/>
-                </a:solidFill>
-                <a:latin typeface="Calibri"/>
-              </a:rPr>
-              <a:t>Hindi voice explains the regimen via Sarvam</a:t>
+            <a:off x="548640" y="3474720"/>
+            <a:ext cx="2194560" cy="365760"/>
+          </a:xfrm>
+          <a:prstGeom prst="rect">
+            <a:avLst/>
+          </a:prstGeom>
+          <a:noFill/>
+        </p:spPr>
+        <p:txBody>
+          <a:bodyPr wrap="square" lIns="0" rIns="0" tIns="0" bIns="0">
+            <a:spAutoFit/>
+          </a:bodyPr>
+          <a:lstStyle/>
+          <a:p>
+            <a:pPr algn="l"/>
+            <a:r>
+              <a:rPr sz="1100" b="1">
+                <a:solidFill>
+                  <a:srgbClr val="2E7D32"/>
+                </a:solidFill>
+                <a:latin typeface="Calibri"/>
+              </a:rPr>
+              <a:t>✓ PII leakage</a:t>
             </a:r>
           </a:p>
         </p:txBody>
@@ -7573,29 +8104,29 @@
         </p:nvSpPr>
         <p:spPr>
           <a:xfrm>
-            <a:off x="548640" y="2926080"/>
-            <a:ext cx="457200" cy="457200"/>
-          </a:xfrm>
-          <a:prstGeom prst="rect">
-            <a:avLst/>
-          </a:prstGeom>
-          <a:noFill/>
-        </p:spPr>
-        <p:txBody>
-          <a:bodyPr wrap="square" lIns="0" rIns="0" tIns="0" bIns="0">
-            <a:spAutoFit/>
-          </a:bodyPr>
-          <a:lstStyle/>
-          <a:p>
-            <a:pPr algn="l"/>
-            <a:r>
-              <a:rPr sz="2200" b="1">
-                <a:solidFill>
-                  <a:srgbClr val="1565C0"/>
-                </a:solidFill>
-                <a:latin typeface="Calibri"/>
-              </a:rPr>
-              <a:t>⑤</a:t>
+            <a:off x="2743200" y="3474720"/>
+            <a:ext cx="3749039" cy="365760"/>
+          </a:xfrm>
+          <a:prstGeom prst="rect">
+            <a:avLst/>
+          </a:prstGeom>
+          <a:noFill/>
+        </p:spPr>
+        <p:txBody>
+          <a:bodyPr wrap="square" lIns="0" rIns="0" tIns="0" bIns="0">
+            <a:spAutoFit/>
+          </a:bodyPr>
+          <a:lstStyle/>
+          <a:p>
+            <a:pPr algn="l"/>
+            <a:r>
+              <a:rPr sz="1000" b="0">
+                <a:solidFill>
+                  <a:srgbClr val="1A1A1A"/>
+                </a:solidFill>
+                <a:latin typeface="Calibri"/>
+              </a:rPr>
+              <a:t>Phone + name hashed before any logging</a:t>
             </a:r>
           </a:p>
         </p:txBody>
@@ -7608,64 +8139,64 @@
         </p:nvSpPr>
         <p:spPr>
           <a:xfrm>
-            <a:off x="1097280" y="2971800"/>
-            <a:ext cx="1828800" cy="365760"/>
-          </a:xfrm>
-          <a:prstGeom prst="rect">
-            <a:avLst/>
-          </a:prstGeom>
-          <a:noFill/>
-        </p:spPr>
-        <p:txBody>
-          <a:bodyPr wrap="square" lIns="0" rIns="0" tIns="0" bIns="0">
-            <a:spAutoFit/>
-          </a:bodyPr>
-          <a:lstStyle/>
-          <a:p>
-            <a:pPr algn="l"/>
-            <a:r>
-              <a:rPr sz="1400" b="1">
+            <a:off x="548640" y="3886200"/>
+            <a:ext cx="2194560" cy="365760"/>
+          </a:xfrm>
+          <a:prstGeom prst="rect">
+            <a:avLst/>
+          </a:prstGeom>
+          <a:noFill/>
+        </p:spPr>
+        <p:txBody>
+          <a:bodyPr wrap="square" lIns="0" rIns="0" tIns="0" bIns="0">
+            <a:spAutoFit/>
+          </a:bodyPr>
+          <a:lstStyle/>
+          <a:p>
+            <a:pPr algn="l"/>
+            <a:r>
+              <a:rPr sz="1100" b="1">
+                <a:solidFill>
+                  <a:srgbClr val="2E7D32"/>
+                </a:solidFill>
+                <a:latin typeface="Calibri"/>
+              </a:rPr>
+              <a:t>✓ Regulatory drift</a:t>
+            </a:r>
+          </a:p>
+        </p:txBody>
+      </p:sp>
+      <p:sp>
+        <p:nvSpPr>
+          <p:cNvPr id="19" name="TextBox 18"/>
+          <p:cNvSpPr txBox="1"/>
+          <p:nvPr/>
+        </p:nvSpPr>
+        <p:spPr>
+          <a:xfrm>
+            <a:off x="2743200" y="3886200"/>
+            <a:ext cx="3749039" cy="365760"/>
+          </a:xfrm>
+          <a:prstGeom prst="rect">
+            <a:avLst/>
+          </a:prstGeom>
+          <a:noFill/>
+        </p:spPr>
+        <p:txBody>
+          <a:bodyPr wrap="square" lIns="0" rIns="0" tIns="0" bIns="0">
+            <a:spAutoFit/>
+          </a:bodyPr>
+          <a:lstStyle/>
+          <a:p>
+            <a:pPr algn="l"/>
+            <a:r>
+              <a:rPr sz="1000" b="0">
                 <a:solidFill>
                   <a:srgbClr val="1A1A1A"/>
                 </a:solidFill>
                 <a:latin typeface="Calibri"/>
               </a:rPr>
-              <a:t>Ring</a:t>
-            </a:r>
-          </a:p>
-        </p:txBody>
-      </p:sp>
-      <p:sp>
-        <p:nvSpPr>
-          <p:cNvPr id="19" name="TextBox 18"/>
-          <p:cNvSpPr txBox="1"/>
-          <p:nvPr/>
-        </p:nvSpPr>
-        <p:spPr>
-          <a:xfrm>
-            <a:off x="2926080" y="2999232"/>
-            <a:ext cx="8686800" cy="365760"/>
-          </a:xfrm>
-          <a:prstGeom prst="rect">
-            <a:avLst/>
-          </a:prstGeom>
-          <a:noFill/>
-        </p:spPr>
-        <p:txBody>
-          <a:bodyPr wrap="square" lIns="0" rIns="0" tIns="0" bIns="0">
-            <a:spAutoFit/>
-          </a:bodyPr>
-          <a:lstStyle/>
-          <a:p>
-            <a:pPr algn="l"/>
-            <a:r>
-              <a:rPr sz="1300" b="0">
-                <a:solidFill>
-                  <a:srgbClr val="556677"/>
-                </a:solidFill>
-                <a:latin typeface="Calibri"/>
-              </a:rPr>
-              <a:t>20s countdown → Bolna calls patient in Hindi (LIVE)</a:t>
+              <a:t>Every CDSCO row carries source_url + last_verified_at</a:t>
             </a:r>
           </a:p>
         </p:txBody>
@@ -7678,113 +8209,366 @@
         </p:nvSpPr>
         <p:spPr>
           <a:xfrm>
-            <a:off x="548640" y="3429000"/>
-            <a:ext cx="457200" cy="457200"/>
-          </a:xfrm>
-          <a:prstGeom prst="rect">
-            <a:avLst/>
-          </a:prstGeom>
-          <a:noFill/>
-        </p:spPr>
-        <p:txBody>
-          <a:bodyPr wrap="square" lIns="0" rIns="0" tIns="0" bIns="0">
-            <a:spAutoFit/>
-          </a:bodyPr>
-          <a:lstStyle/>
-          <a:p>
-            <a:pPr algn="l"/>
-            <a:r>
-              <a:rPr sz="2200" b="1">
-                <a:solidFill>
-                  <a:srgbClr val="1565C0"/>
-                </a:solidFill>
-                <a:latin typeface="Calibri"/>
-              </a:rPr>
-              <a:t>⑥</a:t>
-            </a:r>
-          </a:p>
-        </p:txBody>
-      </p:sp>
-      <p:sp>
-        <p:nvSpPr>
-          <p:cNvPr id="21" name="TextBox 20"/>
-          <p:cNvSpPr txBox="1"/>
-          <p:nvPr/>
-        </p:nvSpPr>
-        <p:spPr>
-          <a:xfrm>
-            <a:off x="1097280" y="3474720"/>
-            <a:ext cx="1828800" cy="365760"/>
-          </a:xfrm>
-          <a:prstGeom prst="rect">
-            <a:avLst/>
-          </a:prstGeom>
-          <a:noFill/>
-        </p:spPr>
-        <p:txBody>
-          <a:bodyPr wrap="square" lIns="0" rIns="0" tIns="0" bIns="0">
-            <a:spAutoFit/>
-          </a:bodyPr>
-          <a:lstStyle/>
-          <a:p>
-            <a:pPr algn="l"/>
-            <a:r>
-              <a:rPr sz="1400" b="1">
+            <a:off x="6858000" y="914400"/>
+            <a:ext cx="5029200" cy="365760"/>
+          </a:xfrm>
+          <a:prstGeom prst="rect">
+            <a:avLst/>
+          </a:prstGeom>
+          <a:noFill/>
+        </p:spPr>
+        <p:txBody>
+          <a:bodyPr wrap="square" lIns="0" rIns="0" tIns="0" bIns="0">
+            <a:spAutoFit/>
+          </a:bodyPr>
+          <a:lstStyle/>
+          <a:p>
+            <a:pPr algn="l"/>
+            <a:r>
+              <a:rPr sz="1500" b="1">
+                <a:solidFill>
+                  <a:srgbClr val="0B2A4A"/>
+                </a:solidFill>
+                <a:latin typeface="Calibri"/>
+              </a:rPr>
+              <a:t>Eval scorecard</a:t>
+            </a:r>
+          </a:p>
+        </p:txBody>
+      </p:sp>
+      <p:sp>
+        <p:nvSpPr>
+          <p:cNvPr id="21" name="Rectangle 20"/>
+          <p:cNvSpPr/>
+          <p:nvPr/>
+        </p:nvSpPr>
+        <p:spPr>
+          <a:xfrm>
+            <a:off x="6858000" y="1417320"/>
+            <a:ext cx="5029200" cy="1280160"/>
+          </a:xfrm>
+          <a:prstGeom prst="rect">
+            <a:avLst/>
+          </a:prstGeom>
+          <a:solidFill>
+            <a:srgbClr val="0B2A4A"/>
+          </a:solidFill>
+          <a:ln>
+            <a:noFill/>
+          </a:ln>
+        </p:spPr>
+        <p:style>
+          <a:lnRef idx="1">
+            <a:schemeClr val="accent1"/>
+          </a:lnRef>
+          <a:fillRef idx="3">
+            <a:schemeClr val="accent1"/>
+          </a:fillRef>
+          <a:effectRef idx="2">
+            <a:schemeClr val="accent1"/>
+          </a:effectRef>
+          <a:fontRef idx="minor">
+            <a:schemeClr val="lt1"/>
+          </a:fontRef>
+        </p:style>
+        <p:txBody>
+          <a:bodyPr rtlCol="0" anchor="ctr"/>
+          <a:lstStyle/>
+          <a:p>
+            <a:pPr algn="ctr"/>
+          </a:p>
+        </p:txBody>
+      </p:sp>
+      <p:sp>
+        <p:nvSpPr>
+          <p:cNvPr id="22" name="TextBox 21"/>
+          <p:cNvSpPr txBox="1"/>
+          <p:nvPr/>
+        </p:nvSpPr>
+        <p:spPr>
+          <a:xfrm>
+            <a:off x="6858000" y="1508760"/>
+            <a:ext cx="5029200" cy="548640"/>
+          </a:xfrm>
+          <a:prstGeom prst="rect">
+            <a:avLst/>
+          </a:prstGeom>
+          <a:noFill/>
+        </p:spPr>
+        <p:txBody>
+          <a:bodyPr wrap="square" lIns="0" rIns="0" tIns="0" bIns="0">
+            <a:spAutoFit/>
+          </a:bodyPr>
+          <a:lstStyle/>
+          <a:p>
+            <a:pPr algn="ctr"/>
+            <a:r>
+              <a:rPr sz="4000" b="1">
+                <a:solidFill>
+                  <a:srgbClr val="FFFFFF"/>
+                </a:solidFill>
+                <a:latin typeface="Calibri"/>
+              </a:rPr>
+              <a:t>29 / 30</a:t>
+            </a:r>
+          </a:p>
+        </p:txBody>
+      </p:sp>
+      <p:sp>
+        <p:nvSpPr>
+          <p:cNvPr id="23" name="TextBox 22"/>
+          <p:cNvSpPr txBox="1"/>
+          <p:nvPr/>
+        </p:nvSpPr>
+        <p:spPr>
+          <a:xfrm>
+            <a:off x="6858000" y="2194560"/>
+            <a:ext cx="5029200" cy="457200"/>
+          </a:xfrm>
+          <a:prstGeom prst="rect">
+            <a:avLst/>
+          </a:prstGeom>
+          <a:noFill/>
+        </p:spPr>
+        <p:txBody>
+          <a:bodyPr wrap="square" lIns="0" rIns="0" tIns="0" bIns="0">
+            <a:spAutoFit/>
+          </a:bodyPr>
+          <a:lstStyle/>
+          <a:p>
+            <a:pPr algn="ctr"/>
+            <a:r>
+              <a:rPr sz="1100" b="0">
+                <a:solidFill>
+                  <a:srgbClr val="EF6C00"/>
+                </a:solidFill>
+                <a:latin typeface="Calibri"/>
+              </a:rPr>
+              <a:t>UI eval (Playwright, 11 screens × 3 langs)</a:t>
+            </a:r>
+          </a:p>
+        </p:txBody>
+      </p:sp>
+      <p:sp>
+        <p:nvSpPr>
+          <p:cNvPr id="24" name="TextBox 23"/>
+          <p:cNvSpPr txBox="1"/>
+          <p:nvPr/>
+        </p:nvSpPr>
+        <p:spPr>
+          <a:xfrm>
+            <a:off x="6858000" y="2880360"/>
+            <a:ext cx="5029200" cy="365760"/>
+          </a:xfrm>
+          <a:prstGeom prst="rect">
+            <a:avLst/>
+          </a:prstGeom>
+          <a:noFill/>
+        </p:spPr>
+        <p:txBody>
+          <a:bodyPr wrap="square" lIns="0" rIns="0" tIns="0" bIns="0">
+            <a:spAutoFit/>
+          </a:bodyPr>
+          <a:lstStyle/>
+          <a:p>
+            <a:pPr algn="l"/>
+            <a:r>
+              <a:rPr sz="1200" b="1">
+                <a:solidFill>
+                  <a:srgbClr val="0B2A4A"/>
+                </a:solidFill>
+                <a:latin typeface="Calibri"/>
+              </a:rPr>
+              <a:t>16 case-level evals (eval/cases.json)</a:t>
+            </a:r>
+          </a:p>
+        </p:txBody>
+      </p:sp>
+      <p:sp>
+        <p:nvSpPr>
+          <p:cNvPr id="25" name="TextBox 24"/>
+          <p:cNvSpPr txBox="1"/>
+          <p:nvPr/>
+        </p:nvSpPr>
+        <p:spPr>
+          <a:xfrm>
+            <a:off x="6858000" y="3246120"/>
+            <a:ext cx="5029200" cy="292608"/>
+          </a:xfrm>
+          <a:prstGeom prst="rect">
+            <a:avLst/>
+          </a:prstGeom>
+          <a:noFill/>
+        </p:spPr>
+        <p:txBody>
+          <a:bodyPr wrap="square" lIns="0" rIns="0" tIns="0" bIns="0">
+            <a:spAutoFit/>
+          </a:bodyPr>
+          <a:lstStyle/>
+          <a:p>
+            <a:pPr algn="l"/>
+            <a:r>
+              <a:rPr sz="1100" b="0">
                 <a:solidFill>
                   <a:srgbClr val="1A1A1A"/>
                 </a:solidFill>
                 <a:latin typeface="Calibri"/>
               </a:rPr>
-              <a:t>SOS</a:t>
-            </a:r>
-          </a:p>
-        </p:txBody>
-      </p:sp>
-      <p:sp>
-        <p:nvSpPr>
-          <p:cNvPr id="22" name="TextBox 21"/>
-          <p:cNvSpPr txBox="1"/>
-          <p:nvPr/>
-        </p:nvSpPr>
-        <p:spPr>
-          <a:xfrm>
-            <a:off x="2926080" y="3502152"/>
-            <a:ext cx="8686800" cy="365760"/>
-          </a:xfrm>
-          <a:prstGeom prst="rect">
-            <a:avLst/>
-          </a:prstGeom>
-          <a:noFill/>
-        </p:spPr>
-        <p:txBody>
-          <a:bodyPr wrap="square" lIns="0" rIns="0" tIns="0" bIns="0">
-            <a:spAutoFit/>
-          </a:bodyPr>
-          <a:lstStyle/>
-          <a:p>
-            <a:pPr algn="l"/>
-            <a:r>
-              <a:rPr sz="1300" b="0">
-                <a:solidFill>
-                  <a:srgbClr val="556677"/>
-                </a:solidFill>
-                <a:latin typeface="Calibri"/>
-              </a:rPr>
-              <a:t>One red button → SMS + live call to Dr. Saab</a:t>
-            </a:r>
-          </a:p>
-        </p:txBody>
-      </p:sp>
-      <p:sp>
-        <p:nvSpPr>
-          <p:cNvPr id="23" name="Rectangle 22"/>
+              <a:t>  Banned-FDC detection: paracetamol+flupirtine ✓</a:t>
+            </a:r>
+          </a:p>
+        </p:txBody>
+      </p:sp>
+      <p:sp>
+        <p:nvSpPr>
+          <p:cNvPr id="26" name="TextBox 25"/>
+          <p:cNvSpPr txBox="1"/>
+          <p:nvPr/>
+        </p:nvSpPr>
+        <p:spPr>
+          <a:xfrm>
+            <a:off x="6858000" y="3538728"/>
+            <a:ext cx="5029200" cy="292608"/>
+          </a:xfrm>
+          <a:prstGeom prst="rect">
+            <a:avLst/>
+          </a:prstGeom>
+          <a:noFill/>
+        </p:spPr>
+        <p:txBody>
+          <a:bodyPr wrap="square" lIns="0" rIns="0" tIns="0" bIns="0">
+            <a:spAutoFit/>
+          </a:bodyPr>
+          <a:lstStyle/>
+          <a:p>
+            <a:pPr algn="l"/>
+            <a:r>
+              <a:rPr sz="1100" b="0">
+                <a:solidFill>
+                  <a:srgbClr val="1A1A1A"/>
+                </a:solidFill>
+                <a:latin typeface="Calibri"/>
+              </a:rPr>
+              <a:t>  NSQ batch flag: cefixime CXM2509A ✓</a:t>
+            </a:r>
+          </a:p>
+        </p:txBody>
+      </p:sp>
+      <p:sp>
+        <p:nvSpPr>
+          <p:cNvPr id="27" name="TextBox 26"/>
+          <p:cNvSpPr txBox="1"/>
+          <p:nvPr/>
+        </p:nvSpPr>
+        <p:spPr>
+          <a:xfrm>
+            <a:off x="6858000" y="3831336"/>
+            <a:ext cx="5029200" cy="292608"/>
+          </a:xfrm>
+          <a:prstGeom prst="rect">
+            <a:avLst/>
+          </a:prstGeom>
+          <a:noFill/>
+        </p:spPr>
+        <p:txBody>
+          <a:bodyPr wrap="square" lIns="0" rIns="0" tIns="0" bIns="0">
+            <a:spAutoFit/>
+          </a:bodyPr>
+          <a:lstStyle/>
+          <a:p>
+            <a:pPr algn="l"/>
+            <a:r>
+              <a:rPr sz="1100" b="0">
+                <a:solidFill>
+                  <a:srgbClr val="1A1A1A"/>
+                </a:solidFill>
+                <a:latin typeface="Calibri"/>
+              </a:rPr>
+              <a:t>  Drug-food: warfarin + green leafy ✓</a:t>
+            </a:r>
+          </a:p>
+        </p:txBody>
+      </p:sp>
+      <p:sp>
+        <p:nvSpPr>
+          <p:cNvPr id="28" name="TextBox 27"/>
+          <p:cNvSpPr txBox="1"/>
+          <p:nvPr/>
+        </p:nvSpPr>
+        <p:spPr>
+          <a:xfrm>
+            <a:off x="6858000" y="4123944"/>
+            <a:ext cx="5029200" cy="292608"/>
+          </a:xfrm>
+          <a:prstGeom prst="rect">
+            <a:avLst/>
+          </a:prstGeom>
+          <a:noFill/>
+        </p:spPr>
+        <p:txBody>
+          <a:bodyPr wrap="square" lIns="0" rIns="0" tIns="0" bIns="0">
+            <a:spAutoFit/>
+          </a:bodyPr>
+          <a:lstStyle/>
+          <a:p>
+            <a:pPr algn="l"/>
+            <a:r>
+              <a:rPr sz="1100" b="0">
+                <a:solidFill>
+                  <a:srgbClr val="1A1A1A"/>
+                </a:solidFill>
+                <a:latin typeface="Calibri"/>
+              </a:rPr>
+              <a:t>  Hindi explanation grounded to citation ✓</a:t>
+            </a:r>
+          </a:p>
+        </p:txBody>
+      </p:sp>
+      <p:sp>
+        <p:nvSpPr>
+          <p:cNvPr id="29" name="TextBox 28"/>
+          <p:cNvSpPr txBox="1"/>
+          <p:nvPr/>
+        </p:nvSpPr>
+        <p:spPr>
+          <a:xfrm>
+            <a:off x="6858000" y="4416552"/>
+            <a:ext cx="5029200" cy="292608"/>
+          </a:xfrm>
+          <a:prstGeom prst="rect">
+            <a:avLst/>
+          </a:prstGeom>
+          <a:noFill/>
+        </p:spPr>
+        <p:txBody>
+          <a:bodyPr wrap="square" lIns="0" rIns="0" tIns="0" bIns="0">
+            <a:spAutoFit/>
+          </a:bodyPr>
+          <a:lstStyle/>
+          <a:p>
+            <a:pPr algn="l"/>
+            <a:r>
+              <a:rPr sz="1100" b="0">
+                <a:solidFill>
+                  <a:srgbClr val="1A1A1A"/>
+                </a:solidFill>
+                <a:latin typeface="Calibri"/>
+              </a:rPr>
+              <a:t>  Refusal on out-of-scope question ✓</a:t>
+            </a:r>
+          </a:p>
+        </p:txBody>
+      </p:sp>
+      <p:sp>
+        <p:nvSpPr>
+          <p:cNvPr id="30" name="Rectangle 29"/>
           <p:cNvSpPr/>
           <p:nvPr/>
         </p:nvSpPr>
         <p:spPr>
           <a:xfrm>
-            <a:off x="548640" y="4114800"/>
-            <a:ext cx="11109960" cy="1371600"/>
+            <a:off x="6858000" y="4937760"/>
+            <a:ext cx="5029200" cy="1280160"/>
           </a:xfrm>
           <a:prstGeom prst="rect">
             <a:avLst/>
@@ -7820,6 +8604,970 @@
       </p:sp>
       <p:sp>
         <p:nvSpPr>
+          <p:cNvPr id="31" name="TextBox 30"/>
+          <p:cNvSpPr txBox="1"/>
+          <p:nvPr/>
+        </p:nvSpPr>
+        <p:spPr>
+          <a:xfrm>
+            <a:off x="7040880" y="5029200"/>
+            <a:ext cx="4663440" cy="365760"/>
+          </a:xfrm>
+          <a:prstGeom prst="rect">
+            <a:avLst/>
+          </a:prstGeom>
+          <a:noFill/>
+        </p:spPr>
+        <p:txBody>
+          <a:bodyPr wrap="square" lIns="0" rIns="0" tIns="0" bIns="0">
+            <a:spAutoFit/>
+          </a:bodyPr>
+          <a:lstStyle/>
+          <a:p>
+            <a:pPr algn="l"/>
+            <a:r>
+              <a:rPr sz="1200" b="1">
+                <a:solidFill>
+                  <a:srgbClr val="0B2A4A"/>
+                </a:solidFill>
+                <a:latin typeface="Calibri"/>
+              </a:rPr>
+              <a:t>MLflow-style audit log</a:t>
+            </a:r>
+          </a:p>
+        </p:txBody>
+      </p:sp>
+      <p:sp>
+        <p:nvSpPr>
+          <p:cNvPr id="32" name="TextBox 31"/>
+          <p:cNvSpPr txBox="1"/>
+          <p:nvPr/>
+        </p:nvSpPr>
+        <p:spPr>
+          <a:xfrm>
+            <a:off x="7040880" y="5349240"/>
+            <a:ext cx="4663440" cy="822960"/>
+          </a:xfrm>
+          <a:prstGeom prst="rect">
+            <a:avLst/>
+          </a:prstGeom>
+          <a:noFill/>
+        </p:spPr>
+        <p:txBody>
+          <a:bodyPr wrap="square" lIns="0" rIns="0" tIns="0" bIns="0">
+            <a:spAutoFit/>
+          </a:bodyPr>
+          <a:lstStyle/>
+          <a:p>
+            <a:pPr algn="l"/>
+            <a:r>
+              <a:rPr sz="1000" b="0">
+                <a:solidFill>
+                  <a:srgbClr val="1A1A1A"/>
+                </a:solidFill>
+                <a:latin typeface="Calibri"/>
+              </a:rPr>
+              <a:t>Every LLM call (OCR, reasoning, explainer) appended to inference_log Delta table:</a:t>
+            </a:r>
+          </a:p>
+          <a:p>
+            <a:pPr algn="l"/>
+            <a:r>
+              <a:rPr sz="1000" b="0">
+                <a:solidFill>
+                  <a:srgbClr val="1A1A1A"/>
+                </a:solidFill>
+                <a:latin typeface="Calibri"/>
+              </a:rPr>
+              <a:t>prompt · model · latency · tokens · citation set · session_id</a:t>
+            </a:r>
+          </a:p>
+        </p:txBody>
+      </p:sp>
+      <p:sp>
+        <p:nvSpPr>
+          <p:cNvPr id="33" name="TextBox 32"/>
+          <p:cNvSpPr txBox="1"/>
+          <p:nvPr/>
+        </p:nvSpPr>
+        <p:spPr>
+          <a:xfrm>
+            <a:off x="457200" y="6446520"/>
+            <a:ext cx="5486400" cy="274320"/>
+          </a:xfrm>
+          <a:prstGeom prst="rect">
+            <a:avLst/>
+          </a:prstGeom>
+          <a:noFill/>
+        </p:spPr>
+        <p:txBody>
+          <a:bodyPr wrap="square" lIns="0" rIns="0" tIns="0" bIns="0">
+            <a:spAutoFit/>
+          </a:bodyPr>
+          <a:lstStyle/>
+          <a:p>
+            <a:pPr algn="l"/>
+            <a:r>
+              <a:rPr sz="900" b="0">
+                <a:solidFill>
+                  <a:srgbClr val="556677"/>
+                </a:solidFill>
+                <a:latin typeface="Calibri"/>
+              </a:rPr>
+              <a:t>Bharosa · भरोसा · Bharat Bricks Hacks 2026 · IIT Madras</a:t>
+            </a:r>
+          </a:p>
+        </p:txBody>
+      </p:sp>
+      <p:sp>
+        <p:nvSpPr>
+          <p:cNvPr id="34" name="TextBox 33"/>
+          <p:cNvSpPr txBox="1"/>
+          <p:nvPr/>
+        </p:nvSpPr>
+        <p:spPr>
+          <a:xfrm>
+            <a:off x="10607040" y="6446520"/>
+            <a:ext cx="1280160" cy="274320"/>
+          </a:xfrm>
+          <a:prstGeom prst="rect">
+            <a:avLst/>
+          </a:prstGeom>
+          <a:noFill/>
+        </p:spPr>
+        <p:txBody>
+          <a:bodyPr wrap="square" lIns="0" rIns="0" tIns="0" bIns="0">
+            <a:spAutoFit/>
+          </a:bodyPr>
+          <a:lstStyle/>
+          <a:p>
+            <a:pPr algn="r"/>
+            <a:r>
+              <a:rPr sz="900" b="0">
+                <a:solidFill>
+                  <a:srgbClr val="556677"/>
+                </a:solidFill>
+                <a:latin typeface="Calibri"/>
+              </a:rPr>
+              <a:t>5/6</a:t>
+            </a:r>
+          </a:p>
+        </p:txBody>
+      </p:sp>
+    </p:spTree>
+  </p:cSld>
+  <p:clrMapOvr>
+    <a:masterClrMapping/>
+  </p:clrMapOvr>
+</p:sld>
+</file>
+
+<file path=ppt/slides/slide6.xml><?xml version="1.0" encoding="utf-8"?>
+<p:sld xmlns:a="http://schemas.openxmlformats.org/drawingml/2006/main" xmlns:p="http://schemas.openxmlformats.org/presentationml/2006/main" xmlns:r="http://schemas.openxmlformats.org/officeDocument/2006/relationships">
+  <p:cSld>
+    <p:spTree>
+      <p:nvGrpSpPr>
+        <p:cNvPr id="1" name=""/>
+        <p:cNvGrpSpPr/>
+        <p:nvPr/>
+      </p:nvGrpSpPr>
+      <p:grpSpPr/>
+      <p:sp>
+        <p:nvSpPr>
+          <p:cNvPr id="2" name="Rectangle 1"/>
+          <p:cNvSpPr/>
+          <p:nvPr/>
+        </p:nvSpPr>
+        <p:spPr>
+          <a:xfrm>
+            <a:off x="0" y="0"/>
+            <a:ext cx="12191695" cy="6858000"/>
+          </a:xfrm>
+          <a:prstGeom prst="rect">
+            <a:avLst/>
+          </a:prstGeom>
+          <a:solidFill>
+            <a:srgbClr val="FFFFFF"/>
+          </a:solidFill>
+          <a:ln>
+            <a:noFill/>
+          </a:ln>
+        </p:spPr>
+        <p:style>
+          <a:lnRef idx="1">
+            <a:schemeClr val="accent1"/>
+          </a:lnRef>
+          <a:fillRef idx="3">
+            <a:schemeClr val="accent1"/>
+          </a:fillRef>
+          <a:effectRef idx="2">
+            <a:schemeClr val="accent1"/>
+          </a:effectRef>
+          <a:fontRef idx="minor">
+            <a:schemeClr val="lt1"/>
+          </a:fontRef>
+        </p:style>
+        <p:txBody>
+          <a:bodyPr rtlCol="0" anchor="ctr"/>
+          <a:lstStyle/>
+          <a:p>
+            <a:pPr algn="ctr"/>
+          </a:p>
+        </p:txBody>
+      </p:sp>
+      <p:sp>
+        <p:nvSpPr>
+          <p:cNvPr id="3" name="Rectangle 2"/>
+          <p:cNvSpPr/>
+          <p:nvPr/>
+        </p:nvSpPr>
+        <p:spPr>
+          <a:xfrm>
+            <a:off x="0" y="0"/>
+            <a:ext cx="12191695" cy="640080"/>
+          </a:xfrm>
+          <a:prstGeom prst="rect">
+            <a:avLst/>
+          </a:prstGeom>
+          <a:solidFill>
+            <a:srgbClr val="0B2A4A"/>
+          </a:solidFill>
+          <a:ln>
+            <a:noFill/>
+          </a:ln>
+        </p:spPr>
+        <p:style>
+          <a:lnRef idx="1">
+            <a:schemeClr val="accent1"/>
+          </a:lnRef>
+          <a:fillRef idx="3">
+            <a:schemeClr val="accent1"/>
+          </a:fillRef>
+          <a:effectRef idx="2">
+            <a:schemeClr val="accent1"/>
+          </a:effectRef>
+          <a:fontRef idx="minor">
+            <a:schemeClr val="lt1"/>
+          </a:fontRef>
+        </p:style>
+        <p:txBody>
+          <a:bodyPr rtlCol="0" anchor="ctr"/>
+          <a:lstStyle/>
+          <a:p>
+            <a:pPr algn="ctr"/>
+          </a:p>
+        </p:txBody>
+      </p:sp>
+      <p:sp>
+        <p:nvSpPr>
+          <p:cNvPr id="4" name="TextBox 3"/>
+          <p:cNvSpPr txBox="1"/>
+          <p:nvPr/>
+        </p:nvSpPr>
+        <p:spPr>
+          <a:xfrm>
+            <a:off x="457200" y="137160"/>
+            <a:ext cx="10972800" cy="457200"/>
+          </a:xfrm>
+          <a:prstGeom prst="rect">
+            <a:avLst/>
+          </a:prstGeom>
+          <a:noFill/>
+        </p:spPr>
+        <p:txBody>
+          <a:bodyPr wrap="square" lIns="0" rIns="0" tIns="0" bIns="0">
+            <a:spAutoFit/>
+          </a:bodyPr>
+          <a:lstStyle/>
+          <a:p>
+            <a:pPr algn="l"/>
+            <a:r>
+              <a:rPr sz="2000" b="1">
+                <a:solidFill>
+                  <a:srgbClr val="FFFFFF"/>
+                </a:solidFill>
+                <a:latin typeface="Calibri"/>
+              </a:rPr>
+              <a:t>What you'll see in the demo</a:t>
+            </a:r>
+          </a:p>
+        </p:txBody>
+      </p:sp>
+      <p:sp>
+        <p:nvSpPr>
+          <p:cNvPr id="5" name="TextBox 4"/>
+          <p:cNvSpPr txBox="1"/>
+          <p:nvPr/>
+        </p:nvSpPr>
+        <p:spPr>
+          <a:xfrm>
+            <a:off x="548640" y="914400"/>
+            <a:ext cx="457200" cy="457200"/>
+          </a:xfrm>
+          <a:prstGeom prst="rect">
+            <a:avLst/>
+          </a:prstGeom>
+          <a:noFill/>
+        </p:spPr>
+        <p:txBody>
+          <a:bodyPr wrap="square" lIns="0" rIns="0" tIns="0" bIns="0">
+            <a:spAutoFit/>
+          </a:bodyPr>
+          <a:lstStyle/>
+          <a:p>
+            <a:pPr algn="l"/>
+            <a:r>
+              <a:rPr sz="2200" b="1">
+                <a:solidFill>
+                  <a:srgbClr val="1565C0"/>
+                </a:solidFill>
+                <a:latin typeface="Calibri"/>
+              </a:rPr>
+              <a:t>①</a:t>
+            </a:r>
+          </a:p>
+        </p:txBody>
+      </p:sp>
+      <p:sp>
+        <p:nvSpPr>
+          <p:cNvPr id="6" name="TextBox 5"/>
+          <p:cNvSpPr txBox="1"/>
+          <p:nvPr/>
+        </p:nvSpPr>
+        <p:spPr>
+          <a:xfrm>
+            <a:off x="1097280" y="960120"/>
+            <a:ext cx="1828800" cy="365760"/>
+          </a:xfrm>
+          <a:prstGeom prst="rect">
+            <a:avLst/>
+          </a:prstGeom>
+          <a:noFill/>
+        </p:spPr>
+        <p:txBody>
+          <a:bodyPr wrap="square" lIns="0" rIns="0" tIns="0" bIns="0">
+            <a:spAutoFit/>
+          </a:bodyPr>
+          <a:lstStyle/>
+          <a:p>
+            <a:pPr algn="l"/>
+            <a:r>
+              <a:rPr sz="1400" b="1">
+                <a:solidFill>
+                  <a:srgbClr val="1A1A1A"/>
+                </a:solidFill>
+                <a:latin typeface="Calibri"/>
+              </a:rPr>
+              <a:t>Scan</a:t>
+            </a:r>
+          </a:p>
+        </p:txBody>
+      </p:sp>
+      <p:sp>
+        <p:nvSpPr>
+          <p:cNvPr id="7" name="TextBox 6"/>
+          <p:cNvSpPr txBox="1"/>
+          <p:nvPr/>
+        </p:nvSpPr>
+        <p:spPr>
+          <a:xfrm>
+            <a:off x="2926080" y="987552"/>
+            <a:ext cx="8686800" cy="365760"/>
+          </a:xfrm>
+          <a:prstGeom prst="rect">
+            <a:avLst/>
+          </a:prstGeom>
+          <a:noFill/>
+        </p:spPr>
+        <p:txBody>
+          <a:bodyPr wrap="square" lIns="0" rIns="0" tIns="0" bIns="0">
+            <a:spAutoFit/>
+          </a:bodyPr>
+          <a:lstStyle/>
+          <a:p>
+            <a:pPr algn="l"/>
+            <a:r>
+              <a:rPr sz="1300" b="0">
+                <a:solidFill>
+                  <a:srgbClr val="556677"/>
+                </a:solidFill>
+                <a:latin typeface="Calibri"/>
+              </a:rPr>
+              <a:t>OCR a real prescription via Llama-4 vision</a:t>
+            </a:r>
+          </a:p>
+        </p:txBody>
+      </p:sp>
+      <p:sp>
+        <p:nvSpPr>
+          <p:cNvPr id="8" name="TextBox 7"/>
+          <p:cNvSpPr txBox="1"/>
+          <p:nvPr/>
+        </p:nvSpPr>
+        <p:spPr>
+          <a:xfrm>
+            <a:off x="548640" y="1417320"/>
+            <a:ext cx="457200" cy="457200"/>
+          </a:xfrm>
+          <a:prstGeom prst="rect">
+            <a:avLst/>
+          </a:prstGeom>
+          <a:noFill/>
+        </p:spPr>
+        <p:txBody>
+          <a:bodyPr wrap="square" lIns="0" rIns="0" tIns="0" bIns="0">
+            <a:spAutoFit/>
+          </a:bodyPr>
+          <a:lstStyle/>
+          <a:p>
+            <a:pPr algn="l"/>
+            <a:r>
+              <a:rPr sz="2200" b="1">
+                <a:solidFill>
+                  <a:srgbClr val="1565C0"/>
+                </a:solidFill>
+                <a:latin typeface="Calibri"/>
+              </a:rPr>
+              <a:t>②</a:t>
+            </a:r>
+          </a:p>
+        </p:txBody>
+      </p:sp>
+      <p:sp>
+        <p:nvSpPr>
+          <p:cNvPr id="9" name="TextBox 8"/>
+          <p:cNvSpPr txBox="1"/>
+          <p:nvPr/>
+        </p:nvSpPr>
+        <p:spPr>
+          <a:xfrm>
+            <a:off x="1097280" y="1463040"/>
+            <a:ext cx="1828800" cy="365760"/>
+          </a:xfrm>
+          <a:prstGeom prst="rect">
+            <a:avLst/>
+          </a:prstGeom>
+          <a:noFill/>
+        </p:spPr>
+        <p:txBody>
+          <a:bodyPr wrap="square" lIns="0" rIns="0" tIns="0" bIns="0">
+            <a:spAutoFit/>
+          </a:bodyPr>
+          <a:lstStyle/>
+          <a:p>
+            <a:pPr algn="l"/>
+            <a:r>
+              <a:rPr sz="1400" b="1">
+                <a:solidFill>
+                  <a:srgbClr val="1A1A1A"/>
+                </a:solidFill>
+                <a:latin typeface="Calibri"/>
+              </a:rPr>
+              <a:t>Trust</a:t>
+            </a:r>
+          </a:p>
+        </p:txBody>
+      </p:sp>
+      <p:sp>
+        <p:nvSpPr>
+          <p:cNvPr id="10" name="TextBox 9"/>
+          <p:cNvSpPr txBox="1"/>
+          <p:nvPr/>
+        </p:nvSpPr>
+        <p:spPr>
+          <a:xfrm>
+            <a:off x="2926080" y="1490472"/>
+            <a:ext cx="8686800" cy="365760"/>
+          </a:xfrm>
+          <a:prstGeom prst="rect">
+            <a:avLst/>
+          </a:prstGeom>
+          <a:noFill/>
+        </p:spPr>
+        <p:txBody>
+          <a:bodyPr wrap="square" lIns="0" rIns="0" tIns="0" bIns="0">
+            <a:spAutoFit/>
+          </a:bodyPr>
+          <a:lstStyle/>
+          <a:p>
+            <a:pPr algn="l"/>
+            <a:r>
+              <a:rPr sz="1300" b="0">
+                <a:solidFill>
+                  <a:srgbClr val="556677"/>
+                </a:solidFill>
+                <a:latin typeface="Calibri"/>
+              </a:rPr>
+              <a:t>RAG hits CDSCO + NSQ tables; one drug flagged 🚫</a:t>
+            </a:r>
+          </a:p>
+        </p:txBody>
+      </p:sp>
+      <p:sp>
+        <p:nvSpPr>
+          <p:cNvPr id="11" name="TextBox 10"/>
+          <p:cNvSpPr txBox="1"/>
+          <p:nvPr/>
+        </p:nvSpPr>
+        <p:spPr>
+          <a:xfrm>
+            <a:off x="548640" y="1920240"/>
+            <a:ext cx="457200" cy="457200"/>
+          </a:xfrm>
+          <a:prstGeom prst="rect">
+            <a:avLst/>
+          </a:prstGeom>
+          <a:noFill/>
+        </p:spPr>
+        <p:txBody>
+          <a:bodyPr wrap="square" lIns="0" rIns="0" tIns="0" bIns="0">
+            <a:spAutoFit/>
+          </a:bodyPr>
+          <a:lstStyle/>
+          <a:p>
+            <a:pPr algn="l"/>
+            <a:r>
+              <a:rPr sz="2200" b="1">
+                <a:solidFill>
+                  <a:srgbClr val="1565C0"/>
+                </a:solidFill>
+                <a:latin typeface="Calibri"/>
+              </a:rPr>
+              <a:t>③</a:t>
+            </a:r>
+          </a:p>
+        </p:txBody>
+      </p:sp>
+      <p:sp>
+        <p:nvSpPr>
+          <p:cNvPr id="12" name="TextBox 11"/>
+          <p:cNvSpPr txBox="1"/>
+          <p:nvPr/>
+        </p:nvSpPr>
+        <p:spPr>
+          <a:xfrm>
+            <a:off x="1097280" y="1965960"/>
+            <a:ext cx="1828800" cy="365760"/>
+          </a:xfrm>
+          <a:prstGeom prst="rect">
+            <a:avLst/>
+          </a:prstGeom>
+          <a:noFill/>
+        </p:spPr>
+        <p:txBody>
+          <a:bodyPr wrap="square" lIns="0" rIns="0" tIns="0" bIns="0">
+            <a:spAutoFit/>
+          </a:bodyPr>
+          <a:lstStyle/>
+          <a:p>
+            <a:pPr algn="l"/>
+            <a:r>
+              <a:rPr sz="1400" b="1">
+                <a:solidFill>
+                  <a:srgbClr val="1A1A1A"/>
+                </a:solidFill>
+                <a:latin typeface="Calibri"/>
+              </a:rPr>
+              <a:t>Save</a:t>
+            </a:r>
+          </a:p>
+        </p:txBody>
+      </p:sp>
+      <p:sp>
+        <p:nvSpPr>
+          <p:cNvPr id="13" name="TextBox 12"/>
+          <p:cNvSpPr txBox="1"/>
+          <p:nvPr/>
+        </p:nvSpPr>
+        <p:spPr>
+          <a:xfrm>
+            <a:off x="2926080" y="1993392"/>
+            <a:ext cx="8686800" cy="365760"/>
+          </a:xfrm>
+          <a:prstGeom prst="rect">
+            <a:avLst/>
+          </a:prstGeom>
+          <a:noFill/>
+        </p:spPr>
+        <p:txBody>
+          <a:bodyPr wrap="square" lIns="0" rIns="0" tIns="0" bIns="0">
+            <a:spAutoFit/>
+          </a:bodyPr>
+          <a:lstStyle/>
+          <a:p>
+            <a:pPr algn="l"/>
+            <a:r>
+              <a:rPr sz="1300" b="0">
+                <a:solidFill>
+                  <a:srgbClr val="556677"/>
+                </a:solidFill>
+                <a:latin typeface="Calibri"/>
+              </a:rPr>
+              <a:t>₹85 → ₹12 Jan Aushadhi alternative surfaces</a:t>
+            </a:r>
+          </a:p>
+        </p:txBody>
+      </p:sp>
+      <p:sp>
+        <p:nvSpPr>
+          <p:cNvPr id="14" name="TextBox 13"/>
+          <p:cNvSpPr txBox="1"/>
+          <p:nvPr/>
+        </p:nvSpPr>
+        <p:spPr>
+          <a:xfrm>
+            <a:off x="548640" y="2423160"/>
+            <a:ext cx="457200" cy="457200"/>
+          </a:xfrm>
+          <a:prstGeom prst="rect">
+            <a:avLst/>
+          </a:prstGeom>
+          <a:noFill/>
+        </p:spPr>
+        <p:txBody>
+          <a:bodyPr wrap="square" lIns="0" rIns="0" tIns="0" bIns="0">
+            <a:spAutoFit/>
+          </a:bodyPr>
+          <a:lstStyle/>
+          <a:p>
+            <a:pPr algn="l"/>
+            <a:r>
+              <a:rPr sz="2200" b="1">
+                <a:solidFill>
+                  <a:srgbClr val="1565C0"/>
+                </a:solidFill>
+                <a:latin typeface="Calibri"/>
+              </a:rPr>
+              <a:t>④</a:t>
+            </a:r>
+          </a:p>
+        </p:txBody>
+      </p:sp>
+      <p:sp>
+        <p:nvSpPr>
+          <p:cNvPr id="15" name="TextBox 14"/>
+          <p:cNvSpPr txBox="1"/>
+          <p:nvPr/>
+        </p:nvSpPr>
+        <p:spPr>
+          <a:xfrm>
+            <a:off x="1097280" y="2468880"/>
+            <a:ext cx="1828800" cy="365760"/>
+          </a:xfrm>
+          <a:prstGeom prst="rect">
+            <a:avLst/>
+          </a:prstGeom>
+          <a:noFill/>
+        </p:spPr>
+        <p:txBody>
+          <a:bodyPr wrap="square" lIns="0" rIns="0" tIns="0" bIns="0">
+            <a:spAutoFit/>
+          </a:bodyPr>
+          <a:lstStyle/>
+          <a:p>
+            <a:pPr algn="l"/>
+            <a:r>
+              <a:rPr sz="1400" b="1">
+                <a:solidFill>
+                  <a:srgbClr val="1A1A1A"/>
+                </a:solidFill>
+                <a:latin typeface="Calibri"/>
+              </a:rPr>
+              <a:t>Speak</a:t>
+            </a:r>
+          </a:p>
+        </p:txBody>
+      </p:sp>
+      <p:sp>
+        <p:nvSpPr>
+          <p:cNvPr id="16" name="TextBox 15"/>
+          <p:cNvSpPr txBox="1"/>
+          <p:nvPr/>
+        </p:nvSpPr>
+        <p:spPr>
+          <a:xfrm>
+            <a:off x="2926080" y="2496312"/>
+            <a:ext cx="8686800" cy="365760"/>
+          </a:xfrm>
+          <a:prstGeom prst="rect">
+            <a:avLst/>
+          </a:prstGeom>
+          <a:noFill/>
+        </p:spPr>
+        <p:txBody>
+          <a:bodyPr wrap="square" lIns="0" rIns="0" tIns="0" bIns="0">
+            <a:spAutoFit/>
+          </a:bodyPr>
+          <a:lstStyle/>
+          <a:p>
+            <a:pPr algn="l"/>
+            <a:r>
+              <a:rPr sz="1300" b="0">
+                <a:solidFill>
+                  <a:srgbClr val="556677"/>
+                </a:solidFill>
+                <a:latin typeface="Calibri"/>
+              </a:rPr>
+              <a:t>Hindi voice explains the regimen via Sarvam</a:t>
+            </a:r>
+          </a:p>
+        </p:txBody>
+      </p:sp>
+      <p:sp>
+        <p:nvSpPr>
+          <p:cNvPr id="17" name="TextBox 16"/>
+          <p:cNvSpPr txBox="1"/>
+          <p:nvPr/>
+        </p:nvSpPr>
+        <p:spPr>
+          <a:xfrm>
+            <a:off x="548640" y="2926080"/>
+            <a:ext cx="457200" cy="457200"/>
+          </a:xfrm>
+          <a:prstGeom prst="rect">
+            <a:avLst/>
+          </a:prstGeom>
+          <a:noFill/>
+        </p:spPr>
+        <p:txBody>
+          <a:bodyPr wrap="square" lIns="0" rIns="0" tIns="0" bIns="0">
+            <a:spAutoFit/>
+          </a:bodyPr>
+          <a:lstStyle/>
+          <a:p>
+            <a:pPr algn="l"/>
+            <a:r>
+              <a:rPr sz="2200" b="1">
+                <a:solidFill>
+                  <a:srgbClr val="1565C0"/>
+                </a:solidFill>
+                <a:latin typeface="Calibri"/>
+              </a:rPr>
+              <a:t>⑤</a:t>
+            </a:r>
+          </a:p>
+        </p:txBody>
+      </p:sp>
+      <p:sp>
+        <p:nvSpPr>
+          <p:cNvPr id="18" name="TextBox 17"/>
+          <p:cNvSpPr txBox="1"/>
+          <p:nvPr/>
+        </p:nvSpPr>
+        <p:spPr>
+          <a:xfrm>
+            <a:off x="1097280" y="2971800"/>
+            <a:ext cx="1828800" cy="365760"/>
+          </a:xfrm>
+          <a:prstGeom prst="rect">
+            <a:avLst/>
+          </a:prstGeom>
+          <a:noFill/>
+        </p:spPr>
+        <p:txBody>
+          <a:bodyPr wrap="square" lIns="0" rIns="0" tIns="0" bIns="0">
+            <a:spAutoFit/>
+          </a:bodyPr>
+          <a:lstStyle/>
+          <a:p>
+            <a:pPr algn="l"/>
+            <a:r>
+              <a:rPr sz="1400" b="1">
+                <a:solidFill>
+                  <a:srgbClr val="1A1A1A"/>
+                </a:solidFill>
+                <a:latin typeface="Calibri"/>
+              </a:rPr>
+              <a:t>Ring</a:t>
+            </a:r>
+          </a:p>
+        </p:txBody>
+      </p:sp>
+      <p:sp>
+        <p:nvSpPr>
+          <p:cNvPr id="19" name="TextBox 18"/>
+          <p:cNvSpPr txBox="1"/>
+          <p:nvPr/>
+        </p:nvSpPr>
+        <p:spPr>
+          <a:xfrm>
+            <a:off x="2926080" y="2999232"/>
+            <a:ext cx="8686800" cy="365760"/>
+          </a:xfrm>
+          <a:prstGeom prst="rect">
+            <a:avLst/>
+          </a:prstGeom>
+          <a:noFill/>
+        </p:spPr>
+        <p:txBody>
+          <a:bodyPr wrap="square" lIns="0" rIns="0" tIns="0" bIns="0">
+            <a:spAutoFit/>
+          </a:bodyPr>
+          <a:lstStyle/>
+          <a:p>
+            <a:pPr algn="l"/>
+            <a:r>
+              <a:rPr sz="1300" b="0">
+                <a:solidFill>
+                  <a:srgbClr val="556677"/>
+                </a:solidFill>
+                <a:latin typeface="Calibri"/>
+              </a:rPr>
+              <a:t>20s countdown → Bolna calls patient in Hindi (LIVE)</a:t>
+            </a:r>
+          </a:p>
+        </p:txBody>
+      </p:sp>
+      <p:sp>
+        <p:nvSpPr>
+          <p:cNvPr id="20" name="TextBox 19"/>
+          <p:cNvSpPr txBox="1"/>
+          <p:nvPr/>
+        </p:nvSpPr>
+        <p:spPr>
+          <a:xfrm>
+            <a:off x="548640" y="3429000"/>
+            <a:ext cx="457200" cy="457200"/>
+          </a:xfrm>
+          <a:prstGeom prst="rect">
+            <a:avLst/>
+          </a:prstGeom>
+          <a:noFill/>
+        </p:spPr>
+        <p:txBody>
+          <a:bodyPr wrap="square" lIns="0" rIns="0" tIns="0" bIns="0">
+            <a:spAutoFit/>
+          </a:bodyPr>
+          <a:lstStyle/>
+          <a:p>
+            <a:pPr algn="l"/>
+            <a:r>
+              <a:rPr sz="2200" b="1">
+                <a:solidFill>
+                  <a:srgbClr val="1565C0"/>
+                </a:solidFill>
+                <a:latin typeface="Calibri"/>
+              </a:rPr>
+              <a:t>⑥</a:t>
+            </a:r>
+          </a:p>
+        </p:txBody>
+      </p:sp>
+      <p:sp>
+        <p:nvSpPr>
+          <p:cNvPr id="21" name="TextBox 20"/>
+          <p:cNvSpPr txBox="1"/>
+          <p:nvPr/>
+        </p:nvSpPr>
+        <p:spPr>
+          <a:xfrm>
+            <a:off x="1097280" y="3474720"/>
+            <a:ext cx="1828800" cy="365760"/>
+          </a:xfrm>
+          <a:prstGeom prst="rect">
+            <a:avLst/>
+          </a:prstGeom>
+          <a:noFill/>
+        </p:spPr>
+        <p:txBody>
+          <a:bodyPr wrap="square" lIns="0" rIns="0" tIns="0" bIns="0">
+            <a:spAutoFit/>
+          </a:bodyPr>
+          <a:lstStyle/>
+          <a:p>
+            <a:pPr algn="l"/>
+            <a:r>
+              <a:rPr sz="1400" b="1">
+                <a:solidFill>
+                  <a:srgbClr val="1A1A1A"/>
+                </a:solidFill>
+                <a:latin typeface="Calibri"/>
+              </a:rPr>
+              <a:t>SOS</a:t>
+            </a:r>
+          </a:p>
+        </p:txBody>
+      </p:sp>
+      <p:sp>
+        <p:nvSpPr>
+          <p:cNvPr id="22" name="TextBox 21"/>
+          <p:cNvSpPr txBox="1"/>
+          <p:nvPr/>
+        </p:nvSpPr>
+        <p:spPr>
+          <a:xfrm>
+            <a:off x="2926080" y="3502152"/>
+            <a:ext cx="8686800" cy="365760"/>
+          </a:xfrm>
+          <a:prstGeom prst="rect">
+            <a:avLst/>
+          </a:prstGeom>
+          <a:noFill/>
+        </p:spPr>
+        <p:txBody>
+          <a:bodyPr wrap="square" lIns="0" rIns="0" tIns="0" bIns="0">
+            <a:spAutoFit/>
+          </a:bodyPr>
+          <a:lstStyle/>
+          <a:p>
+            <a:pPr algn="l"/>
+            <a:r>
+              <a:rPr sz="1300" b="0">
+                <a:solidFill>
+                  <a:srgbClr val="556677"/>
+                </a:solidFill>
+                <a:latin typeface="Calibri"/>
+              </a:rPr>
+              <a:t>One red button → SMS + live call to Dr. Saab</a:t>
+            </a:r>
+          </a:p>
+        </p:txBody>
+      </p:sp>
+      <p:sp>
+        <p:nvSpPr>
+          <p:cNvPr id="23" name="Rectangle 22"/>
+          <p:cNvSpPr/>
+          <p:nvPr/>
+        </p:nvSpPr>
+        <p:spPr>
+          <a:xfrm>
+            <a:off x="548640" y="4114800"/>
+            <a:ext cx="11109960" cy="1371600"/>
+          </a:xfrm>
+          <a:prstGeom prst="rect">
+            <a:avLst/>
+          </a:prstGeom>
+          <a:solidFill>
+            <a:srgbClr val="ECEFF4"/>
+          </a:solidFill>
+          <a:ln>
+            <a:noFill/>
+          </a:ln>
+        </p:spPr>
+        <p:style>
+          <a:lnRef idx="1">
+            <a:schemeClr val="accent1"/>
+          </a:lnRef>
+          <a:fillRef idx="3">
+            <a:schemeClr val="accent1"/>
+          </a:fillRef>
+          <a:effectRef idx="2">
+            <a:schemeClr val="accent1"/>
+          </a:effectRef>
+          <a:fontRef idx="minor">
+            <a:schemeClr val="lt1"/>
+          </a:fontRef>
+        </p:style>
+        <p:txBody>
+          <a:bodyPr rtlCol="0" anchor="ctr"/>
+          <a:lstStyle/>
+          <a:p>
+            <a:pPr algn="ctr"/>
+          </a:p>
+        </p:txBody>
+      </p:sp>
+      <p:sp>
+        <p:nvSpPr>
           <p:cNvPr id="24" name="TextBox 23"/>
           <p:cNvSpPr txBox="1"/>
           <p:nvPr/>
@@ -8023,7 +9771,7 @@
                 </a:solidFill>
                 <a:latin typeface="Calibri"/>
               </a:rPr>
-              <a:t>5/5</a:t>
+              <a:t>6/6</a:t>
             </a:r>
           </a:p>
         </p:txBody>
